--- a/replication_athey2025.pptx
+++ b/replication_athey2025.pptx
@@ -5,19 +5,18 @@
     <p:sldMasterId id="2147483648" r:id="rId1"/>
   </p:sldMasterIdLst>
   <p:sldIdLst>
-    <p:sldId id="256" r:id="rId7"/>
-    <p:sldId id="257" r:id="rId8"/>
-    <p:sldId id="258" r:id="rId9"/>
-    <p:sldId id="259" r:id="rId10"/>
-    <p:sldId id="260" r:id="rId11"/>
-    <p:sldId id="261" r:id="rId12"/>
-    <p:sldId id="262" r:id="rId13"/>
-    <p:sldId id="263" r:id="rId14"/>
-    <p:sldId id="264" r:id="rId15"/>
-    <p:sldId id="265" r:id="rId16"/>
-    <p:sldId id="266" r:id="rId17"/>
+    <p:sldId id="256" r:id="rId2"/>
+    <p:sldId id="257" r:id="rId3"/>
+    <p:sldId id="258" r:id="rId4"/>
+    <p:sldId id="259" r:id="rId5"/>
+    <p:sldId id="260" r:id="rId6"/>
+    <p:sldId id="261" r:id="rId7"/>
+    <p:sldId id="262" r:id="rId8"/>
+    <p:sldId id="264" r:id="rId9"/>
+    <p:sldId id="265" r:id="rId10"/>
+    <p:sldId id="266" r:id="rId11"/>
   </p:sldIdLst>
-  <p:sldSz cx="12188952" cy="6858000" type="screen4x3"/>
+  <p:sldSz cx="12188825" cy="6858000"/>
   <p:notesSz cx="6858000" cy="9144000"/>
   <p:defaultTextStyle>
     <a:defPPr>
@@ -114,7 +113,420 @@
       </a:defRPr>
     </a:lvl9pPr>
   </p:defaultTextStyle>
+  <p:extLst>
+    <p:ext uri="{EFAFB233-063F-42B5-8137-9DF3F51BA10A}">
+      <p15:sldGuideLst xmlns:p15="http://schemas.microsoft.com/office/powerpoint/2012/main">
+        <p15:guide id="1" orient="horz" pos="2160">
+          <p15:clr>
+            <a:srgbClr val="A4A3A4"/>
+          </p15:clr>
+        </p15:guide>
+        <p15:guide id="2" pos="2880">
+          <p15:clr>
+            <a:srgbClr val="A4A3A4"/>
+          </p15:clr>
+        </p15:guide>
+      </p15:sldGuideLst>
+    </p:ext>
+  </p:extLst>
 </p:presentation>
+</file>
+
+<file path=ppt/revisionInfo.xml><?xml version="1.0" encoding="utf-8"?>
+<p1510:revInfo xmlns:a="http://schemas.openxmlformats.org/drawingml/2006/main" xmlns:r="http://schemas.openxmlformats.org/officeDocument/2006/relationships" xmlns:p1510="http://schemas.microsoft.com/office/powerpoint/2015/10/main">
+  <p1510:revLst>
+    <p1510:client id="{616314C6-1D5A-4846-9391-BA0B672BA128}" v="6" dt="2026-06-04T00:21:07.704"/>
+  </p1510:revLst>
+</p1510:revInfo>
+</file>
+
+<file path=ppt/changesInfos/changesInfo1.xml><?xml version="1.0" encoding="utf-8"?>
+<pc:chgInfo xmlns:a="http://schemas.openxmlformats.org/drawingml/2006/main" xmlns:r="http://schemas.openxmlformats.org/officeDocument/2006/relationships" xmlns:ac="http://schemas.microsoft.com/office/drawing/2013/main/command" xmlns:pc="http://schemas.microsoft.com/office/powerpoint/2013/main/command">
+  <pc:docChgLst>
+    <pc:chgData name="Jack Chepin" userId="df2f1f972283bbc2" providerId="LiveId" clId="{CA92788F-C1EA-4B14-92BD-8D9CB53927FA}"/>
+    <pc:docChg chg="undo custSel delSld modSld">
+      <pc:chgData name="Jack Chepin" userId="df2f1f972283bbc2" providerId="LiveId" clId="{CA92788F-C1EA-4B14-92BD-8D9CB53927FA}" dt="2026-06-04T02:04:32.430" v="522" actId="1076"/>
+      <pc:docMkLst>
+        <pc:docMk/>
+      </pc:docMkLst>
+      <pc:sldChg chg="modSp mod">
+        <pc:chgData name="Jack Chepin" userId="df2f1f972283bbc2" providerId="LiveId" clId="{CA92788F-C1EA-4B14-92BD-8D9CB53927FA}" dt="2026-06-03T06:28:32.746" v="489" actId="20577"/>
+        <pc:sldMkLst>
+          <pc:docMk/>
+          <pc:sldMk cId="0" sldId="256"/>
+        </pc:sldMkLst>
+        <pc:spChg chg="mod">
+          <ac:chgData name="Jack Chepin" userId="df2f1f972283bbc2" providerId="LiveId" clId="{CA92788F-C1EA-4B14-92BD-8D9CB53927FA}" dt="2026-06-03T06:28:32.746" v="489" actId="20577"/>
+          <ac:spMkLst>
+            <pc:docMk/>
+            <pc:sldMk cId="0" sldId="256"/>
+            <ac:spMk id="6" creationId="{00000000-0000-0000-0000-000000000000}"/>
+          </ac:spMkLst>
+        </pc:spChg>
+      </pc:sldChg>
+      <pc:sldChg chg="modSp mod">
+        <pc:chgData name="Jack Chepin" userId="df2f1f972283bbc2" providerId="LiveId" clId="{CA92788F-C1EA-4B14-92BD-8D9CB53927FA}" dt="2026-06-03T02:20:27.387" v="69" actId="20577"/>
+        <pc:sldMkLst>
+          <pc:docMk/>
+          <pc:sldMk cId="0" sldId="257"/>
+        </pc:sldMkLst>
+        <pc:spChg chg="mod">
+          <ac:chgData name="Jack Chepin" userId="df2f1f972283bbc2" providerId="LiveId" clId="{CA92788F-C1EA-4B14-92BD-8D9CB53927FA}" dt="2026-06-03T02:20:27.387" v="69" actId="20577"/>
+          <ac:spMkLst>
+            <pc:docMk/>
+            <pc:sldMk cId="0" sldId="257"/>
+            <ac:spMk id="4" creationId="{00000000-0000-0000-0000-000000000000}"/>
+          </ac:spMkLst>
+        </pc:spChg>
+        <pc:spChg chg="mod">
+          <ac:chgData name="Jack Chepin" userId="df2f1f972283bbc2" providerId="LiveId" clId="{CA92788F-C1EA-4B14-92BD-8D9CB53927FA}" dt="2026-06-02T17:56:03.804" v="38" actId="1076"/>
+          <ac:spMkLst>
+            <pc:docMk/>
+            <pc:sldMk cId="0" sldId="257"/>
+            <ac:spMk id="6" creationId="{00000000-0000-0000-0000-000000000000}"/>
+          </ac:spMkLst>
+        </pc:spChg>
+        <pc:spChg chg="mod">
+          <ac:chgData name="Jack Chepin" userId="df2f1f972283bbc2" providerId="LiveId" clId="{CA92788F-C1EA-4B14-92BD-8D9CB53927FA}" dt="2026-06-02T17:56:07.401" v="39" actId="1076"/>
+          <ac:spMkLst>
+            <pc:docMk/>
+            <pc:sldMk cId="0" sldId="257"/>
+            <ac:spMk id="7" creationId="{00000000-0000-0000-0000-000000000000}"/>
+          </ac:spMkLst>
+        </pc:spChg>
+        <pc:spChg chg="mod">
+          <ac:chgData name="Jack Chepin" userId="df2f1f972283bbc2" providerId="LiveId" clId="{CA92788F-C1EA-4B14-92BD-8D9CB53927FA}" dt="2026-06-02T17:56:15.471" v="40" actId="1076"/>
+          <ac:spMkLst>
+            <pc:docMk/>
+            <pc:sldMk cId="0" sldId="257"/>
+            <ac:spMk id="8" creationId="{00000000-0000-0000-0000-000000000000}"/>
+          </ac:spMkLst>
+        </pc:spChg>
+        <pc:spChg chg="mod">
+          <ac:chgData name="Jack Chepin" userId="df2f1f972283bbc2" providerId="LiveId" clId="{CA92788F-C1EA-4B14-92BD-8D9CB53927FA}" dt="2026-06-02T17:56:39.523" v="44" actId="1076"/>
+          <ac:spMkLst>
+            <pc:docMk/>
+            <pc:sldMk cId="0" sldId="257"/>
+            <ac:spMk id="9" creationId="{00000000-0000-0000-0000-000000000000}"/>
+          </ac:spMkLst>
+        </pc:spChg>
+        <pc:picChg chg="mod">
+          <ac:chgData name="Jack Chepin" userId="df2f1f972283bbc2" providerId="LiveId" clId="{CA92788F-C1EA-4B14-92BD-8D9CB53927FA}" dt="2026-06-02T17:56:45.927" v="46" actId="1076"/>
+          <ac:picMkLst>
+            <pc:docMk/>
+            <pc:sldMk cId="0" sldId="257"/>
+            <ac:picMk id="14" creationId="{B776EBDB-5E1A-3C38-A745-A9CFF7D1795E}"/>
+          </ac:picMkLst>
+        </pc:picChg>
+      </pc:sldChg>
+      <pc:sldChg chg="addSp modSp mod">
+        <pc:chgData name="Jack Chepin" userId="df2f1f972283bbc2" providerId="LiveId" clId="{CA92788F-C1EA-4B14-92BD-8D9CB53927FA}" dt="2026-06-04T00:21:11.057" v="505" actId="1076"/>
+        <pc:sldMkLst>
+          <pc:docMk/>
+          <pc:sldMk cId="0" sldId="258"/>
+        </pc:sldMkLst>
+        <pc:spChg chg="mod">
+          <ac:chgData name="Jack Chepin" userId="df2f1f972283bbc2" providerId="LiveId" clId="{CA92788F-C1EA-4B14-92BD-8D9CB53927FA}" dt="2026-06-03T05:59:30.995" v="89" actId="20577"/>
+          <ac:spMkLst>
+            <pc:docMk/>
+            <pc:sldMk cId="0" sldId="258"/>
+            <ac:spMk id="7" creationId="{00000000-0000-0000-0000-000000000000}"/>
+          </ac:spMkLst>
+        </pc:spChg>
+        <pc:spChg chg="mod">
+          <ac:chgData name="Jack Chepin" userId="df2f1f972283bbc2" providerId="LiveId" clId="{CA92788F-C1EA-4B14-92BD-8D9CB53927FA}" dt="2026-06-03T06:30:55.441" v="492" actId="20577"/>
+          <ac:spMkLst>
+            <pc:docMk/>
+            <pc:sldMk cId="0" sldId="258"/>
+            <ac:spMk id="11" creationId="{00000000-0000-0000-0000-000000000000}"/>
+          </ac:spMkLst>
+        </pc:spChg>
+        <pc:picChg chg="add mod">
+          <ac:chgData name="Jack Chepin" userId="df2f1f972283bbc2" providerId="LiveId" clId="{CA92788F-C1EA-4B14-92BD-8D9CB53927FA}" dt="2026-06-04T00:16:05.798" v="496" actId="1076"/>
+          <ac:picMkLst>
+            <pc:docMk/>
+            <pc:sldMk cId="0" sldId="258"/>
+            <ac:picMk id="15" creationId="{1AA8E5E8-1D0E-FA93-F65F-5D600F999AB0}"/>
+          </ac:picMkLst>
+        </pc:picChg>
+        <pc:picChg chg="add mod">
+          <ac:chgData name="Jack Chepin" userId="df2f1f972283bbc2" providerId="LiveId" clId="{CA92788F-C1EA-4B14-92BD-8D9CB53927FA}" dt="2026-06-04T00:21:11.057" v="505" actId="1076"/>
+          <ac:picMkLst>
+            <pc:docMk/>
+            <pc:sldMk cId="0" sldId="258"/>
+            <ac:picMk id="16" creationId="{1B04B37C-D3D1-C019-6EAE-A78629E0190F}"/>
+          </ac:picMkLst>
+        </pc:picChg>
+      </pc:sldChg>
+      <pc:sldChg chg="delSp modSp mod">
+        <pc:chgData name="Jack Chepin" userId="df2f1f972283bbc2" providerId="LiveId" clId="{CA92788F-C1EA-4B14-92BD-8D9CB53927FA}" dt="2026-06-03T06:15:35.265" v="452" actId="20577"/>
+        <pc:sldMkLst>
+          <pc:docMk/>
+          <pc:sldMk cId="0" sldId="259"/>
+        </pc:sldMkLst>
+        <pc:spChg chg="mod">
+          <ac:chgData name="Jack Chepin" userId="df2f1f972283bbc2" providerId="LiveId" clId="{CA92788F-C1EA-4B14-92BD-8D9CB53927FA}" dt="2026-06-02T17:23:01.396" v="25" actId="1076"/>
+          <ac:spMkLst>
+            <pc:docMk/>
+            <pc:sldMk cId="0" sldId="259"/>
+            <ac:spMk id="4" creationId="{00000000-0000-0000-0000-000000000000}"/>
+          </ac:spMkLst>
+        </pc:spChg>
+        <pc:spChg chg="mod">
+          <ac:chgData name="Jack Chepin" userId="df2f1f972283bbc2" providerId="LiveId" clId="{CA92788F-C1EA-4B14-92BD-8D9CB53927FA}" dt="2026-06-02T17:22:53.890" v="24" actId="1076"/>
+          <ac:spMkLst>
+            <pc:docMk/>
+            <pc:sldMk cId="0" sldId="259"/>
+            <ac:spMk id="5" creationId="{00000000-0000-0000-0000-000000000000}"/>
+          </ac:spMkLst>
+        </pc:spChg>
+        <pc:spChg chg="mod">
+          <ac:chgData name="Jack Chepin" userId="df2f1f972283bbc2" providerId="LiveId" clId="{CA92788F-C1EA-4B14-92BD-8D9CB53927FA}" dt="2026-06-02T17:23:05.402" v="26" actId="1076"/>
+          <ac:spMkLst>
+            <pc:docMk/>
+            <pc:sldMk cId="0" sldId="259"/>
+            <ac:spMk id="6" creationId="{00000000-0000-0000-0000-000000000000}"/>
+          </ac:spMkLst>
+        </pc:spChg>
+        <pc:spChg chg="mod">
+          <ac:chgData name="Jack Chepin" userId="df2f1f972283bbc2" providerId="LiveId" clId="{CA92788F-C1EA-4B14-92BD-8D9CB53927FA}" dt="2026-06-03T06:11:14.596" v="205" actId="20577"/>
+          <ac:spMkLst>
+            <pc:docMk/>
+            <pc:sldMk cId="0" sldId="259"/>
+            <ac:spMk id="7" creationId="{00000000-0000-0000-0000-000000000000}"/>
+          </ac:spMkLst>
+        </pc:spChg>
+        <pc:spChg chg="mod">
+          <ac:chgData name="Jack Chepin" userId="df2f1f972283bbc2" providerId="LiveId" clId="{CA92788F-C1EA-4B14-92BD-8D9CB53927FA}" dt="2026-06-02T17:22:16.841" v="18" actId="1076"/>
+          <ac:spMkLst>
+            <pc:docMk/>
+            <pc:sldMk cId="0" sldId="259"/>
+            <ac:spMk id="8" creationId="{00000000-0000-0000-0000-000000000000}"/>
+          </ac:spMkLst>
+        </pc:spChg>
+        <pc:spChg chg="mod">
+          <ac:chgData name="Jack Chepin" userId="df2f1f972283bbc2" providerId="LiveId" clId="{CA92788F-C1EA-4B14-92BD-8D9CB53927FA}" dt="2026-06-02T17:22:09.821" v="17" actId="1076"/>
+          <ac:spMkLst>
+            <pc:docMk/>
+            <pc:sldMk cId="0" sldId="259"/>
+            <ac:spMk id="9" creationId="{00000000-0000-0000-0000-000000000000}"/>
+          </ac:spMkLst>
+        </pc:spChg>
+        <pc:spChg chg="mod">
+          <ac:chgData name="Jack Chepin" userId="df2f1f972283bbc2" providerId="LiveId" clId="{CA92788F-C1EA-4B14-92BD-8D9CB53927FA}" dt="2026-06-03T06:11:30.590" v="219" actId="20577"/>
+          <ac:spMkLst>
+            <pc:docMk/>
+            <pc:sldMk cId="0" sldId="259"/>
+            <ac:spMk id="10" creationId="{00000000-0000-0000-0000-000000000000}"/>
+          </ac:spMkLst>
+        </pc:spChg>
+        <pc:spChg chg="mod">
+          <ac:chgData name="Jack Chepin" userId="df2f1f972283bbc2" providerId="LiveId" clId="{CA92788F-C1EA-4B14-92BD-8D9CB53927FA}" dt="2026-06-03T06:15:35.265" v="452" actId="20577"/>
+          <ac:spMkLst>
+            <pc:docMk/>
+            <pc:sldMk cId="0" sldId="259"/>
+            <ac:spMk id="11" creationId="{00000000-0000-0000-0000-000000000000}"/>
+          </ac:spMkLst>
+        </pc:spChg>
+      </pc:sldChg>
+      <pc:sldChg chg="addSp delSp modSp mod">
+        <pc:chgData name="Jack Chepin" userId="df2f1f972283bbc2" providerId="LiveId" clId="{CA92788F-C1EA-4B14-92BD-8D9CB53927FA}" dt="2026-06-04T00:17:52.333" v="503" actId="1076"/>
+        <pc:sldMkLst>
+          <pc:docMk/>
+          <pc:sldMk cId="0" sldId="261"/>
+        </pc:sldMkLst>
+        <pc:spChg chg="mod">
+          <ac:chgData name="Jack Chepin" userId="df2f1f972283bbc2" providerId="LiveId" clId="{CA92788F-C1EA-4B14-92BD-8D9CB53927FA}" dt="2026-06-03T06:42:26.984" v="493" actId="1076"/>
+          <ac:spMkLst>
+            <pc:docMk/>
+            <pc:sldMk cId="0" sldId="261"/>
+            <ac:spMk id="5" creationId="{00000000-0000-0000-0000-000000000000}"/>
+          </ac:spMkLst>
+        </pc:spChg>
+        <pc:spChg chg="mod">
+          <ac:chgData name="Jack Chepin" userId="df2f1f972283bbc2" providerId="LiveId" clId="{CA92788F-C1EA-4B14-92BD-8D9CB53927FA}" dt="2026-06-03T02:50:22.521" v="88" actId="20577"/>
+          <ac:spMkLst>
+            <pc:docMk/>
+            <pc:sldMk cId="0" sldId="261"/>
+            <ac:spMk id="8" creationId="{00000000-0000-0000-0000-000000000000}"/>
+          </ac:spMkLst>
+        </pc:spChg>
+        <pc:spChg chg="mod">
+          <ac:chgData name="Jack Chepin" userId="df2f1f972283bbc2" providerId="LiveId" clId="{CA92788F-C1EA-4B14-92BD-8D9CB53927FA}" dt="2026-06-03T06:42:32.873" v="494" actId="1076"/>
+          <ac:spMkLst>
+            <pc:docMk/>
+            <pc:sldMk cId="0" sldId="261"/>
+            <ac:spMk id="10" creationId="{00000000-0000-0000-0000-000000000000}"/>
+          </ac:spMkLst>
+        </pc:spChg>
+        <pc:picChg chg="add mod">
+          <ac:chgData name="Jack Chepin" userId="df2f1f972283bbc2" providerId="LiveId" clId="{CA92788F-C1EA-4B14-92BD-8D9CB53927FA}" dt="2026-06-03T06:17:03.785" v="458" actId="14100"/>
+          <ac:picMkLst>
+            <pc:docMk/>
+            <pc:sldMk cId="0" sldId="261"/>
+            <ac:picMk id="17" creationId="{4E07CFDC-EFD7-A147-9830-C152EAF7BE8C}"/>
+          </ac:picMkLst>
+        </pc:picChg>
+        <pc:picChg chg="add del mod">
+          <ac:chgData name="Jack Chepin" userId="df2f1f972283bbc2" providerId="LiveId" clId="{CA92788F-C1EA-4B14-92BD-8D9CB53927FA}" dt="2026-06-04T00:17:29.343" v="499" actId="21"/>
+          <ac:picMkLst>
+            <pc:docMk/>
+            <pc:sldMk cId="0" sldId="261"/>
+            <ac:picMk id="18" creationId="{B245C6B9-A09A-6B26-D992-AA5007127135}"/>
+          </ac:picMkLst>
+        </pc:picChg>
+        <pc:picChg chg="add mod">
+          <ac:chgData name="Jack Chepin" userId="df2f1f972283bbc2" providerId="LiveId" clId="{CA92788F-C1EA-4B14-92BD-8D9CB53927FA}" dt="2026-06-04T00:17:52.333" v="503" actId="1076"/>
+          <ac:picMkLst>
+            <pc:docMk/>
+            <pc:sldMk cId="0" sldId="261"/>
+            <ac:picMk id="20" creationId="{7018165F-12F6-3D4A-A1BC-49B7CDFFCCEB}"/>
+          </ac:picMkLst>
+        </pc:picChg>
+      </pc:sldChg>
+      <pc:sldChg chg="modSp mod">
+        <pc:chgData name="Jack Chepin" userId="df2f1f972283bbc2" providerId="LiveId" clId="{CA92788F-C1EA-4B14-92BD-8D9CB53927FA}" dt="2026-06-03T06:19:02.718" v="468" actId="20577"/>
+        <pc:sldMkLst>
+          <pc:docMk/>
+          <pc:sldMk cId="0" sldId="262"/>
+        </pc:sldMkLst>
+        <pc:spChg chg="mod">
+          <ac:chgData name="Jack Chepin" userId="df2f1f972283bbc2" providerId="LiveId" clId="{CA92788F-C1EA-4B14-92BD-8D9CB53927FA}" dt="2026-06-03T06:19:02.718" v="468" actId="20577"/>
+          <ac:spMkLst>
+            <pc:docMk/>
+            <pc:sldMk cId="0" sldId="262"/>
+            <ac:spMk id="5" creationId="{00000000-0000-0000-0000-000000000000}"/>
+          </ac:spMkLst>
+        </pc:spChg>
+        <pc:graphicFrameChg chg="modGraphic">
+          <ac:chgData name="Jack Chepin" userId="df2f1f972283bbc2" providerId="LiveId" clId="{CA92788F-C1EA-4B14-92BD-8D9CB53927FA}" dt="2026-06-03T06:18:02.388" v="464" actId="20577"/>
+          <ac:graphicFrameMkLst>
+            <pc:docMk/>
+            <pc:sldMk cId="0" sldId="262"/>
+            <ac:graphicFrameMk id="4" creationId="{00000000-0000-0000-0000-000000000000}"/>
+          </ac:graphicFrameMkLst>
+        </pc:graphicFrameChg>
+      </pc:sldChg>
+      <pc:sldChg chg="addSp modSp del mod">
+        <pc:chgData name="Jack Chepin" userId="df2f1f972283bbc2" providerId="LiveId" clId="{CA92788F-C1EA-4B14-92BD-8D9CB53927FA}" dt="2026-06-03T06:19:29.288" v="469" actId="2696"/>
+        <pc:sldMkLst>
+          <pc:docMk/>
+          <pc:sldMk cId="0" sldId="263"/>
+        </pc:sldMkLst>
+      </pc:sldChg>
+      <pc:sldChg chg="delSp modSp mod">
+        <pc:chgData name="Jack Chepin" userId="df2f1f972283bbc2" providerId="LiveId" clId="{CA92788F-C1EA-4B14-92BD-8D9CB53927FA}" dt="2026-06-04T02:04:32.430" v="522" actId="1076"/>
+        <pc:sldMkLst>
+          <pc:docMk/>
+          <pc:sldMk cId="0" sldId="264"/>
+        </pc:sldMkLst>
+        <pc:spChg chg="mod">
+          <ac:chgData name="Jack Chepin" userId="df2f1f972283bbc2" providerId="LiveId" clId="{CA92788F-C1EA-4B14-92BD-8D9CB53927FA}" dt="2026-06-04T02:03:44.849" v="513" actId="1076"/>
+          <ac:spMkLst>
+            <pc:docMk/>
+            <pc:sldMk cId="0" sldId="264"/>
+            <ac:spMk id="4" creationId="{00000000-0000-0000-0000-000000000000}"/>
+          </ac:spMkLst>
+        </pc:spChg>
+        <pc:spChg chg="mod">
+          <ac:chgData name="Jack Chepin" userId="df2f1f972283bbc2" providerId="LiveId" clId="{CA92788F-C1EA-4B14-92BD-8D9CB53927FA}" dt="2026-06-04T02:03:56.349" v="516" actId="1076"/>
+          <ac:spMkLst>
+            <pc:docMk/>
+            <pc:sldMk cId="0" sldId="264"/>
+            <ac:spMk id="5" creationId="{00000000-0000-0000-0000-000000000000}"/>
+          </ac:spMkLst>
+        </pc:spChg>
+        <pc:spChg chg="mod">
+          <ac:chgData name="Jack Chepin" userId="df2f1f972283bbc2" providerId="LiveId" clId="{CA92788F-C1EA-4B14-92BD-8D9CB53927FA}" dt="2026-06-04T02:03:53.111" v="515" actId="1076"/>
+          <ac:spMkLst>
+            <pc:docMk/>
+            <pc:sldMk cId="0" sldId="264"/>
+            <ac:spMk id="6" creationId="{00000000-0000-0000-0000-000000000000}"/>
+          </ac:spMkLst>
+        </pc:spChg>
+        <pc:spChg chg="mod">
+          <ac:chgData name="Jack Chepin" userId="df2f1f972283bbc2" providerId="LiveId" clId="{CA92788F-C1EA-4B14-92BD-8D9CB53927FA}" dt="2026-06-04T02:04:28.945" v="521" actId="1076"/>
+          <ac:spMkLst>
+            <pc:docMk/>
+            <pc:sldMk cId="0" sldId="264"/>
+            <ac:spMk id="7" creationId="{00000000-0000-0000-0000-000000000000}"/>
+          </ac:spMkLst>
+        </pc:spChg>
+        <pc:spChg chg="mod">
+          <ac:chgData name="Jack Chepin" userId="df2f1f972283bbc2" providerId="LiveId" clId="{CA92788F-C1EA-4B14-92BD-8D9CB53927FA}" dt="2026-06-04T02:04:04.474" v="517" actId="1076"/>
+          <ac:spMkLst>
+            <pc:docMk/>
+            <pc:sldMk cId="0" sldId="264"/>
+            <ac:spMk id="8" creationId="{00000000-0000-0000-0000-000000000000}"/>
+          </ac:spMkLst>
+        </pc:spChg>
+        <pc:spChg chg="mod">
+          <ac:chgData name="Jack Chepin" userId="df2f1f972283bbc2" providerId="LiveId" clId="{CA92788F-C1EA-4B14-92BD-8D9CB53927FA}" dt="2026-06-04T02:04:10.821" v="518" actId="1076"/>
+          <ac:spMkLst>
+            <pc:docMk/>
+            <pc:sldMk cId="0" sldId="264"/>
+            <ac:spMk id="9" creationId="{00000000-0000-0000-0000-000000000000}"/>
+          </ac:spMkLst>
+        </pc:spChg>
+        <pc:spChg chg="mod">
+          <ac:chgData name="Jack Chepin" userId="df2f1f972283bbc2" providerId="LiveId" clId="{CA92788F-C1EA-4B14-92BD-8D9CB53927FA}" dt="2026-06-04T02:04:15.604" v="519" actId="1076"/>
+          <ac:spMkLst>
+            <pc:docMk/>
+            <pc:sldMk cId="0" sldId="264"/>
+            <ac:spMk id="10" creationId="{00000000-0000-0000-0000-000000000000}"/>
+          </ac:spMkLst>
+        </pc:spChg>
+        <pc:spChg chg="mod">
+          <ac:chgData name="Jack Chepin" userId="df2f1f972283bbc2" providerId="LiveId" clId="{CA92788F-C1EA-4B14-92BD-8D9CB53927FA}" dt="2026-06-04T02:04:32.430" v="522" actId="1076"/>
+          <ac:spMkLst>
+            <pc:docMk/>
+            <pc:sldMk cId="0" sldId="264"/>
+            <ac:spMk id="11" creationId="{00000000-0000-0000-0000-000000000000}"/>
+          </ac:spMkLst>
+        </pc:spChg>
+        <pc:spChg chg="del">
+          <ac:chgData name="Jack Chepin" userId="df2f1f972283bbc2" providerId="LiveId" clId="{CA92788F-C1EA-4B14-92BD-8D9CB53927FA}" dt="2026-06-03T02:44:19.388" v="71" actId="21"/>
+          <ac:spMkLst>
+            <pc:docMk/>
+            <pc:sldMk cId="0" sldId="264"/>
+            <ac:spMk id="12" creationId="{00000000-0000-0000-0000-000000000000}"/>
+          </ac:spMkLst>
+        </pc:spChg>
+        <pc:spChg chg="del mod">
+          <ac:chgData name="Jack Chepin" userId="df2f1f972283bbc2" providerId="LiveId" clId="{CA92788F-C1EA-4B14-92BD-8D9CB53927FA}" dt="2026-06-03T02:44:42.858" v="76"/>
+          <ac:spMkLst>
+            <pc:docMk/>
+            <pc:sldMk cId="0" sldId="264"/>
+            <ac:spMk id="13" creationId="{00000000-0000-0000-0000-000000000000}"/>
+          </ac:spMkLst>
+        </pc:spChg>
+        <pc:spChg chg="del">
+          <ac:chgData name="Jack Chepin" userId="df2f1f972283bbc2" providerId="LiveId" clId="{CA92788F-C1EA-4B14-92BD-8D9CB53927FA}" dt="2026-06-03T02:44:23.008" v="72" actId="21"/>
+          <ac:spMkLst>
+            <pc:docMk/>
+            <pc:sldMk cId="0" sldId="264"/>
+            <ac:spMk id="14" creationId="{00000000-0000-0000-0000-000000000000}"/>
+          </ac:spMkLst>
+        </pc:spChg>
+        <pc:spChg chg="del">
+          <ac:chgData name="Jack Chepin" userId="df2f1f972283bbc2" providerId="LiveId" clId="{CA92788F-C1EA-4B14-92BD-8D9CB53927FA}" dt="2026-06-03T02:44:13.268" v="70" actId="21"/>
+          <ac:spMkLst>
+            <pc:docMk/>
+            <pc:sldMk cId="0" sldId="264"/>
+            <ac:spMk id="15" creationId="{00000000-0000-0000-0000-000000000000}"/>
+          </ac:spMkLst>
+        </pc:spChg>
+      </pc:sldChg>
+      <pc:sldChg chg="delSp mod">
+        <pc:chgData name="Jack Chepin" userId="df2f1f972283bbc2" providerId="LiveId" clId="{CA92788F-C1EA-4B14-92BD-8D9CB53927FA}" dt="2026-06-02T17:51:29.241" v="36" actId="21"/>
+        <pc:sldMkLst>
+          <pc:docMk/>
+          <pc:sldMk cId="0" sldId="265"/>
+        </pc:sldMkLst>
+      </pc:sldChg>
+    </pc:docChg>
+  </pc:docChgLst>
+</pc:chgInfo>
 </file>
 
 <file path=ppt/slideLayouts/slideLayout1.xml><?xml version="1.0" encoding="utf-8"?>
@@ -155,10 +567,9 @@
           <a:lstStyle/>
           <a:p>
             <a:r>
-              <a:rPr lang="en-US" smtClean="0"/>
+              <a:rPr lang="en-US"/>
               <a:t>Click to edit Master title style</a:t>
             </a:r>
-            <a:endParaRPr lang="en-US"/>
           </a:p>
         </p:txBody>
       </p:sp>
@@ -274,10 +685,9 @@
           </a:lstStyle>
           <a:p>
             <a:r>
-              <a:rPr lang="en-US" smtClean="0"/>
+              <a:rPr lang="en-US"/>
               <a:t>Click to edit Master subtitle style</a:t>
             </a:r>
-            <a:endParaRPr lang="en-US"/>
           </a:p>
         </p:txBody>
       </p:sp>
@@ -298,7 +708,7 @@
           <a:p>
             <a:fld id="{5BCAD085-E8A6-8845-BD4E-CB4CCA059FC4}" type="datetimeFigureOut">
               <a:rPr lang="en-US" smtClean="0"/>
-              <a:t>1/27/13</a:t>
+              <a:t>6/3/2026</a:t>
             </a:fld>
             <a:endParaRPr lang="en-US"/>
           </a:p>
@@ -392,10 +802,9 @@
           <a:lstStyle/>
           <a:p>
             <a:r>
-              <a:rPr lang="en-US" smtClean="0"/>
+              <a:rPr lang="en-US"/>
               <a:t>Click to edit Master title style</a:t>
             </a:r>
-            <a:endParaRPr lang="en-US"/>
           </a:p>
         </p:txBody>
       </p:sp>
@@ -416,38 +825,37 @@
           <a:p>
             <a:pPr lvl="0"/>
             <a:r>
-              <a:rPr lang="en-US" smtClean="0"/>
+              <a:rPr lang="en-US"/>
               <a:t>Click to edit Master text styles</a:t>
             </a:r>
           </a:p>
           <a:p>
             <a:pPr lvl="1"/>
             <a:r>
-              <a:rPr lang="en-US" smtClean="0"/>
+              <a:rPr lang="en-US"/>
               <a:t>Second level</a:t>
             </a:r>
           </a:p>
           <a:p>
             <a:pPr lvl="2"/>
             <a:r>
-              <a:rPr lang="en-US" smtClean="0"/>
+              <a:rPr lang="en-US"/>
               <a:t>Third level</a:t>
             </a:r>
           </a:p>
           <a:p>
             <a:pPr lvl="3"/>
             <a:r>
-              <a:rPr lang="en-US" smtClean="0"/>
+              <a:rPr lang="en-US"/>
               <a:t>Fourth level</a:t>
             </a:r>
           </a:p>
           <a:p>
             <a:pPr lvl="4"/>
             <a:r>
-              <a:rPr lang="en-US" smtClean="0"/>
+              <a:rPr lang="en-US"/>
               <a:t>Fifth level</a:t>
             </a:r>
-            <a:endParaRPr lang="en-US"/>
           </a:p>
         </p:txBody>
       </p:sp>
@@ -468,7 +876,7 @@
           <a:p>
             <a:fld id="{5BCAD085-E8A6-8845-BD4E-CB4CCA059FC4}" type="datetimeFigureOut">
               <a:rPr lang="en-US" smtClean="0"/>
-              <a:t>1/27/13</a:t>
+              <a:t>6/3/2026</a:t>
             </a:fld>
             <a:endParaRPr lang="en-US"/>
           </a:p>
@@ -567,10 +975,9 @@
           <a:lstStyle/>
           <a:p>
             <a:r>
-              <a:rPr lang="en-US" smtClean="0"/>
+              <a:rPr lang="en-US"/>
               <a:t>Click to edit Master title style</a:t>
             </a:r>
-            <a:endParaRPr lang="en-US"/>
           </a:p>
         </p:txBody>
       </p:sp>
@@ -596,38 +1003,37 @@
           <a:p>
             <a:pPr lvl="0"/>
             <a:r>
-              <a:rPr lang="en-US" smtClean="0"/>
+              <a:rPr lang="en-US"/>
               <a:t>Click to edit Master text styles</a:t>
             </a:r>
           </a:p>
           <a:p>
             <a:pPr lvl="1"/>
             <a:r>
-              <a:rPr lang="en-US" smtClean="0"/>
+              <a:rPr lang="en-US"/>
               <a:t>Second level</a:t>
             </a:r>
           </a:p>
           <a:p>
             <a:pPr lvl="2"/>
             <a:r>
-              <a:rPr lang="en-US" smtClean="0"/>
+              <a:rPr lang="en-US"/>
               <a:t>Third level</a:t>
             </a:r>
           </a:p>
           <a:p>
             <a:pPr lvl="3"/>
             <a:r>
-              <a:rPr lang="en-US" smtClean="0"/>
+              <a:rPr lang="en-US"/>
               <a:t>Fourth level</a:t>
             </a:r>
           </a:p>
           <a:p>
             <a:pPr lvl="4"/>
             <a:r>
-              <a:rPr lang="en-US" smtClean="0"/>
+              <a:rPr lang="en-US"/>
               <a:t>Fifth level</a:t>
             </a:r>
-            <a:endParaRPr lang="en-US"/>
           </a:p>
         </p:txBody>
       </p:sp>
@@ -648,7 +1054,7 @@
           <a:p>
             <a:fld id="{5BCAD085-E8A6-8845-BD4E-CB4CCA059FC4}" type="datetimeFigureOut">
               <a:rPr lang="en-US" smtClean="0"/>
-              <a:t>1/27/13</a:t>
+              <a:t>6/3/2026</a:t>
             </a:fld>
             <a:endParaRPr lang="en-US"/>
           </a:p>
@@ -742,10 +1148,9 @@
           <a:lstStyle/>
           <a:p>
             <a:r>
-              <a:rPr lang="en-US" smtClean="0"/>
+              <a:rPr lang="en-US"/>
               <a:t>Click to edit Master title style</a:t>
             </a:r>
-            <a:endParaRPr lang="en-US"/>
           </a:p>
         </p:txBody>
       </p:sp>
@@ -766,38 +1171,37 @@
           <a:p>
             <a:pPr lvl="0"/>
             <a:r>
-              <a:rPr lang="en-US" smtClean="0"/>
+              <a:rPr lang="en-US"/>
               <a:t>Click to edit Master text styles</a:t>
             </a:r>
           </a:p>
           <a:p>
             <a:pPr lvl="1"/>
             <a:r>
-              <a:rPr lang="en-US" smtClean="0"/>
+              <a:rPr lang="en-US"/>
               <a:t>Second level</a:t>
             </a:r>
           </a:p>
           <a:p>
             <a:pPr lvl="2"/>
             <a:r>
-              <a:rPr lang="en-US" smtClean="0"/>
+              <a:rPr lang="en-US"/>
               <a:t>Third level</a:t>
             </a:r>
           </a:p>
           <a:p>
             <a:pPr lvl="3"/>
             <a:r>
-              <a:rPr lang="en-US" smtClean="0"/>
+              <a:rPr lang="en-US"/>
               <a:t>Fourth level</a:t>
             </a:r>
           </a:p>
           <a:p>
             <a:pPr lvl="4"/>
             <a:r>
-              <a:rPr lang="en-US" smtClean="0"/>
+              <a:rPr lang="en-US"/>
               <a:t>Fifth level</a:t>
             </a:r>
-            <a:endParaRPr lang="en-US"/>
           </a:p>
         </p:txBody>
       </p:sp>
@@ -818,7 +1222,7 @@
           <a:p>
             <a:fld id="{5BCAD085-E8A6-8845-BD4E-CB4CCA059FC4}" type="datetimeFigureOut">
               <a:rPr lang="en-US" smtClean="0"/>
-              <a:t>1/27/13</a:t>
+              <a:t>6/3/2026</a:t>
             </a:fld>
             <a:endParaRPr lang="en-US"/>
           </a:p>
@@ -921,10 +1325,9 @@
           </a:lstStyle>
           <a:p>
             <a:r>
-              <a:rPr lang="en-US" smtClean="0"/>
+              <a:rPr lang="en-US"/>
               <a:t>Click to edit Master title style</a:t>
             </a:r>
-            <a:endParaRPr lang="en-US"/>
           </a:p>
         </p:txBody>
       </p:sp>
@@ -1041,7 +1444,7 @@
           <a:p>
             <a:pPr lvl="0"/>
             <a:r>
-              <a:rPr lang="en-US" smtClean="0"/>
+              <a:rPr lang="en-US"/>
               <a:t>Click to edit Master text styles</a:t>
             </a:r>
           </a:p>
@@ -1064,7 +1467,7 @@
           <a:p>
             <a:fld id="{5BCAD085-E8A6-8845-BD4E-CB4CCA059FC4}" type="datetimeFigureOut">
               <a:rPr lang="en-US" smtClean="0"/>
-              <a:t>1/27/13</a:t>
+              <a:t>6/3/2026</a:t>
             </a:fld>
             <a:endParaRPr lang="en-US"/>
           </a:p>
@@ -1158,10 +1561,9 @@
           <a:lstStyle/>
           <a:p>
             <a:r>
-              <a:rPr lang="en-US" smtClean="0"/>
+              <a:rPr lang="en-US"/>
               <a:t>Click to edit Master title style</a:t>
             </a:r>
-            <a:endParaRPr lang="en-US"/>
           </a:p>
         </p:txBody>
       </p:sp>
@@ -1215,38 +1617,37 @@
           <a:p>
             <a:pPr lvl="0"/>
             <a:r>
-              <a:rPr lang="en-US" smtClean="0"/>
+              <a:rPr lang="en-US"/>
               <a:t>Click to edit Master text styles</a:t>
             </a:r>
           </a:p>
           <a:p>
             <a:pPr lvl="1"/>
             <a:r>
-              <a:rPr lang="en-US" smtClean="0"/>
+              <a:rPr lang="en-US"/>
               <a:t>Second level</a:t>
             </a:r>
           </a:p>
           <a:p>
             <a:pPr lvl="2"/>
             <a:r>
-              <a:rPr lang="en-US" smtClean="0"/>
+              <a:rPr lang="en-US"/>
               <a:t>Third level</a:t>
             </a:r>
           </a:p>
           <a:p>
             <a:pPr lvl="3"/>
             <a:r>
-              <a:rPr lang="en-US" smtClean="0"/>
+              <a:rPr lang="en-US"/>
               <a:t>Fourth level</a:t>
             </a:r>
           </a:p>
           <a:p>
             <a:pPr lvl="4"/>
             <a:r>
-              <a:rPr lang="en-US" smtClean="0"/>
+              <a:rPr lang="en-US"/>
               <a:t>Fifth level</a:t>
             </a:r>
-            <a:endParaRPr lang="en-US"/>
           </a:p>
         </p:txBody>
       </p:sp>
@@ -1300,38 +1701,37 @@
           <a:p>
             <a:pPr lvl="0"/>
             <a:r>
-              <a:rPr lang="en-US" smtClean="0"/>
+              <a:rPr lang="en-US"/>
               <a:t>Click to edit Master text styles</a:t>
             </a:r>
           </a:p>
           <a:p>
             <a:pPr lvl="1"/>
             <a:r>
-              <a:rPr lang="en-US" smtClean="0"/>
+              <a:rPr lang="en-US"/>
               <a:t>Second level</a:t>
             </a:r>
           </a:p>
           <a:p>
             <a:pPr lvl="2"/>
             <a:r>
-              <a:rPr lang="en-US" smtClean="0"/>
+              <a:rPr lang="en-US"/>
               <a:t>Third level</a:t>
             </a:r>
           </a:p>
           <a:p>
             <a:pPr lvl="3"/>
             <a:r>
-              <a:rPr lang="en-US" smtClean="0"/>
+              <a:rPr lang="en-US"/>
               <a:t>Fourth level</a:t>
             </a:r>
           </a:p>
           <a:p>
             <a:pPr lvl="4"/>
             <a:r>
-              <a:rPr lang="en-US" smtClean="0"/>
+              <a:rPr lang="en-US"/>
               <a:t>Fifth level</a:t>
             </a:r>
-            <a:endParaRPr lang="en-US"/>
           </a:p>
         </p:txBody>
       </p:sp>
@@ -1352,7 +1752,7 @@
           <a:p>
             <a:fld id="{5BCAD085-E8A6-8845-BD4E-CB4CCA059FC4}" type="datetimeFigureOut">
               <a:rPr lang="en-US" smtClean="0"/>
-              <a:t>1/27/13</a:t>
+              <a:t>6/3/2026</a:t>
             </a:fld>
             <a:endParaRPr lang="en-US"/>
           </a:p>
@@ -1450,10 +1850,9 @@
           </a:lstStyle>
           <a:p>
             <a:r>
-              <a:rPr lang="en-US" smtClean="0"/>
+              <a:rPr lang="en-US"/>
               <a:t>Click to edit Master title style</a:t>
             </a:r>
-            <a:endParaRPr lang="en-US"/>
           </a:p>
         </p:txBody>
       </p:sp>
@@ -1516,7 +1915,7 @@
           <a:p>
             <a:pPr lvl="0"/>
             <a:r>
-              <a:rPr lang="en-US" smtClean="0"/>
+              <a:rPr lang="en-US"/>
               <a:t>Click to edit Master text styles</a:t>
             </a:r>
           </a:p>
@@ -1572,38 +1971,37 @@
           <a:p>
             <a:pPr lvl="0"/>
             <a:r>
-              <a:rPr lang="en-US" smtClean="0"/>
+              <a:rPr lang="en-US"/>
               <a:t>Click to edit Master text styles</a:t>
             </a:r>
           </a:p>
           <a:p>
             <a:pPr lvl="1"/>
             <a:r>
-              <a:rPr lang="en-US" smtClean="0"/>
+              <a:rPr lang="en-US"/>
               <a:t>Second level</a:t>
             </a:r>
           </a:p>
           <a:p>
             <a:pPr lvl="2"/>
             <a:r>
-              <a:rPr lang="en-US" smtClean="0"/>
+              <a:rPr lang="en-US"/>
               <a:t>Third level</a:t>
             </a:r>
           </a:p>
           <a:p>
             <a:pPr lvl="3"/>
             <a:r>
-              <a:rPr lang="en-US" smtClean="0"/>
+              <a:rPr lang="en-US"/>
               <a:t>Fourth level</a:t>
             </a:r>
           </a:p>
           <a:p>
             <a:pPr lvl="4"/>
             <a:r>
-              <a:rPr lang="en-US" smtClean="0"/>
+              <a:rPr lang="en-US"/>
               <a:t>Fifth level</a:t>
             </a:r>
-            <a:endParaRPr lang="en-US"/>
           </a:p>
         </p:txBody>
       </p:sp>
@@ -1666,7 +2064,7 @@
           <a:p>
             <a:pPr lvl="0"/>
             <a:r>
-              <a:rPr lang="en-US" smtClean="0"/>
+              <a:rPr lang="en-US"/>
               <a:t>Click to edit Master text styles</a:t>
             </a:r>
           </a:p>
@@ -1722,38 +2120,37 @@
           <a:p>
             <a:pPr lvl="0"/>
             <a:r>
-              <a:rPr lang="en-US" smtClean="0"/>
+              <a:rPr lang="en-US"/>
               <a:t>Click to edit Master text styles</a:t>
             </a:r>
           </a:p>
           <a:p>
             <a:pPr lvl="1"/>
             <a:r>
-              <a:rPr lang="en-US" smtClean="0"/>
+              <a:rPr lang="en-US"/>
               <a:t>Second level</a:t>
             </a:r>
           </a:p>
           <a:p>
             <a:pPr lvl="2"/>
             <a:r>
-              <a:rPr lang="en-US" smtClean="0"/>
+              <a:rPr lang="en-US"/>
               <a:t>Third level</a:t>
             </a:r>
           </a:p>
           <a:p>
             <a:pPr lvl="3"/>
             <a:r>
-              <a:rPr lang="en-US" smtClean="0"/>
+              <a:rPr lang="en-US"/>
               <a:t>Fourth level</a:t>
             </a:r>
           </a:p>
           <a:p>
             <a:pPr lvl="4"/>
             <a:r>
-              <a:rPr lang="en-US" smtClean="0"/>
+              <a:rPr lang="en-US"/>
               <a:t>Fifth level</a:t>
             </a:r>
-            <a:endParaRPr lang="en-US"/>
           </a:p>
         </p:txBody>
       </p:sp>
@@ -1774,7 +2171,7 @@
           <a:p>
             <a:fld id="{5BCAD085-E8A6-8845-BD4E-CB4CCA059FC4}" type="datetimeFigureOut">
               <a:rPr lang="en-US" smtClean="0"/>
-              <a:t>1/27/13</a:t>
+              <a:t>6/3/2026</a:t>
             </a:fld>
             <a:endParaRPr lang="en-US"/>
           </a:p>
@@ -1868,10 +2265,9 @@
           <a:lstStyle/>
           <a:p>
             <a:r>
-              <a:rPr lang="en-US" smtClean="0"/>
+              <a:rPr lang="en-US"/>
               <a:t>Click to edit Master title style</a:t>
             </a:r>
-            <a:endParaRPr lang="en-US"/>
           </a:p>
         </p:txBody>
       </p:sp>
@@ -1892,7 +2288,7 @@
           <a:p>
             <a:fld id="{5BCAD085-E8A6-8845-BD4E-CB4CCA059FC4}" type="datetimeFigureOut">
               <a:rPr lang="en-US" smtClean="0"/>
-              <a:t>1/27/13</a:t>
+              <a:t>6/3/2026</a:t>
             </a:fld>
             <a:endParaRPr lang="en-US"/>
           </a:p>
@@ -1987,7 +2383,7 @@
           <a:p>
             <a:fld id="{5BCAD085-E8A6-8845-BD4E-CB4CCA059FC4}" type="datetimeFigureOut">
               <a:rPr lang="en-US" smtClean="0"/>
-              <a:t>1/27/13</a:t>
+              <a:t>6/3/2026</a:t>
             </a:fld>
             <a:endParaRPr lang="en-US"/>
           </a:p>
@@ -2090,10 +2486,9 @@
           </a:lstStyle>
           <a:p>
             <a:r>
-              <a:rPr lang="en-US" smtClean="0"/>
+              <a:rPr lang="en-US"/>
               <a:t>Click to edit Master title style</a:t>
             </a:r>
-            <a:endParaRPr lang="en-US"/>
           </a:p>
         </p:txBody>
       </p:sp>
@@ -2147,38 +2542,37 @@
           <a:p>
             <a:pPr lvl="0"/>
             <a:r>
-              <a:rPr lang="en-US" smtClean="0"/>
+              <a:rPr lang="en-US"/>
               <a:t>Click to edit Master text styles</a:t>
             </a:r>
           </a:p>
           <a:p>
             <a:pPr lvl="1"/>
             <a:r>
-              <a:rPr lang="en-US" smtClean="0"/>
+              <a:rPr lang="en-US"/>
               <a:t>Second level</a:t>
             </a:r>
           </a:p>
           <a:p>
             <a:pPr lvl="2"/>
             <a:r>
-              <a:rPr lang="en-US" smtClean="0"/>
+              <a:rPr lang="en-US"/>
               <a:t>Third level</a:t>
             </a:r>
           </a:p>
           <a:p>
             <a:pPr lvl="3"/>
             <a:r>
-              <a:rPr lang="en-US" smtClean="0"/>
+              <a:rPr lang="en-US"/>
               <a:t>Fourth level</a:t>
             </a:r>
           </a:p>
           <a:p>
             <a:pPr lvl="4"/>
             <a:r>
-              <a:rPr lang="en-US" smtClean="0"/>
+              <a:rPr lang="en-US"/>
               <a:t>Fifth level</a:t>
             </a:r>
-            <a:endParaRPr lang="en-US"/>
           </a:p>
         </p:txBody>
       </p:sp>
@@ -2241,7 +2635,7 @@
           <a:p>
             <a:pPr lvl="0"/>
             <a:r>
-              <a:rPr lang="en-US" smtClean="0"/>
+              <a:rPr lang="en-US"/>
               <a:t>Click to edit Master text styles</a:t>
             </a:r>
           </a:p>
@@ -2264,7 +2658,7 @@
           <a:p>
             <a:fld id="{5BCAD085-E8A6-8845-BD4E-CB4CCA059FC4}" type="datetimeFigureOut">
               <a:rPr lang="en-US" smtClean="0"/>
-              <a:t>1/27/13</a:t>
+              <a:t>6/3/2026</a:t>
             </a:fld>
             <a:endParaRPr lang="en-US"/>
           </a:p>
@@ -2367,10 +2761,9 @@
           </a:lstStyle>
           <a:p>
             <a:r>
-              <a:rPr lang="en-US" smtClean="0"/>
+              <a:rPr lang="en-US"/>
               <a:t>Click to edit Master title style</a:t>
             </a:r>
-            <a:endParaRPr lang="en-US"/>
           </a:p>
         </p:txBody>
       </p:sp>
@@ -2494,7 +2887,7 @@
           <a:p>
             <a:pPr lvl="0"/>
             <a:r>
-              <a:rPr lang="en-US" smtClean="0"/>
+              <a:rPr lang="en-US"/>
               <a:t>Click to edit Master text styles</a:t>
             </a:r>
           </a:p>
@@ -2517,7 +2910,7 @@
           <a:p>
             <a:fld id="{5BCAD085-E8A6-8845-BD4E-CB4CCA059FC4}" type="datetimeFigureOut">
               <a:rPr lang="en-US" smtClean="0"/>
-              <a:t>1/27/13</a:t>
+              <a:t>6/3/2026</a:t>
             </a:fld>
             <a:endParaRPr lang="en-US"/>
           </a:p>
@@ -2626,10 +3019,9 @@
           <a:lstStyle/>
           <a:p>
             <a:r>
-              <a:rPr lang="en-US" smtClean="0"/>
+              <a:rPr lang="en-US"/>
               <a:t>Click to edit Master title style</a:t>
             </a:r>
-            <a:endParaRPr lang="en-US"/>
           </a:p>
         </p:txBody>
       </p:sp>
@@ -2660,38 +3052,37 @@
           <a:p>
             <a:pPr lvl="0"/>
             <a:r>
-              <a:rPr lang="en-US" smtClean="0"/>
+              <a:rPr lang="en-US"/>
               <a:t>Click to edit Master text styles</a:t>
             </a:r>
           </a:p>
           <a:p>
             <a:pPr lvl="1"/>
             <a:r>
-              <a:rPr lang="en-US" smtClean="0"/>
+              <a:rPr lang="en-US"/>
               <a:t>Second level</a:t>
             </a:r>
           </a:p>
           <a:p>
             <a:pPr lvl="2"/>
             <a:r>
-              <a:rPr lang="en-US" smtClean="0"/>
+              <a:rPr lang="en-US"/>
               <a:t>Third level</a:t>
             </a:r>
           </a:p>
           <a:p>
             <a:pPr lvl="3"/>
             <a:r>
-              <a:rPr lang="en-US" smtClean="0"/>
+              <a:rPr lang="en-US"/>
               <a:t>Fourth level</a:t>
             </a:r>
           </a:p>
           <a:p>
             <a:pPr lvl="4"/>
             <a:r>
-              <a:rPr lang="en-US" smtClean="0"/>
+              <a:rPr lang="en-US"/>
               <a:t>Fifth level</a:t>
             </a:r>
-            <a:endParaRPr lang="en-US"/>
           </a:p>
         </p:txBody>
       </p:sp>
@@ -2730,7 +3121,7 @@
           <a:p>
             <a:fld id="{5BCAD085-E8A6-8845-BD4E-CB4CCA059FC4}" type="datetimeFigureOut">
               <a:rPr lang="en-US" smtClean="0"/>
-              <a:t>1/27/13</a:t>
+              <a:t>6/3/2026</a:t>
             </a:fld>
             <a:endParaRPr lang="en-US"/>
           </a:p>
@@ -3089,7 +3480,7 @@
 </file>
 
 <file path=ppt/slides/slide1.xml><?xml version="1.0" encoding="utf-8"?>
-<p:sld xmlns:a="http://schemas.openxmlformats.org/drawingml/2006/main" xmlns:p="http://schemas.openxmlformats.org/presentationml/2006/main" xmlns:r="http://schemas.openxmlformats.org/officeDocument/2006/relationships">
+<p:sld xmlns:a="http://schemas.openxmlformats.org/drawingml/2006/main" xmlns:r="http://schemas.openxmlformats.org/officeDocument/2006/relationships" xmlns:p="http://schemas.openxmlformats.org/presentationml/2006/main">
   <p:cSld>
     <p:bg>
       <p:bgPr>
@@ -3105,7 +3496,14 @@
         <p:cNvGrpSpPr/>
         <p:nvPr/>
       </p:nvGrpSpPr>
-      <p:grpSpPr/>
+      <p:grpSpPr>
+        <a:xfrm>
+          <a:off x="0" y="0"/>
+          <a:ext cx="0" cy="0"/>
+          <a:chOff x="0" y="0"/>
+          <a:chExt cx="0" cy="0"/>
+        </a:xfrm>
+      </p:grpSpPr>
       <p:sp>
         <p:nvSpPr>
           <p:cNvPr id="2" name="Rectangle 1"/>
@@ -3146,6 +3544,7 @@
           <a:lstStyle/>
           <a:p>
             <a:pPr algn="ctr"/>
+            <a:endParaRPr dirty="0"/>
           </a:p>
         </p:txBody>
       </p:sp>
@@ -3189,6 +3588,7 @@
           <a:lstStyle/>
           <a:p>
             <a:pPr algn="ctr"/>
+            <a:endParaRPr/>
           </a:p>
         </p:txBody>
       </p:sp>
@@ -3272,7 +3672,7 @@
         <p:spPr>
           <a:xfrm>
             <a:off x="640080" y="2834640"/>
-            <a:ext cx="10058400" cy="457200"/>
+            <a:ext cx="10058400" cy="323165"/>
           </a:xfrm>
           <a:prstGeom prst="rect">
             <a:avLst/>
@@ -3287,13 +3687,58 @@
           <a:p>
             <a:pPr algn="l"/>
             <a:r>
-              <a:rPr sz="1500" b="0" i="0">
+              <a:rPr lang="en-US" sz="1500" b="0" i="0" dirty="0">
                 <a:solidFill>
                   <a:srgbClr val="CADCFC"/>
                 </a:solidFill>
                 <a:latin typeface="Calibri"/>
               </a:rPr>
-              <a:t>Athey, Inoue &amp; Tsugawa  ·  AEA Papers and Proceedings  ·  2025</a:t>
+              <a:t>Susan </a:t>
+            </a:r>
+            <a:r>
+              <a:rPr sz="1500" b="0" i="0" dirty="0">
+                <a:solidFill>
+                  <a:srgbClr val="CADCFC"/>
+                </a:solidFill>
+                <a:latin typeface="Calibri"/>
+              </a:rPr>
+              <a:t>Athey, </a:t>
+            </a:r>
+            <a:r>
+              <a:rPr lang="en-US" sz="1500" b="0" i="0" dirty="0">
+                <a:solidFill>
+                  <a:srgbClr val="CADCFC"/>
+                </a:solidFill>
+                <a:latin typeface="Calibri"/>
+              </a:rPr>
+              <a:t>Kosuke </a:t>
+            </a:r>
+            <a:r>
+              <a:rPr sz="1500" b="0" i="0" dirty="0">
+                <a:solidFill>
+                  <a:srgbClr val="CADCFC"/>
+                </a:solidFill>
+                <a:latin typeface="Calibri"/>
+              </a:rPr>
+              <a:t>Inoue &amp; </a:t>
+            </a:r>
+            <a:r>
+              <a:rPr lang="en-US" sz="1500" b="0" i="0" dirty="0">
+                <a:solidFill>
+                  <a:srgbClr val="CADCFC"/>
+                </a:solidFill>
+                <a:latin typeface="Calibri"/>
+              </a:rPr>
+              <a:t>Yusuke </a:t>
+            </a:r>
+            <a:r>
+              <a:rPr sz="1500" b="0" i="0" dirty="0">
+                <a:solidFill>
+                  <a:srgbClr val="CADCFC"/>
+                </a:solidFill>
+                <a:latin typeface="Calibri"/>
+              </a:rPr>
+              <a:t>Tsugawa  ·  AEA Papers and Proceedings  ·  2025</a:t>
             </a:r>
           </a:p>
         </p:txBody>
@@ -3377,7 +3822,733 @@
 </file>
 
 <file path=ppt/slides/slide10.xml><?xml version="1.0" encoding="utf-8"?>
-<p:sld xmlns:a="http://schemas.openxmlformats.org/drawingml/2006/main" xmlns:p="http://schemas.openxmlformats.org/presentationml/2006/main" xmlns:r="http://schemas.openxmlformats.org/officeDocument/2006/relationships">
+<p:sld xmlns:a="http://schemas.openxmlformats.org/drawingml/2006/main" xmlns:r="http://schemas.openxmlformats.org/officeDocument/2006/relationships" xmlns:p="http://schemas.openxmlformats.org/presentationml/2006/main">
+  <p:cSld>
+    <p:bg>
+      <p:bgPr>
+        <a:solidFill>
+          <a:srgbClr val="1A1A2E"/>
+        </a:solidFill>
+        <a:effectLst/>
+      </p:bgPr>
+    </p:bg>
+    <p:spTree>
+      <p:nvGrpSpPr>
+        <p:cNvPr id="1" name=""/>
+        <p:cNvGrpSpPr/>
+        <p:nvPr/>
+      </p:nvGrpSpPr>
+      <p:grpSpPr>
+        <a:xfrm>
+          <a:off x="0" y="0"/>
+          <a:ext cx="0" cy="0"/>
+          <a:chOff x="0" y="0"/>
+          <a:chExt cx="0" cy="0"/>
+        </a:xfrm>
+      </p:grpSpPr>
+      <p:sp>
+        <p:nvSpPr>
+          <p:cNvPr id="2" name="Rectangle 1"/>
+          <p:cNvSpPr/>
+          <p:nvPr/>
+        </p:nvSpPr>
+        <p:spPr>
+          <a:xfrm>
+            <a:off x="0" y="0"/>
+            <a:ext cx="12188952" cy="6858000"/>
+          </a:xfrm>
+          <a:prstGeom prst="rect">
+            <a:avLst/>
+          </a:prstGeom>
+          <a:solidFill>
+            <a:srgbClr val="1A1A2E"/>
+          </a:solidFill>
+          <a:ln>
+            <a:noFill/>
+          </a:ln>
+        </p:spPr>
+        <p:style>
+          <a:lnRef idx="1">
+            <a:schemeClr val="accent1"/>
+          </a:lnRef>
+          <a:fillRef idx="3">
+            <a:schemeClr val="accent1"/>
+          </a:fillRef>
+          <a:effectRef idx="2">
+            <a:schemeClr val="accent1"/>
+          </a:effectRef>
+          <a:fontRef idx="minor">
+            <a:schemeClr val="lt1"/>
+          </a:fontRef>
+        </p:style>
+        <p:txBody>
+          <a:bodyPr rtlCol="0" anchor="ctr"/>
+          <a:lstStyle/>
+          <a:p>
+            <a:pPr algn="ctr"/>
+            <a:endParaRPr/>
+          </a:p>
+        </p:txBody>
+      </p:sp>
+      <p:sp>
+        <p:nvSpPr>
+          <p:cNvPr id="3" name="Rectangle 2"/>
+          <p:cNvSpPr/>
+          <p:nvPr/>
+        </p:nvSpPr>
+        <p:spPr>
+          <a:xfrm>
+            <a:off x="0" y="0"/>
+            <a:ext cx="12188952" cy="914400"/>
+          </a:xfrm>
+          <a:prstGeom prst="rect">
+            <a:avLst/>
+          </a:prstGeom>
+          <a:solidFill>
+            <a:srgbClr val="1E2761"/>
+          </a:solidFill>
+          <a:ln>
+            <a:noFill/>
+          </a:ln>
+        </p:spPr>
+        <p:style>
+          <a:lnRef idx="1">
+            <a:schemeClr val="accent1"/>
+          </a:lnRef>
+          <a:fillRef idx="3">
+            <a:schemeClr val="accent1"/>
+          </a:fillRef>
+          <a:effectRef idx="2">
+            <a:schemeClr val="accent1"/>
+          </a:effectRef>
+          <a:fontRef idx="minor">
+            <a:schemeClr val="lt1"/>
+          </a:fontRef>
+        </p:style>
+        <p:txBody>
+          <a:bodyPr rtlCol="0" anchor="ctr"/>
+          <a:lstStyle/>
+          <a:p>
+            <a:pPr algn="ctr"/>
+            <a:endParaRPr/>
+          </a:p>
+        </p:txBody>
+      </p:sp>
+      <p:sp>
+        <p:nvSpPr>
+          <p:cNvPr id="4" name="TextBox 3"/>
+          <p:cNvSpPr txBox="1"/>
+          <p:nvPr/>
+        </p:nvSpPr>
+        <p:spPr>
+          <a:xfrm>
+            <a:off x="457200" y="137160"/>
+            <a:ext cx="10972800" cy="640080"/>
+          </a:xfrm>
+          <a:prstGeom prst="rect">
+            <a:avLst/>
+          </a:prstGeom>
+          <a:noFill/>
+        </p:spPr>
+        <p:txBody>
+          <a:bodyPr wrap="square">
+            <a:spAutoFit/>
+          </a:bodyPr>
+          <a:lstStyle/>
+          <a:p>
+            <a:pPr algn="l"/>
+            <a:r>
+              <a:rPr sz="2600" b="1" i="0">
+                <a:solidFill>
+                  <a:srgbClr val="FFFFFF"/>
+                </a:solidFill>
+                <a:latin typeface="Calibri"/>
+              </a:rPr>
+              <a:t>Conclusion</a:t>
+            </a:r>
+          </a:p>
+        </p:txBody>
+      </p:sp>
+      <p:sp>
+        <p:nvSpPr>
+          <p:cNvPr id="5" name="Rectangle 4"/>
+          <p:cNvSpPr/>
+          <p:nvPr/>
+        </p:nvSpPr>
+        <p:spPr>
+          <a:xfrm>
+            <a:off x="457200" y="1188720"/>
+            <a:ext cx="502920" cy="502920"/>
+          </a:xfrm>
+          <a:prstGeom prst="rect">
+            <a:avLst/>
+          </a:prstGeom>
+          <a:solidFill>
+            <a:srgbClr val="4A90D9"/>
+          </a:solidFill>
+          <a:ln>
+            <a:noFill/>
+          </a:ln>
+        </p:spPr>
+        <p:style>
+          <a:lnRef idx="1">
+            <a:schemeClr val="accent1"/>
+          </a:lnRef>
+          <a:fillRef idx="3">
+            <a:schemeClr val="accent1"/>
+          </a:fillRef>
+          <a:effectRef idx="2">
+            <a:schemeClr val="accent1"/>
+          </a:effectRef>
+          <a:fontRef idx="minor">
+            <a:schemeClr val="lt1"/>
+          </a:fontRef>
+        </p:style>
+        <p:txBody>
+          <a:bodyPr rtlCol="0" anchor="ctr"/>
+          <a:lstStyle/>
+          <a:p>
+            <a:pPr algn="ctr"/>
+            <a:endParaRPr/>
+          </a:p>
+        </p:txBody>
+      </p:sp>
+      <p:sp>
+        <p:nvSpPr>
+          <p:cNvPr id="6" name="TextBox 5"/>
+          <p:cNvSpPr txBox="1"/>
+          <p:nvPr/>
+        </p:nvSpPr>
+        <p:spPr>
+          <a:xfrm>
+            <a:off x="457200" y="1234440"/>
+            <a:ext cx="502920" cy="411480"/>
+          </a:xfrm>
+          <a:prstGeom prst="rect">
+            <a:avLst/>
+          </a:prstGeom>
+          <a:noFill/>
+        </p:spPr>
+        <p:txBody>
+          <a:bodyPr wrap="square">
+            <a:spAutoFit/>
+          </a:bodyPr>
+          <a:lstStyle/>
+          <a:p>
+            <a:pPr algn="ctr"/>
+            <a:r>
+              <a:rPr sz="2000" b="1" i="0">
+                <a:solidFill>
+                  <a:srgbClr val="FFFFFF"/>
+                </a:solidFill>
+                <a:latin typeface="Calibri"/>
+              </a:rPr>
+              <a:t>1</a:t>
+            </a:r>
+          </a:p>
+        </p:txBody>
+      </p:sp>
+      <p:sp>
+        <p:nvSpPr>
+          <p:cNvPr id="7" name="TextBox 6"/>
+          <p:cNvSpPr txBox="1"/>
+          <p:nvPr/>
+        </p:nvSpPr>
+        <p:spPr>
+          <a:xfrm>
+            <a:off x="1143000" y="1234440"/>
+            <a:ext cx="10515600" cy="502920"/>
+          </a:xfrm>
+          <a:prstGeom prst="rect">
+            <a:avLst/>
+          </a:prstGeom>
+          <a:noFill/>
+        </p:spPr>
+        <p:txBody>
+          <a:bodyPr wrap="square">
+            <a:spAutoFit/>
+          </a:bodyPr>
+          <a:lstStyle/>
+          <a:p>
+            <a:pPr algn="l"/>
+            <a:r>
+              <a:rPr sz="1500" b="0" i="0">
+                <a:solidFill>
+                  <a:srgbClr val="FFFFFF"/>
+                </a:solidFill>
+                <a:latin typeface="Calibri"/>
+              </a:rPr>
+              <a:t>Preprocessing decisions matter as much as estimation decisions — document everything</a:t>
+            </a:r>
+          </a:p>
+        </p:txBody>
+      </p:sp>
+      <p:sp>
+        <p:nvSpPr>
+          <p:cNvPr id="8" name="Rectangle 7"/>
+          <p:cNvSpPr/>
+          <p:nvPr/>
+        </p:nvSpPr>
+        <p:spPr>
+          <a:xfrm>
+            <a:off x="457200" y="2240280"/>
+            <a:ext cx="502920" cy="502920"/>
+          </a:xfrm>
+          <a:prstGeom prst="rect">
+            <a:avLst/>
+          </a:prstGeom>
+          <a:solidFill>
+            <a:srgbClr val="4A90D9"/>
+          </a:solidFill>
+          <a:ln>
+            <a:noFill/>
+          </a:ln>
+        </p:spPr>
+        <p:style>
+          <a:lnRef idx="1">
+            <a:schemeClr val="accent1"/>
+          </a:lnRef>
+          <a:fillRef idx="3">
+            <a:schemeClr val="accent1"/>
+          </a:fillRef>
+          <a:effectRef idx="2">
+            <a:schemeClr val="accent1"/>
+          </a:effectRef>
+          <a:fontRef idx="minor">
+            <a:schemeClr val="lt1"/>
+          </a:fontRef>
+        </p:style>
+        <p:txBody>
+          <a:bodyPr rtlCol="0" anchor="ctr"/>
+          <a:lstStyle/>
+          <a:p>
+            <a:pPr algn="ctr"/>
+            <a:endParaRPr/>
+          </a:p>
+        </p:txBody>
+      </p:sp>
+      <p:sp>
+        <p:nvSpPr>
+          <p:cNvPr id="9" name="TextBox 8"/>
+          <p:cNvSpPr txBox="1"/>
+          <p:nvPr/>
+        </p:nvSpPr>
+        <p:spPr>
+          <a:xfrm>
+            <a:off x="457200" y="2286000"/>
+            <a:ext cx="502920" cy="411480"/>
+          </a:xfrm>
+          <a:prstGeom prst="rect">
+            <a:avLst/>
+          </a:prstGeom>
+          <a:noFill/>
+        </p:spPr>
+        <p:txBody>
+          <a:bodyPr wrap="square">
+            <a:spAutoFit/>
+          </a:bodyPr>
+          <a:lstStyle/>
+          <a:p>
+            <a:pPr algn="ctr"/>
+            <a:r>
+              <a:rPr sz="2000" b="1" i="0">
+                <a:solidFill>
+                  <a:srgbClr val="FFFFFF"/>
+                </a:solidFill>
+                <a:latin typeface="Calibri"/>
+              </a:rPr>
+              <a:t>2</a:t>
+            </a:r>
+          </a:p>
+        </p:txBody>
+      </p:sp>
+      <p:sp>
+        <p:nvSpPr>
+          <p:cNvPr id="10" name="TextBox 9"/>
+          <p:cNvSpPr txBox="1"/>
+          <p:nvPr/>
+        </p:nvSpPr>
+        <p:spPr>
+          <a:xfrm>
+            <a:off x="1143000" y="2286000"/>
+            <a:ext cx="10515600" cy="502920"/>
+          </a:xfrm>
+          <a:prstGeom prst="rect">
+            <a:avLst/>
+          </a:prstGeom>
+          <a:noFill/>
+        </p:spPr>
+        <p:txBody>
+          <a:bodyPr wrap="square">
+            <a:spAutoFit/>
+          </a:bodyPr>
+          <a:lstStyle/>
+          <a:p>
+            <a:pPr algn="l"/>
+            <a:r>
+              <a:rPr sz="1500" b="0" i="0">
+                <a:solidFill>
+                  <a:srgbClr val="FFFFFF"/>
+                </a:solidFill>
+                <a:latin typeface="Calibri"/>
+              </a:rPr>
+              <a:t>GRF results are highly reproducible when the sample is correctly constructed</a:t>
+            </a:r>
+          </a:p>
+        </p:txBody>
+      </p:sp>
+      <p:sp>
+        <p:nvSpPr>
+          <p:cNvPr id="11" name="Rectangle 10"/>
+          <p:cNvSpPr/>
+          <p:nvPr/>
+        </p:nvSpPr>
+        <p:spPr>
+          <a:xfrm>
+            <a:off x="457200" y="3291839"/>
+            <a:ext cx="502920" cy="502920"/>
+          </a:xfrm>
+          <a:prstGeom prst="rect">
+            <a:avLst/>
+          </a:prstGeom>
+          <a:solidFill>
+            <a:srgbClr val="4A90D9"/>
+          </a:solidFill>
+          <a:ln>
+            <a:noFill/>
+          </a:ln>
+        </p:spPr>
+        <p:style>
+          <a:lnRef idx="1">
+            <a:schemeClr val="accent1"/>
+          </a:lnRef>
+          <a:fillRef idx="3">
+            <a:schemeClr val="accent1"/>
+          </a:fillRef>
+          <a:effectRef idx="2">
+            <a:schemeClr val="accent1"/>
+          </a:effectRef>
+          <a:fontRef idx="minor">
+            <a:schemeClr val="lt1"/>
+          </a:fontRef>
+        </p:style>
+        <p:txBody>
+          <a:bodyPr rtlCol="0" anchor="ctr"/>
+          <a:lstStyle/>
+          <a:p>
+            <a:pPr algn="ctr"/>
+            <a:endParaRPr/>
+          </a:p>
+        </p:txBody>
+      </p:sp>
+      <p:sp>
+        <p:nvSpPr>
+          <p:cNvPr id="12" name="TextBox 11"/>
+          <p:cNvSpPr txBox="1"/>
+          <p:nvPr/>
+        </p:nvSpPr>
+        <p:spPr>
+          <a:xfrm>
+            <a:off x="457200" y="3337559"/>
+            <a:ext cx="502920" cy="411480"/>
+          </a:xfrm>
+          <a:prstGeom prst="rect">
+            <a:avLst/>
+          </a:prstGeom>
+          <a:noFill/>
+        </p:spPr>
+        <p:txBody>
+          <a:bodyPr wrap="square">
+            <a:spAutoFit/>
+          </a:bodyPr>
+          <a:lstStyle/>
+          <a:p>
+            <a:pPr algn="ctr"/>
+            <a:r>
+              <a:rPr sz="2000" b="1" i="0">
+                <a:solidFill>
+                  <a:srgbClr val="FFFFFF"/>
+                </a:solidFill>
+                <a:latin typeface="Calibri"/>
+              </a:rPr>
+              <a:t>3</a:t>
+            </a:r>
+          </a:p>
+        </p:txBody>
+      </p:sp>
+      <p:sp>
+        <p:nvSpPr>
+          <p:cNvPr id="13" name="TextBox 12"/>
+          <p:cNvSpPr txBox="1"/>
+          <p:nvPr/>
+        </p:nvSpPr>
+        <p:spPr>
+          <a:xfrm>
+            <a:off x="1143000" y="3337559"/>
+            <a:ext cx="10515600" cy="502920"/>
+          </a:xfrm>
+          <a:prstGeom prst="rect">
+            <a:avLst/>
+          </a:prstGeom>
+          <a:noFill/>
+        </p:spPr>
+        <p:txBody>
+          <a:bodyPr wrap="square">
+            <a:spAutoFit/>
+          </a:bodyPr>
+          <a:lstStyle/>
+          <a:p>
+            <a:pPr algn="l"/>
+            <a:r>
+              <a:rPr sz="1500" b="0" i="0">
+                <a:solidFill>
+                  <a:srgbClr val="FFFFFF"/>
+                </a:solidFill>
+                <a:latin typeface="Calibri"/>
+              </a:rPr>
+              <a:t>Compliance heterogeneity (τ_W) is more precisely estimated than benefit heterogeneity (τ_CL)</a:t>
+            </a:r>
+          </a:p>
+        </p:txBody>
+      </p:sp>
+      <p:sp>
+        <p:nvSpPr>
+          <p:cNvPr id="14" name="Rectangle 13"/>
+          <p:cNvSpPr/>
+          <p:nvPr/>
+        </p:nvSpPr>
+        <p:spPr>
+          <a:xfrm>
+            <a:off x="457200" y="4343400"/>
+            <a:ext cx="502920" cy="502920"/>
+          </a:xfrm>
+          <a:prstGeom prst="rect">
+            <a:avLst/>
+          </a:prstGeom>
+          <a:solidFill>
+            <a:srgbClr val="4A90D9"/>
+          </a:solidFill>
+          <a:ln>
+            <a:noFill/>
+          </a:ln>
+        </p:spPr>
+        <p:style>
+          <a:lnRef idx="1">
+            <a:schemeClr val="accent1"/>
+          </a:lnRef>
+          <a:fillRef idx="3">
+            <a:schemeClr val="accent1"/>
+          </a:fillRef>
+          <a:effectRef idx="2">
+            <a:schemeClr val="accent1"/>
+          </a:effectRef>
+          <a:fontRef idx="minor">
+            <a:schemeClr val="lt1"/>
+          </a:fontRef>
+        </p:style>
+        <p:txBody>
+          <a:bodyPr rtlCol="0" anchor="ctr"/>
+          <a:lstStyle/>
+          <a:p>
+            <a:pPr algn="ctr"/>
+            <a:endParaRPr/>
+          </a:p>
+        </p:txBody>
+      </p:sp>
+      <p:sp>
+        <p:nvSpPr>
+          <p:cNvPr id="15" name="TextBox 14"/>
+          <p:cNvSpPr txBox="1"/>
+          <p:nvPr/>
+        </p:nvSpPr>
+        <p:spPr>
+          <a:xfrm>
+            <a:off x="457200" y="4389120"/>
+            <a:ext cx="502920" cy="411480"/>
+          </a:xfrm>
+          <a:prstGeom prst="rect">
+            <a:avLst/>
+          </a:prstGeom>
+          <a:noFill/>
+        </p:spPr>
+        <p:txBody>
+          <a:bodyPr wrap="square">
+            <a:spAutoFit/>
+          </a:bodyPr>
+          <a:lstStyle/>
+          <a:p>
+            <a:pPr algn="ctr"/>
+            <a:r>
+              <a:rPr sz="2000" b="1" i="0">
+                <a:solidFill>
+                  <a:srgbClr val="FFFFFF"/>
+                </a:solidFill>
+                <a:latin typeface="Calibri"/>
+              </a:rPr>
+              <a:t>4</a:t>
+            </a:r>
+          </a:p>
+        </p:txBody>
+      </p:sp>
+      <p:sp>
+        <p:nvSpPr>
+          <p:cNvPr id="16" name="TextBox 15"/>
+          <p:cNvSpPr txBox="1"/>
+          <p:nvPr/>
+        </p:nvSpPr>
+        <p:spPr>
+          <a:xfrm>
+            <a:off x="1143000" y="4389120"/>
+            <a:ext cx="10515600" cy="502920"/>
+          </a:xfrm>
+          <a:prstGeom prst="rect">
+            <a:avLst/>
+          </a:prstGeom>
+          <a:noFill/>
+        </p:spPr>
+        <p:txBody>
+          <a:bodyPr wrap="square">
+            <a:spAutoFit/>
+          </a:bodyPr>
+          <a:lstStyle/>
+          <a:p>
+            <a:pPr algn="l"/>
+            <a:r>
+              <a:rPr sz="1500" b="0" i="0">
+                <a:solidFill>
+                  <a:srgbClr val="FFFFFF"/>
+                </a:solidFill>
+                <a:latin typeface="Calibri"/>
+              </a:rPr>
+              <a:t>Targeting by compliance is beneficial for both delivery and eligibility decision problems</a:t>
+            </a:r>
+          </a:p>
+        </p:txBody>
+      </p:sp>
+      <p:sp>
+        <p:nvSpPr>
+          <p:cNvPr id="17" name="TextBox 16"/>
+          <p:cNvSpPr txBox="1"/>
+          <p:nvPr/>
+        </p:nvSpPr>
+        <p:spPr>
+          <a:xfrm>
+            <a:off x="457200" y="5486400"/>
+            <a:ext cx="11247120" cy="411480"/>
+          </a:xfrm>
+          <a:prstGeom prst="rect">
+            <a:avLst/>
+          </a:prstGeom>
+          <a:noFill/>
+        </p:spPr>
+        <p:txBody>
+          <a:bodyPr wrap="square">
+            <a:spAutoFit/>
+          </a:bodyPr>
+          <a:lstStyle/>
+          <a:p>
+            <a:pPr algn="ctr"/>
+            <a:r>
+              <a:rPr sz="1300" b="0" i="0">
+                <a:solidFill>
+                  <a:srgbClr val="CADCFC"/>
+                </a:solidFill>
+                <a:latin typeface="Calibri"/>
+              </a:rPr>
+              <a:t>AUTOC 0.0414 vs 0.0412  ·  Mean CLATE 0.1253 vs ~0.15  ·  N = 12,208  ✓</a:t>
+            </a:r>
+          </a:p>
+        </p:txBody>
+      </p:sp>
+      <p:sp>
+        <p:nvSpPr>
+          <p:cNvPr id="18" name="Rectangle 17"/>
+          <p:cNvSpPr/>
+          <p:nvPr/>
+        </p:nvSpPr>
+        <p:spPr>
+          <a:xfrm>
+            <a:off x="0" y="6309360"/>
+            <a:ext cx="12188952" cy="548640"/>
+          </a:xfrm>
+          <a:prstGeom prst="rect">
+            <a:avLst/>
+          </a:prstGeom>
+          <a:solidFill>
+            <a:srgbClr val="1E2761"/>
+          </a:solidFill>
+          <a:ln>
+            <a:noFill/>
+          </a:ln>
+        </p:spPr>
+        <p:style>
+          <a:lnRef idx="1">
+            <a:schemeClr val="accent1"/>
+          </a:lnRef>
+          <a:fillRef idx="3">
+            <a:schemeClr val="accent1"/>
+          </a:fillRef>
+          <a:effectRef idx="2">
+            <a:schemeClr val="accent1"/>
+          </a:effectRef>
+          <a:fontRef idx="minor">
+            <a:schemeClr val="lt1"/>
+          </a:fontRef>
+        </p:style>
+        <p:txBody>
+          <a:bodyPr rtlCol="0" anchor="ctr"/>
+          <a:lstStyle/>
+          <a:p>
+            <a:pPr algn="ctr"/>
+            <a:endParaRPr/>
+          </a:p>
+        </p:txBody>
+      </p:sp>
+      <p:sp>
+        <p:nvSpPr>
+          <p:cNvPr id="19" name="TextBox 18"/>
+          <p:cNvSpPr txBox="1"/>
+          <p:nvPr/>
+        </p:nvSpPr>
+        <p:spPr>
+          <a:xfrm>
+            <a:off x="457200" y="6355080"/>
+            <a:ext cx="10972800" cy="365760"/>
+          </a:xfrm>
+          <a:prstGeom prst="rect">
+            <a:avLst/>
+          </a:prstGeom>
+          <a:noFill/>
+        </p:spPr>
+        <p:txBody>
+          <a:bodyPr wrap="square">
+            <a:spAutoFit/>
+          </a:bodyPr>
+          <a:lstStyle/>
+          <a:p>
+            <a:pPr algn="l"/>
+            <a:r>
+              <a:rPr sz="1100" b="0" i="0">
+                <a:solidFill>
+                  <a:srgbClr val="CADCFC"/>
+                </a:solidFill>
+                <a:latin typeface="Calibri"/>
+              </a:rPr>
+              <a:t>Athey, Inoue &amp; Tsugawa (2025)  ·  Jack Chepin</a:t>
+            </a:r>
+          </a:p>
+        </p:txBody>
+      </p:sp>
+    </p:spTree>
+  </p:cSld>
+  <p:clrMapOvr>
+    <a:masterClrMapping/>
+  </p:clrMapOvr>
+</p:sld>
+</file>
+
+<file path=ppt/slides/slide2.xml><?xml version="1.0" encoding="utf-8"?>
+<p:sld xmlns:a="http://schemas.openxmlformats.org/drawingml/2006/main" xmlns:r="http://schemas.openxmlformats.org/officeDocument/2006/relationships" xmlns:p="http://schemas.openxmlformats.org/presentationml/2006/main">
   <p:cSld>
     <p:bg>
       <p:bgPr>
@@ -3393,7 +4564,14 @@
         <p:cNvGrpSpPr/>
         <p:nvPr/>
       </p:nvGrpSpPr>
-      <p:grpSpPr/>
+      <p:grpSpPr>
+        <a:xfrm>
+          <a:off x="0" y="0"/>
+          <a:ext cx="0" cy="0"/>
+          <a:chOff x="0" y="0"/>
+          <a:chExt cx="0" cy="0"/>
+        </a:xfrm>
+      </p:grpSpPr>
       <p:sp>
         <p:nvSpPr>
           <p:cNvPr id="2" name="Rectangle 1"/>
@@ -3434,6 +4612,7 @@
           <a:lstStyle/>
           <a:p>
             <a:pPr algn="ctr"/>
+            <a:endParaRPr/>
           </a:p>
         </p:txBody>
       </p:sp>
@@ -3467,21 +4646,109 @@
                 </a:solidFill>
                 <a:latin typeface="Calibri"/>
               </a:rPr>
-              <a:t>Replication Challenges</a:t>
-            </a:r>
-          </a:p>
-        </p:txBody>
-      </p:sp>
-      <p:sp>
-        <p:nvSpPr>
-          <p:cNvPr id="4" name="Rectangle 3"/>
+              <a:t>Research Question</a:t>
+            </a:r>
+          </a:p>
+        </p:txBody>
+      </p:sp>
+      <p:sp>
+        <p:nvSpPr>
+          <p:cNvPr id="4" name="TextBox 3"/>
+          <p:cNvSpPr txBox="1"/>
+          <p:nvPr/>
+        </p:nvSpPr>
+        <p:spPr>
+          <a:xfrm>
+            <a:off x="548640" y="1097280"/>
+            <a:ext cx="10972800" cy="400110"/>
+          </a:xfrm>
+          <a:prstGeom prst="rect">
+            <a:avLst/>
+          </a:prstGeom>
+          <a:noFill/>
+        </p:spPr>
+        <p:txBody>
+          <a:bodyPr wrap="square">
+            <a:spAutoFit/>
+          </a:bodyPr>
+          <a:lstStyle/>
+          <a:p>
+            <a:pPr algn="l"/>
+            <a:r>
+              <a:rPr sz="2000" b="1" i="0" dirty="0">
+                <a:solidFill>
+                  <a:srgbClr val="1A1A2E"/>
+                </a:solidFill>
+                <a:latin typeface="Calibri"/>
+              </a:rPr>
+              <a:t>When a government program has imperfect </a:t>
+            </a:r>
+            <a:r>
+              <a:rPr lang="en-US" sz="2000" b="1" dirty="0">
+                <a:solidFill>
+                  <a:srgbClr val="1A1A2E"/>
+                </a:solidFill>
+                <a:latin typeface="Calibri"/>
+              </a:rPr>
+              <a:t>compliance</a:t>
+            </a:r>
+            <a:r>
+              <a:rPr sz="2000" b="1" i="0" dirty="0">
+                <a:solidFill>
+                  <a:srgbClr val="1A1A2E"/>
+                </a:solidFill>
+                <a:latin typeface="Calibri"/>
+              </a:rPr>
+              <a:t>, who should be offered it?</a:t>
+            </a:r>
+          </a:p>
+        </p:txBody>
+      </p:sp>
+      <p:sp>
+        <p:nvSpPr>
+          <p:cNvPr id="5" name="TextBox 4"/>
+          <p:cNvSpPr txBox="1"/>
+          <p:nvPr/>
+        </p:nvSpPr>
+        <p:spPr>
+          <a:xfrm>
+            <a:off x="548640" y="1691640"/>
+            <a:ext cx="10972800" cy="457200"/>
+          </a:xfrm>
+          <a:prstGeom prst="rect">
+            <a:avLst/>
+          </a:prstGeom>
+          <a:noFill/>
+        </p:spPr>
+        <p:txBody>
+          <a:bodyPr wrap="square">
+            <a:spAutoFit/>
+          </a:bodyPr>
+          <a:lstStyle/>
+          <a:p>
+            <a:pPr algn="l"/>
+            <a:r>
+              <a:rPr sz="1600" b="0" i="1" dirty="0">
+                <a:solidFill>
+                  <a:srgbClr val="6B7A99"/>
+                </a:solidFill>
+                <a:latin typeface="Calibri"/>
+              </a:rPr>
+              <a:t>Should we prioritize people most likely to benefit — or most likely to actually enroll?</a:t>
+            </a:r>
+          </a:p>
+        </p:txBody>
+      </p:sp>
+      <p:sp>
+        <p:nvSpPr>
+          <p:cNvPr id="6" name="Rectangle 5"/>
           <p:cNvSpPr/>
           <p:nvPr/>
         </p:nvSpPr>
         <p:spPr>
           <a:xfrm>
-            <a:off x="365760" y="1143000"/>
-            <a:ext cx="11338560" cy="1325880"/>
+            <a:off x="548640" y="2110287"/>
+            <a:ext cx="10972800" cy="1371600"/>
           </a:xfrm>
           <a:prstGeom prst="rect">
             <a:avLst/>
@@ -3512,62 +4779,20 @@
           <a:lstStyle/>
           <a:p>
             <a:pPr algn="ctr"/>
-          </a:p>
-        </p:txBody>
-      </p:sp>
-      <p:sp>
-        <p:nvSpPr>
-          <p:cNvPr id="5" name="Rectangle 4"/>
-          <p:cNvSpPr/>
-          <p:nvPr/>
-        </p:nvSpPr>
-        <p:spPr>
-          <a:xfrm>
-            <a:off x="365760" y="1143000"/>
-            <a:ext cx="109728" cy="1325880"/>
-          </a:xfrm>
-          <a:prstGeom prst="rect">
-            <a:avLst/>
-          </a:prstGeom>
-          <a:solidFill>
-            <a:srgbClr val="4A90D9"/>
-          </a:solidFill>
-          <a:ln>
-            <a:noFill/>
-          </a:ln>
-        </p:spPr>
-        <p:style>
-          <a:lnRef idx="1">
-            <a:schemeClr val="accent1"/>
-          </a:lnRef>
-          <a:fillRef idx="3">
-            <a:schemeClr val="accent1"/>
-          </a:fillRef>
-          <a:effectRef idx="2">
-            <a:schemeClr val="accent1"/>
-          </a:effectRef>
-          <a:fontRef idx="minor">
-            <a:schemeClr val="lt1"/>
-          </a:fontRef>
-        </p:style>
-        <p:txBody>
-          <a:bodyPr rtlCol="0" anchor="ctr"/>
-          <a:lstStyle/>
-          <a:p>
-            <a:pPr algn="ctr"/>
-          </a:p>
-        </p:txBody>
-      </p:sp>
-      <p:sp>
-        <p:nvSpPr>
-          <p:cNvPr id="6" name="TextBox 5"/>
+            <a:endParaRPr/>
+          </a:p>
+        </p:txBody>
+      </p:sp>
+      <p:sp>
+        <p:nvSpPr>
+          <p:cNvPr id="7" name="TextBox 6"/>
           <p:cNvSpPr txBox="1"/>
           <p:nvPr/>
         </p:nvSpPr>
         <p:spPr>
           <a:xfrm>
-            <a:off x="594360" y="1234440"/>
-            <a:ext cx="10515600" cy="365760"/>
+            <a:off x="822960" y="2211887"/>
+            <a:ext cx="9144000" cy="365760"/>
           </a:xfrm>
           <a:prstGeom prst="rect">
             <a:avLst/>
@@ -3582,27 +4807,27 @@
           <a:p>
             <a:pPr algn="l"/>
             <a:r>
-              <a:rPr sz="1400" b="1" i="0">
-                <a:solidFill>
-                  <a:srgbClr val="1E2761"/>
-                </a:solidFill>
-                <a:latin typeface="Calibri"/>
-              </a:rPr>
-              <a:t>1.  Missing Data Handling</a:t>
-            </a:r>
-          </a:p>
-        </p:txBody>
-      </p:sp>
-      <p:sp>
-        <p:nvSpPr>
-          <p:cNvPr id="7" name="TextBox 6"/>
+              <a:rPr sz="1300" b="0" i="0" dirty="0">
+                <a:solidFill>
+                  <a:srgbClr val="6B7A99"/>
+                </a:solidFill>
+                <a:latin typeface="Calibri"/>
+              </a:rPr>
+              <a:t>Equation (1)  —  Conditional Local Average Treatment Effect (CLATE):</a:t>
+            </a:r>
+          </a:p>
+        </p:txBody>
+      </p:sp>
+      <p:sp>
+        <p:nvSpPr>
+          <p:cNvPr id="8" name="TextBox 7"/>
           <p:cNvSpPr txBox="1"/>
           <p:nvPr/>
         </p:nvSpPr>
         <p:spPr>
           <a:xfrm>
-            <a:off x="594360" y="1645920"/>
-            <a:ext cx="10515600" cy="731520"/>
+            <a:off x="2286000" y="2651760"/>
+            <a:ext cx="7315200" cy="640080"/>
           </a:xfrm>
           <a:prstGeom prst="rect">
             <a:avLst/>
@@ -3615,116 +4840,74 @@
           </a:bodyPr>
           <a:lstStyle/>
           <a:p>
-            <a:pPr algn="l"/>
-            <a:r>
-              <a:rPr sz="1300" b="0" i="0">
-                <a:solidFill>
-                  <a:srgbClr val="1A1A2E"/>
-                </a:solidFill>
-                <a:latin typeface="Calibri"/>
-              </a:rPr>
-              <a:t>na.omit() dropped 5,400 rows (12,208 → 6,816). Paper specifies missRanger
-imputation in Appendix A.5 — easy to miss, large effect on results.</a:t>
-            </a:r>
-          </a:p>
-        </p:txBody>
-      </p:sp>
-      <p:sp>
-        <p:nvSpPr>
-          <p:cNvPr id="8" name="Rectangle 7"/>
-          <p:cNvSpPr/>
-          <p:nvPr/>
-        </p:nvSpPr>
-        <p:spPr>
-          <a:xfrm>
-            <a:off x="365760" y="2651760"/>
-            <a:ext cx="11338560" cy="1325880"/>
-          </a:xfrm>
-          <a:prstGeom prst="rect">
-            <a:avLst/>
-          </a:prstGeom>
-          <a:solidFill>
-            <a:srgbClr val="FFFFFF"/>
-          </a:solidFill>
-          <a:ln>
-            <a:noFill/>
-          </a:ln>
-        </p:spPr>
-        <p:style>
-          <a:lnRef idx="1">
-            <a:schemeClr val="accent1"/>
-          </a:lnRef>
-          <a:fillRef idx="3">
-            <a:schemeClr val="accent1"/>
-          </a:fillRef>
-          <a:effectRef idx="2">
-            <a:schemeClr val="accent1"/>
-          </a:effectRef>
-          <a:fontRef idx="minor">
-            <a:schemeClr val="lt1"/>
-          </a:fontRef>
-        </p:style>
-        <p:txBody>
-          <a:bodyPr rtlCol="0" anchor="ctr"/>
-          <a:lstStyle/>
-          <a:p>
             <a:pPr algn="ctr"/>
-          </a:p>
-        </p:txBody>
-      </p:sp>
-      <p:sp>
-        <p:nvSpPr>
-          <p:cNvPr id="9" name="Rectangle 8"/>
-          <p:cNvSpPr/>
-          <p:nvPr/>
-        </p:nvSpPr>
-        <p:spPr>
-          <a:xfrm>
-            <a:off x="365760" y="2651760"/>
-            <a:ext cx="109728" cy="1325880"/>
-          </a:xfrm>
-          <a:prstGeom prst="rect">
-            <a:avLst/>
-          </a:prstGeom>
-          <a:solidFill>
-            <a:srgbClr val="4A90D9"/>
-          </a:solidFill>
-          <a:ln>
-            <a:noFill/>
-          </a:ln>
-        </p:spPr>
-        <p:style>
-          <a:lnRef idx="1">
-            <a:schemeClr val="accent1"/>
-          </a:lnRef>
-          <a:fillRef idx="3">
-            <a:schemeClr val="accent1"/>
-          </a:fillRef>
-          <a:effectRef idx="2">
-            <a:schemeClr val="accent1"/>
-          </a:effectRef>
-          <a:fontRef idx="minor">
-            <a:schemeClr val="lt1"/>
-          </a:fontRef>
-        </p:style>
-        <p:txBody>
-          <a:bodyPr rtlCol="0" anchor="ctr"/>
-          <a:lstStyle/>
-          <a:p>
-            <a:pPr algn="ctr"/>
-          </a:p>
-        </p:txBody>
-      </p:sp>
-      <p:sp>
-        <p:nvSpPr>
-          <p:cNvPr id="10" name="TextBox 9"/>
+            <a:r>
+              <a:rPr sz="2800" b="1" i="0" dirty="0" err="1">
+                <a:solidFill>
+                  <a:srgbClr val="1E2761"/>
+                </a:solidFill>
+                <a:latin typeface="Calibri"/>
+              </a:rPr>
+              <a:t>τ_CL</a:t>
+            </a:r>
+            <a:r>
+              <a:rPr sz="2800" b="1" i="0" dirty="0">
+                <a:solidFill>
+                  <a:srgbClr val="1E2761"/>
+                </a:solidFill>
+                <a:latin typeface="Calibri"/>
+              </a:rPr>
+              <a:t>(x)  =  </a:t>
+            </a:r>
+            <a:r>
+              <a:rPr sz="2800" b="1" i="0" dirty="0" err="1">
+                <a:solidFill>
+                  <a:srgbClr val="1E2761"/>
+                </a:solidFill>
+                <a:latin typeface="Calibri"/>
+              </a:rPr>
+              <a:t>τ_Y</a:t>
+            </a:r>
+            <a:r>
+              <a:rPr sz="2800" b="1" i="0" dirty="0">
+                <a:solidFill>
+                  <a:srgbClr val="1E2761"/>
+                </a:solidFill>
+                <a:latin typeface="Calibri"/>
+              </a:rPr>
+              <a:t>(x)  /  </a:t>
+            </a:r>
+            <a:r>
+              <a:rPr sz="2800" b="1" i="0" dirty="0" err="1">
+                <a:solidFill>
+                  <a:srgbClr val="1E2761"/>
+                </a:solidFill>
+                <a:latin typeface="Calibri"/>
+              </a:rPr>
+              <a:t>τ_W</a:t>
+            </a:r>
+            <a:r>
+              <a:rPr sz="2800" b="1" i="0" dirty="0">
+                <a:solidFill>
+                  <a:srgbClr val="1E2761"/>
+                </a:solidFill>
+                <a:latin typeface="Calibri"/>
+              </a:rPr>
+              <a:t>(x)</a:t>
+            </a:r>
+          </a:p>
+        </p:txBody>
+      </p:sp>
+      <p:sp>
+        <p:nvSpPr>
+          <p:cNvPr id="9" name="TextBox 8"/>
           <p:cNvSpPr txBox="1"/>
           <p:nvPr/>
         </p:nvSpPr>
         <p:spPr>
           <a:xfrm>
-            <a:off x="594360" y="2743200"/>
-            <a:ext cx="10515600" cy="365760"/>
+            <a:off x="1097280" y="3478303"/>
+            <a:ext cx="10058400" cy="365760"/>
           </a:xfrm>
           <a:prstGeom prst="rect">
             <a:avLst/>
@@ -3737,29 +4920,56 @@
           </a:bodyPr>
           <a:lstStyle/>
           <a:p>
-            <a:pPr algn="l"/>
-            <a:r>
-              <a:rPr sz="1400" b="1" i="0">
-                <a:solidFill>
-                  <a:srgbClr val="1E2761"/>
-                </a:solidFill>
-                <a:latin typeface="Calibri"/>
-              </a:rPr>
-              <a:t>2.  Variable Name Mapping</a:t>
-            </a:r>
-          </a:p>
-        </p:txBody>
-      </p:sp>
-      <p:sp>
-        <p:nvSpPr>
-          <p:cNvPr id="11" name="TextBox 10"/>
+            <a:pPr algn="ctr"/>
+            <a:r>
+              <a:rPr sz="1300" b="0" i="0" dirty="0" err="1">
+                <a:solidFill>
+                  <a:srgbClr val="6B7A99"/>
+                </a:solidFill>
+                <a:latin typeface="Calibri"/>
+              </a:rPr>
+              <a:t>τ_Y</a:t>
+            </a:r>
+            <a:r>
+              <a:rPr sz="1300" b="0" i="0" dirty="0">
+                <a:solidFill>
+                  <a:srgbClr val="6B7A99"/>
+                </a:solidFill>
+                <a:latin typeface="Calibri"/>
+              </a:rPr>
+              <a:t>(x) = Conditional ITT (outcome CATE)       </a:t>
+            </a:r>
+            <a:r>
+              <a:rPr sz="1300" b="0" i="0" dirty="0" err="1">
+                <a:solidFill>
+                  <a:srgbClr val="6B7A99"/>
+                </a:solidFill>
+                <a:latin typeface="Calibri"/>
+              </a:rPr>
+              <a:t>τ_W</a:t>
+            </a:r>
+            <a:r>
+              <a:rPr sz="1300" b="0" i="0" dirty="0">
+                <a:solidFill>
+                  <a:srgbClr val="6B7A99"/>
+                </a:solidFill>
+                <a:latin typeface="Calibri"/>
+              </a:rPr>
+              <a:t>(x) = Compliance CATE</a:t>
+            </a:r>
+          </a:p>
+        </p:txBody>
+      </p:sp>
+      <p:sp>
+        <p:nvSpPr>
+          <p:cNvPr id="10" name="TextBox 9"/>
           <p:cNvSpPr txBox="1"/>
           <p:nvPr/>
         </p:nvSpPr>
         <p:spPr>
           <a:xfrm>
-            <a:off x="594360" y="3154680"/>
-            <a:ext cx="10515600" cy="731520"/>
+            <a:off x="548640" y="4572000"/>
+            <a:ext cx="10972800" cy="457200"/>
           </a:xfrm>
           <a:prstGeom prst="rect">
             <a:avLst/>
@@ -3774,178 +4984,20 @@
           <a:p>
             <a:pPr algn="l"/>
             <a:r>
-              <a:rPr sz="1300" b="0" i="0">
-                <a:solidFill>
-                  <a:srgbClr val="1A1A2E"/>
-                </a:solidFill>
-                <a:latin typeface="Calibri"/>
-              </a:rPr>
-              <a:t>Covariates described in prose, not as variable names. Required careful
-cross-referencing between dataset columns and paper description.</a:t>
-            </a:r>
-          </a:p>
-        </p:txBody>
-      </p:sp>
-      <p:sp>
-        <p:nvSpPr>
-          <p:cNvPr id="12" name="Rectangle 11"/>
-          <p:cNvSpPr/>
-          <p:nvPr/>
-        </p:nvSpPr>
-        <p:spPr>
-          <a:xfrm>
-            <a:off x="365760" y="4160520"/>
-            <a:ext cx="11338560" cy="1325880"/>
-          </a:xfrm>
-          <a:prstGeom prst="rect">
-            <a:avLst/>
-          </a:prstGeom>
-          <a:solidFill>
-            <a:srgbClr val="FFFFFF"/>
-          </a:solidFill>
-          <a:ln>
-            <a:noFill/>
-          </a:ln>
-        </p:spPr>
-        <p:style>
-          <a:lnRef idx="1">
-            <a:schemeClr val="accent1"/>
-          </a:lnRef>
-          <a:fillRef idx="3">
-            <a:schemeClr val="accent1"/>
-          </a:fillRef>
-          <a:effectRef idx="2">
-            <a:schemeClr val="accent1"/>
-          </a:effectRef>
-          <a:fontRef idx="minor">
-            <a:schemeClr val="lt1"/>
-          </a:fontRef>
-        </p:style>
-        <p:txBody>
-          <a:bodyPr rtlCol="0" anchor="ctr"/>
-          <a:lstStyle/>
-          <a:p>
-            <a:pPr algn="ctr"/>
-          </a:p>
-        </p:txBody>
-      </p:sp>
-      <p:sp>
-        <p:nvSpPr>
-          <p:cNvPr id="13" name="Rectangle 12"/>
-          <p:cNvSpPr/>
-          <p:nvPr/>
-        </p:nvSpPr>
-        <p:spPr>
-          <a:xfrm>
-            <a:off x="365760" y="4160520"/>
-            <a:ext cx="109728" cy="1325880"/>
-          </a:xfrm>
-          <a:prstGeom prst="rect">
-            <a:avLst/>
-          </a:prstGeom>
-          <a:solidFill>
-            <a:srgbClr val="4A90D9"/>
-          </a:solidFill>
-          <a:ln>
-            <a:noFill/>
-          </a:ln>
-        </p:spPr>
-        <p:style>
-          <a:lnRef idx="1">
-            <a:schemeClr val="accent1"/>
-          </a:lnRef>
-          <a:fillRef idx="3">
-            <a:schemeClr val="accent1"/>
-          </a:fillRef>
-          <a:effectRef idx="2">
-            <a:schemeClr val="accent1"/>
-          </a:effectRef>
-          <a:fontRef idx="minor">
-            <a:schemeClr val="lt1"/>
-          </a:fontRef>
-        </p:style>
-        <p:txBody>
-          <a:bodyPr rtlCol="0" anchor="ctr"/>
-          <a:lstStyle/>
-          <a:p>
-            <a:pPr algn="ctr"/>
-          </a:p>
-        </p:txBody>
-      </p:sp>
-      <p:sp>
-        <p:nvSpPr>
-          <p:cNvPr id="14" name="TextBox 13"/>
-          <p:cNvSpPr txBox="1"/>
-          <p:nvPr/>
-        </p:nvSpPr>
-        <p:spPr>
-          <a:xfrm>
-            <a:off x="594360" y="4251959"/>
-            <a:ext cx="10515600" cy="365760"/>
-          </a:xfrm>
-          <a:prstGeom prst="rect">
-            <a:avLst/>
-          </a:prstGeom>
-          <a:noFill/>
-        </p:spPr>
-        <p:txBody>
-          <a:bodyPr wrap="square">
-            <a:spAutoFit/>
-          </a:bodyPr>
-          <a:lstStyle/>
-          <a:p>
-            <a:pPr algn="l"/>
-            <a:r>
               <a:rPr sz="1400" b="1" i="0">
                 <a:solidFill>
-                  <a:srgbClr val="1E2761"/>
-                </a:solidFill>
-                <a:latin typeface="Calibri"/>
-              </a:rPr>
-              <a:t>3.  Row-Length Mismatch Bug</a:t>
-            </a:r>
-          </a:p>
-        </p:txBody>
-      </p:sp>
-      <p:sp>
-        <p:nvSpPr>
-          <p:cNvPr id="15" name="TextBox 14"/>
-          <p:cNvSpPr txBox="1"/>
-          <p:nvPr/>
-        </p:nvSpPr>
-        <p:spPr>
-          <a:xfrm>
-            <a:off x="594360" y="4663440"/>
-            <a:ext cx="10515600" cy="731520"/>
-          </a:xfrm>
-          <a:prstGeom prst="rect">
-            <a:avLst/>
-          </a:prstGeom>
-          <a:noFill/>
-        </p:spPr>
-        <p:txBody>
-          <a:bodyPr wrap="square">
-            <a:spAutoFit/>
-          </a:bodyPr>
-          <a:lstStyle/>
-          <a:p>
-            <a:pPr algn="l"/>
-            <a:r>
-              <a:rPr sz="1300" b="0" i="0">
-                <a:solidFill>
-                  <a:srgbClr val="1A1A2E"/>
-                </a:solidFill>
-                <a:latin typeface="Calibri"/>
-              </a:rPr>
-              <a:t>Re-assigning W and Z from raw data mid-script while X remained filtered
-caused a data.frame() error. Fixed by rebuilding all variables in one pipeline.</a:t>
-            </a:r>
-          </a:p>
-        </p:txBody>
-      </p:sp>
-      <p:sp>
-        <p:nvSpPr>
-          <p:cNvPr id="16" name="Rectangle 15"/>
+                  <a:srgbClr val="4A90D9"/>
+                </a:solidFill>
+                <a:latin typeface="Calibri"/>
+              </a:rPr>
+              <a:t>Replication targets:  Equation (1)  +  Figure F1 (TOC curve for compliance)</a:t>
+            </a:r>
+          </a:p>
+        </p:txBody>
+      </p:sp>
+      <p:sp>
+        <p:nvSpPr>
+          <p:cNvPr id="11" name="Rectangle 10"/>
           <p:cNvSpPr/>
           <p:nvPr/>
         </p:nvSpPr>
@@ -3983,12 +5035,13 @@
           <a:lstStyle/>
           <a:p>
             <a:pPr algn="ctr"/>
-          </a:p>
-        </p:txBody>
-      </p:sp>
-      <p:sp>
-        <p:nvSpPr>
-          <p:cNvPr id="17" name="TextBox 16"/>
+            <a:endParaRPr/>
+          </a:p>
+        </p:txBody>
+      </p:sp>
+      <p:sp>
+        <p:nvSpPr>
+          <p:cNvPr id="12" name="TextBox 11"/>
           <p:cNvSpPr txBox="1"/>
           <p:nvPr/>
         </p:nvSpPr>
@@ -4021,6 +5074,36 @@
           </a:p>
         </p:txBody>
       </p:sp>
+      <p:pic>
+        <p:nvPicPr>
+          <p:cNvPr id="14" name="Picture 13">
+            <a:extLst>
+              <a:ext uri="{FF2B5EF4-FFF2-40B4-BE49-F238E27FC236}">
+                <a16:creationId xmlns:a16="http://schemas.microsoft.com/office/drawing/2014/main" id="{B776EBDB-5E1A-3C38-A745-A9CFF7D1795E}"/>
+              </a:ext>
+            </a:extLst>
+          </p:cNvPr>
+          <p:cNvPicPr>
+            <a:picLocks noChangeAspect="1"/>
+          </p:cNvPicPr>
+          <p:nvPr/>
+        </p:nvPicPr>
+        <p:blipFill>
+          <a:blip r:embed="rId2"/>
+          <a:stretch>
+            <a:fillRect/>
+          </a:stretch>
+        </p:blipFill>
+        <p:spPr>
+          <a:xfrm>
+            <a:off x="7736628" y="3687498"/>
+            <a:ext cx="4125172" cy="2512046"/>
+          </a:xfrm>
+          <a:prstGeom prst="rect">
+            <a:avLst/>
+          </a:prstGeom>
+        </p:spPr>
+      </p:pic>
     </p:spTree>
   </p:cSld>
   <p:clrMapOvr>
@@ -4029,720 +5112,8 @@
 </p:sld>
 </file>
 
-<file path=ppt/slides/slide11.xml><?xml version="1.0" encoding="utf-8"?>
-<p:sld xmlns:a="http://schemas.openxmlformats.org/drawingml/2006/main" xmlns:p="http://schemas.openxmlformats.org/presentationml/2006/main" xmlns:r="http://schemas.openxmlformats.org/officeDocument/2006/relationships">
-  <p:cSld>
-    <p:bg>
-      <p:bgPr>
-        <a:solidFill>
-          <a:srgbClr val="1A1A2E"/>
-        </a:solidFill>
-        <a:effectLst/>
-      </p:bgPr>
-    </p:bg>
-    <p:spTree>
-      <p:nvGrpSpPr>
-        <p:cNvPr id="1" name=""/>
-        <p:cNvGrpSpPr/>
-        <p:nvPr/>
-      </p:nvGrpSpPr>
-      <p:grpSpPr/>
-      <p:sp>
-        <p:nvSpPr>
-          <p:cNvPr id="2" name="Rectangle 1"/>
-          <p:cNvSpPr/>
-          <p:nvPr/>
-        </p:nvSpPr>
-        <p:spPr>
-          <a:xfrm>
-            <a:off x="0" y="0"/>
-            <a:ext cx="12188952" cy="6858000"/>
-          </a:xfrm>
-          <a:prstGeom prst="rect">
-            <a:avLst/>
-          </a:prstGeom>
-          <a:solidFill>
-            <a:srgbClr val="1A1A2E"/>
-          </a:solidFill>
-          <a:ln>
-            <a:noFill/>
-          </a:ln>
-        </p:spPr>
-        <p:style>
-          <a:lnRef idx="1">
-            <a:schemeClr val="accent1"/>
-          </a:lnRef>
-          <a:fillRef idx="3">
-            <a:schemeClr val="accent1"/>
-          </a:fillRef>
-          <a:effectRef idx="2">
-            <a:schemeClr val="accent1"/>
-          </a:effectRef>
-          <a:fontRef idx="minor">
-            <a:schemeClr val="lt1"/>
-          </a:fontRef>
-        </p:style>
-        <p:txBody>
-          <a:bodyPr rtlCol="0" anchor="ctr"/>
-          <a:lstStyle/>
-          <a:p>
-            <a:pPr algn="ctr"/>
-          </a:p>
-        </p:txBody>
-      </p:sp>
-      <p:sp>
-        <p:nvSpPr>
-          <p:cNvPr id="3" name="Rectangle 2"/>
-          <p:cNvSpPr/>
-          <p:nvPr/>
-        </p:nvSpPr>
-        <p:spPr>
-          <a:xfrm>
-            <a:off x="0" y="0"/>
-            <a:ext cx="12188952" cy="914400"/>
-          </a:xfrm>
-          <a:prstGeom prst="rect">
-            <a:avLst/>
-          </a:prstGeom>
-          <a:solidFill>
-            <a:srgbClr val="1E2761"/>
-          </a:solidFill>
-          <a:ln>
-            <a:noFill/>
-          </a:ln>
-        </p:spPr>
-        <p:style>
-          <a:lnRef idx="1">
-            <a:schemeClr val="accent1"/>
-          </a:lnRef>
-          <a:fillRef idx="3">
-            <a:schemeClr val="accent1"/>
-          </a:fillRef>
-          <a:effectRef idx="2">
-            <a:schemeClr val="accent1"/>
-          </a:effectRef>
-          <a:fontRef idx="minor">
-            <a:schemeClr val="lt1"/>
-          </a:fontRef>
-        </p:style>
-        <p:txBody>
-          <a:bodyPr rtlCol="0" anchor="ctr"/>
-          <a:lstStyle/>
-          <a:p>
-            <a:pPr algn="ctr"/>
-          </a:p>
-        </p:txBody>
-      </p:sp>
-      <p:sp>
-        <p:nvSpPr>
-          <p:cNvPr id="4" name="TextBox 3"/>
-          <p:cNvSpPr txBox="1"/>
-          <p:nvPr/>
-        </p:nvSpPr>
-        <p:spPr>
-          <a:xfrm>
-            <a:off x="457200" y="137160"/>
-            <a:ext cx="10972800" cy="640080"/>
-          </a:xfrm>
-          <a:prstGeom prst="rect">
-            <a:avLst/>
-          </a:prstGeom>
-          <a:noFill/>
-        </p:spPr>
-        <p:txBody>
-          <a:bodyPr wrap="square">
-            <a:spAutoFit/>
-          </a:bodyPr>
-          <a:lstStyle/>
-          <a:p>
-            <a:pPr algn="l"/>
-            <a:r>
-              <a:rPr sz="2600" b="1" i="0">
-                <a:solidFill>
-                  <a:srgbClr val="FFFFFF"/>
-                </a:solidFill>
-                <a:latin typeface="Calibri"/>
-              </a:rPr>
-              <a:t>Conclusion</a:t>
-            </a:r>
-          </a:p>
-        </p:txBody>
-      </p:sp>
-      <p:sp>
-        <p:nvSpPr>
-          <p:cNvPr id="5" name="Rectangle 4"/>
-          <p:cNvSpPr/>
-          <p:nvPr/>
-        </p:nvSpPr>
-        <p:spPr>
-          <a:xfrm>
-            <a:off x="457200" y="1188720"/>
-            <a:ext cx="502920" cy="502920"/>
-          </a:xfrm>
-          <a:prstGeom prst="rect">
-            <a:avLst/>
-          </a:prstGeom>
-          <a:solidFill>
-            <a:srgbClr val="4A90D9"/>
-          </a:solidFill>
-          <a:ln>
-            <a:noFill/>
-          </a:ln>
-        </p:spPr>
-        <p:style>
-          <a:lnRef idx="1">
-            <a:schemeClr val="accent1"/>
-          </a:lnRef>
-          <a:fillRef idx="3">
-            <a:schemeClr val="accent1"/>
-          </a:fillRef>
-          <a:effectRef idx="2">
-            <a:schemeClr val="accent1"/>
-          </a:effectRef>
-          <a:fontRef idx="minor">
-            <a:schemeClr val="lt1"/>
-          </a:fontRef>
-        </p:style>
-        <p:txBody>
-          <a:bodyPr rtlCol="0" anchor="ctr"/>
-          <a:lstStyle/>
-          <a:p>
-            <a:pPr algn="ctr"/>
-          </a:p>
-        </p:txBody>
-      </p:sp>
-      <p:sp>
-        <p:nvSpPr>
-          <p:cNvPr id="6" name="TextBox 5"/>
-          <p:cNvSpPr txBox="1"/>
-          <p:nvPr/>
-        </p:nvSpPr>
-        <p:spPr>
-          <a:xfrm>
-            <a:off x="457200" y="1234440"/>
-            <a:ext cx="502920" cy="411480"/>
-          </a:xfrm>
-          <a:prstGeom prst="rect">
-            <a:avLst/>
-          </a:prstGeom>
-          <a:noFill/>
-        </p:spPr>
-        <p:txBody>
-          <a:bodyPr wrap="square">
-            <a:spAutoFit/>
-          </a:bodyPr>
-          <a:lstStyle/>
-          <a:p>
-            <a:pPr algn="ctr"/>
-            <a:r>
-              <a:rPr sz="2000" b="1" i="0">
-                <a:solidFill>
-                  <a:srgbClr val="FFFFFF"/>
-                </a:solidFill>
-                <a:latin typeface="Calibri"/>
-              </a:rPr>
-              <a:t>1</a:t>
-            </a:r>
-          </a:p>
-        </p:txBody>
-      </p:sp>
-      <p:sp>
-        <p:nvSpPr>
-          <p:cNvPr id="7" name="TextBox 6"/>
-          <p:cNvSpPr txBox="1"/>
-          <p:nvPr/>
-        </p:nvSpPr>
-        <p:spPr>
-          <a:xfrm>
-            <a:off x="1143000" y="1234440"/>
-            <a:ext cx="10515600" cy="502920"/>
-          </a:xfrm>
-          <a:prstGeom prst="rect">
-            <a:avLst/>
-          </a:prstGeom>
-          <a:noFill/>
-        </p:spPr>
-        <p:txBody>
-          <a:bodyPr wrap="square">
-            <a:spAutoFit/>
-          </a:bodyPr>
-          <a:lstStyle/>
-          <a:p>
-            <a:pPr algn="l"/>
-            <a:r>
-              <a:rPr sz="1500" b="0" i="0">
-                <a:solidFill>
-                  <a:srgbClr val="FFFFFF"/>
-                </a:solidFill>
-                <a:latin typeface="Calibri"/>
-              </a:rPr>
-              <a:t>Preprocessing decisions matter as much as estimation decisions — document everything</a:t>
-            </a:r>
-          </a:p>
-        </p:txBody>
-      </p:sp>
-      <p:sp>
-        <p:nvSpPr>
-          <p:cNvPr id="8" name="Rectangle 7"/>
-          <p:cNvSpPr/>
-          <p:nvPr/>
-        </p:nvSpPr>
-        <p:spPr>
-          <a:xfrm>
-            <a:off x="457200" y="2240280"/>
-            <a:ext cx="502920" cy="502920"/>
-          </a:xfrm>
-          <a:prstGeom prst="rect">
-            <a:avLst/>
-          </a:prstGeom>
-          <a:solidFill>
-            <a:srgbClr val="4A90D9"/>
-          </a:solidFill>
-          <a:ln>
-            <a:noFill/>
-          </a:ln>
-        </p:spPr>
-        <p:style>
-          <a:lnRef idx="1">
-            <a:schemeClr val="accent1"/>
-          </a:lnRef>
-          <a:fillRef idx="3">
-            <a:schemeClr val="accent1"/>
-          </a:fillRef>
-          <a:effectRef idx="2">
-            <a:schemeClr val="accent1"/>
-          </a:effectRef>
-          <a:fontRef idx="minor">
-            <a:schemeClr val="lt1"/>
-          </a:fontRef>
-        </p:style>
-        <p:txBody>
-          <a:bodyPr rtlCol="0" anchor="ctr"/>
-          <a:lstStyle/>
-          <a:p>
-            <a:pPr algn="ctr"/>
-          </a:p>
-        </p:txBody>
-      </p:sp>
-      <p:sp>
-        <p:nvSpPr>
-          <p:cNvPr id="9" name="TextBox 8"/>
-          <p:cNvSpPr txBox="1"/>
-          <p:nvPr/>
-        </p:nvSpPr>
-        <p:spPr>
-          <a:xfrm>
-            <a:off x="457200" y="2286000"/>
-            <a:ext cx="502920" cy="411480"/>
-          </a:xfrm>
-          <a:prstGeom prst="rect">
-            <a:avLst/>
-          </a:prstGeom>
-          <a:noFill/>
-        </p:spPr>
-        <p:txBody>
-          <a:bodyPr wrap="square">
-            <a:spAutoFit/>
-          </a:bodyPr>
-          <a:lstStyle/>
-          <a:p>
-            <a:pPr algn="ctr"/>
-            <a:r>
-              <a:rPr sz="2000" b="1" i="0">
-                <a:solidFill>
-                  <a:srgbClr val="FFFFFF"/>
-                </a:solidFill>
-                <a:latin typeface="Calibri"/>
-              </a:rPr>
-              <a:t>2</a:t>
-            </a:r>
-          </a:p>
-        </p:txBody>
-      </p:sp>
-      <p:sp>
-        <p:nvSpPr>
-          <p:cNvPr id="10" name="TextBox 9"/>
-          <p:cNvSpPr txBox="1"/>
-          <p:nvPr/>
-        </p:nvSpPr>
-        <p:spPr>
-          <a:xfrm>
-            <a:off x="1143000" y="2286000"/>
-            <a:ext cx="10515600" cy="502920"/>
-          </a:xfrm>
-          <a:prstGeom prst="rect">
-            <a:avLst/>
-          </a:prstGeom>
-          <a:noFill/>
-        </p:spPr>
-        <p:txBody>
-          <a:bodyPr wrap="square">
-            <a:spAutoFit/>
-          </a:bodyPr>
-          <a:lstStyle/>
-          <a:p>
-            <a:pPr algn="l"/>
-            <a:r>
-              <a:rPr sz="1500" b="0" i="0">
-                <a:solidFill>
-                  <a:srgbClr val="FFFFFF"/>
-                </a:solidFill>
-                <a:latin typeface="Calibri"/>
-              </a:rPr>
-              <a:t>GRF results are highly reproducible when the sample is correctly constructed</a:t>
-            </a:r>
-          </a:p>
-        </p:txBody>
-      </p:sp>
-      <p:sp>
-        <p:nvSpPr>
-          <p:cNvPr id="11" name="Rectangle 10"/>
-          <p:cNvSpPr/>
-          <p:nvPr/>
-        </p:nvSpPr>
-        <p:spPr>
-          <a:xfrm>
-            <a:off x="457200" y="3291839"/>
-            <a:ext cx="502920" cy="502920"/>
-          </a:xfrm>
-          <a:prstGeom prst="rect">
-            <a:avLst/>
-          </a:prstGeom>
-          <a:solidFill>
-            <a:srgbClr val="4A90D9"/>
-          </a:solidFill>
-          <a:ln>
-            <a:noFill/>
-          </a:ln>
-        </p:spPr>
-        <p:style>
-          <a:lnRef idx="1">
-            <a:schemeClr val="accent1"/>
-          </a:lnRef>
-          <a:fillRef idx="3">
-            <a:schemeClr val="accent1"/>
-          </a:fillRef>
-          <a:effectRef idx="2">
-            <a:schemeClr val="accent1"/>
-          </a:effectRef>
-          <a:fontRef idx="minor">
-            <a:schemeClr val="lt1"/>
-          </a:fontRef>
-        </p:style>
-        <p:txBody>
-          <a:bodyPr rtlCol="0" anchor="ctr"/>
-          <a:lstStyle/>
-          <a:p>
-            <a:pPr algn="ctr"/>
-          </a:p>
-        </p:txBody>
-      </p:sp>
-      <p:sp>
-        <p:nvSpPr>
-          <p:cNvPr id="12" name="TextBox 11"/>
-          <p:cNvSpPr txBox="1"/>
-          <p:nvPr/>
-        </p:nvSpPr>
-        <p:spPr>
-          <a:xfrm>
-            <a:off x="457200" y="3337559"/>
-            <a:ext cx="502920" cy="411480"/>
-          </a:xfrm>
-          <a:prstGeom prst="rect">
-            <a:avLst/>
-          </a:prstGeom>
-          <a:noFill/>
-        </p:spPr>
-        <p:txBody>
-          <a:bodyPr wrap="square">
-            <a:spAutoFit/>
-          </a:bodyPr>
-          <a:lstStyle/>
-          <a:p>
-            <a:pPr algn="ctr"/>
-            <a:r>
-              <a:rPr sz="2000" b="1" i="0">
-                <a:solidFill>
-                  <a:srgbClr val="FFFFFF"/>
-                </a:solidFill>
-                <a:latin typeface="Calibri"/>
-              </a:rPr>
-              <a:t>3</a:t>
-            </a:r>
-          </a:p>
-        </p:txBody>
-      </p:sp>
-      <p:sp>
-        <p:nvSpPr>
-          <p:cNvPr id="13" name="TextBox 12"/>
-          <p:cNvSpPr txBox="1"/>
-          <p:nvPr/>
-        </p:nvSpPr>
-        <p:spPr>
-          <a:xfrm>
-            <a:off x="1143000" y="3337559"/>
-            <a:ext cx="10515600" cy="502920"/>
-          </a:xfrm>
-          <a:prstGeom prst="rect">
-            <a:avLst/>
-          </a:prstGeom>
-          <a:noFill/>
-        </p:spPr>
-        <p:txBody>
-          <a:bodyPr wrap="square">
-            <a:spAutoFit/>
-          </a:bodyPr>
-          <a:lstStyle/>
-          <a:p>
-            <a:pPr algn="l"/>
-            <a:r>
-              <a:rPr sz="1500" b="0" i="0">
-                <a:solidFill>
-                  <a:srgbClr val="FFFFFF"/>
-                </a:solidFill>
-                <a:latin typeface="Calibri"/>
-              </a:rPr>
-              <a:t>Compliance heterogeneity (τ_W) is more precisely estimated than benefit heterogeneity (τ_CL)</a:t>
-            </a:r>
-          </a:p>
-        </p:txBody>
-      </p:sp>
-      <p:sp>
-        <p:nvSpPr>
-          <p:cNvPr id="14" name="Rectangle 13"/>
-          <p:cNvSpPr/>
-          <p:nvPr/>
-        </p:nvSpPr>
-        <p:spPr>
-          <a:xfrm>
-            <a:off x="457200" y="4343400"/>
-            <a:ext cx="502920" cy="502920"/>
-          </a:xfrm>
-          <a:prstGeom prst="rect">
-            <a:avLst/>
-          </a:prstGeom>
-          <a:solidFill>
-            <a:srgbClr val="4A90D9"/>
-          </a:solidFill>
-          <a:ln>
-            <a:noFill/>
-          </a:ln>
-        </p:spPr>
-        <p:style>
-          <a:lnRef idx="1">
-            <a:schemeClr val="accent1"/>
-          </a:lnRef>
-          <a:fillRef idx="3">
-            <a:schemeClr val="accent1"/>
-          </a:fillRef>
-          <a:effectRef idx="2">
-            <a:schemeClr val="accent1"/>
-          </a:effectRef>
-          <a:fontRef idx="minor">
-            <a:schemeClr val="lt1"/>
-          </a:fontRef>
-        </p:style>
-        <p:txBody>
-          <a:bodyPr rtlCol="0" anchor="ctr"/>
-          <a:lstStyle/>
-          <a:p>
-            <a:pPr algn="ctr"/>
-          </a:p>
-        </p:txBody>
-      </p:sp>
-      <p:sp>
-        <p:nvSpPr>
-          <p:cNvPr id="15" name="TextBox 14"/>
-          <p:cNvSpPr txBox="1"/>
-          <p:nvPr/>
-        </p:nvSpPr>
-        <p:spPr>
-          <a:xfrm>
-            <a:off x="457200" y="4389120"/>
-            <a:ext cx="502920" cy="411480"/>
-          </a:xfrm>
-          <a:prstGeom prst="rect">
-            <a:avLst/>
-          </a:prstGeom>
-          <a:noFill/>
-        </p:spPr>
-        <p:txBody>
-          <a:bodyPr wrap="square">
-            <a:spAutoFit/>
-          </a:bodyPr>
-          <a:lstStyle/>
-          <a:p>
-            <a:pPr algn="ctr"/>
-            <a:r>
-              <a:rPr sz="2000" b="1" i="0">
-                <a:solidFill>
-                  <a:srgbClr val="FFFFFF"/>
-                </a:solidFill>
-                <a:latin typeface="Calibri"/>
-              </a:rPr>
-              <a:t>4</a:t>
-            </a:r>
-          </a:p>
-        </p:txBody>
-      </p:sp>
-      <p:sp>
-        <p:nvSpPr>
-          <p:cNvPr id="16" name="TextBox 15"/>
-          <p:cNvSpPr txBox="1"/>
-          <p:nvPr/>
-        </p:nvSpPr>
-        <p:spPr>
-          <a:xfrm>
-            <a:off x="1143000" y="4389120"/>
-            <a:ext cx="10515600" cy="502920"/>
-          </a:xfrm>
-          <a:prstGeom prst="rect">
-            <a:avLst/>
-          </a:prstGeom>
-          <a:noFill/>
-        </p:spPr>
-        <p:txBody>
-          <a:bodyPr wrap="square">
-            <a:spAutoFit/>
-          </a:bodyPr>
-          <a:lstStyle/>
-          <a:p>
-            <a:pPr algn="l"/>
-            <a:r>
-              <a:rPr sz="1500" b="0" i="0">
-                <a:solidFill>
-                  <a:srgbClr val="FFFFFF"/>
-                </a:solidFill>
-                <a:latin typeface="Calibri"/>
-              </a:rPr>
-              <a:t>Targeting by compliance is beneficial for both delivery and eligibility decision problems</a:t>
-            </a:r>
-          </a:p>
-        </p:txBody>
-      </p:sp>
-      <p:sp>
-        <p:nvSpPr>
-          <p:cNvPr id="17" name="TextBox 16"/>
-          <p:cNvSpPr txBox="1"/>
-          <p:nvPr/>
-        </p:nvSpPr>
-        <p:spPr>
-          <a:xfrm>
-            <a:off x="457200" y="5486400"/>
-            <a:ext cx="11247120" cy="411480"/>
-          </a:xfrm>
-          <a:prstGeom prst="rect">
-            <a:avLst/>
-          </a:prstGeom>
-          <a:noFill/>
-        </p:spPr>
-        <p:txBody>
-          <a:bodyPr wrap="square">
-            <a:spAutoFit/>
-          </a:bodyPr>
-          <a:lstStyle/>
-          <a:p>
-            <a:pPr algn="ctr"/>
-            <a:r>
-              <a:rPr sz="1300" b="0" i="0">
-                <a:solidFill>
-                  <a:srgbClr val="CADCFC"/>
-                </a:solidFill>
-                <a:latin typeface="Calibri"/>
-              </a:rPr>
-              <a:t>AUTOC 0.0414 vs 0.0412  ·  Mean CLATE 0.1253 vs ~0.15  ·  N = 12,208  ✓</a:t>
-            </a:r>
-          </a:p>
-        </p:txBody>
-      </p:sp>
-      <p:sp>
-        <p:nvSpPr>
-          <p:cNvPr id="18" name="Rectangle 17"/>
-          <p:cNvSpPr/>
-          <p:nvPr/>
-        </p:nvSpPr>
-        <p:spPr>
-          <a:xfrm>
-            <a:off x="0" y="6309360"/>
-            <a:ext cx="12188952" cy="548640"/>
-          </a:xfrm>
-          <a:prstGeom prst="rect">
-            <a:avLst/>
-          </a:prstGeom>
-          <a:solidFill>
-            <a:srgbClr val="1E2761"/>
-          </a:solidFill>
-          <a:ln>
-            <a:noFill/>
-          </a:ln>
-        </p:spPr>
-        <p:style>
-          <a:lnRef idx="1">
-            <a:schemeClr val="accent1"/>
-          </a:lnRef>
-          <a:fillRef idx="3">
-            <a:schemeClr val="accent1"/>
-          </a:fillRef>
-          <a:effectRef idx="2">
-            <a:schemeClr val="accent1"/>
-          </a:effectRef>
-          <a:fontRef idx="minor">
-            <a:schemeClr val="lt1"/>
-          </a:fontRef>
-        </p:style>
-        <p:txBody>
-          <a:bodyPr rtlCol="0" anchor="ctr"/>
-          <a:lstStyle/>
-          <a:p>
-            <a:pPr algn="ctr"/>
-          </a:p>
-        </p:txBody>
-      </p:sp>
-      <p:sp>
-        <p:nvSpPr>
-          <p:cNvPr id="19" name="TextBox 18"/>
-          <p:cNvSpPr txBox="1"/>
-          <p:nvPr/>
-        </p:nvSpPr>
-        <p:spPr>
-          <a:xfrm>
-            <a:off x="457200" y="6355080"/>
-            <a:ext cx="10972800" cy="365760"/>
-          </a:xfrm>
-          <a:prstGeom prst="rect">
-            <a:avLst/>
-          </a:prstGeom>
-          <a:noFill/>
-        </p:spPr>
-        <p:txBody>
-          <a:bodyPr wrap="square">
-            <a:spAutoFit/>
-          </a:bodyPr>
-          <a:lstStyle/>
-          <a:p>
-            <a:pPr algn="l"/>
-            <a:r>
-              <a:rPr sz="1100" b="0" i="0">
-                <a:solidFill>
-                  <a:srgbClr val="CADCFC"/>
-                </a:solidFill>
-                <a:latin typeface="Calibri"/>
-              </a:rPr>
-              <a:t>Athey, Inoue &amp; Tsugawa (2025)  ·  Jack Chepin</a:t>
-            </a:r>
-          </a:p>
-        </p:txBody>
-      </p:sp>
-    </p:spTree>
-  </p:cSld>
-  <p:clrMapOvr>
-    <a:masterClrMapping/>
-  </p:clrMapOvr>
-</p:sld>
-</file>
-
-<file path=ppt/slides/slide2.xml><?xml version="1.0" encoding="utf-8"?>
-<p:sld xmlns:a="http://schemas.openxmlformats.org/drawingml/2006/main" xmlns:p="http://schemas.openxmlformats.org/presentationml/2006/main" xmlns:r="http://schemas.openxmlformats.org/officeDocument/2006/relationships">
+<file path=ppt/slides/slide3.xml><?xml version="1.0" encoding="utf-8"?>
+<p:sld xmlns:a="http://schemas.openxmlformats.org/drawingml/2006/main" xmlns:r="http://schemas.openxmlformats.org/officeDocument/2006/relationships" xmlns:p="http://schemas.openxmlformats.org/presentationml/2006/main">
   <p:cSld>
     <p:bg>
       <p:bgPr>
@@ -4758,7 +5129,14 @@
         <p:cNvGrpSpPr/>
         <p:nvPr/>
       </p:nvGrpSpPr>
-      <p:grpSpPr/>
+      <p:grpSpPr>
+        <a:xfrm>
+          <a:off x="0" y="0"/>
+          <a:ext cx="0" cy="0"/>
+          <a:chOff x="0" y="0"/>
+          <a:chExt cx="0" cy="0"/>
+        </a:xfrm>
+      </p:grpSpPr>
       <p:sp>
         <p:nvSpPr>
           <p:cNvPr id="2" name="Rectangle 1"/>
@@ -4799,6 +5177,7 @@
           <a:lstStyle/>
           <a:p>
             <a:pPr algn="ctr"/>
+            <a:endParaRPr/>
           </a:p>
         </p:txBody>
       </p:sp>
@@ -4832,91 +5211,21 @@
                 </a:solidFill>
                 <a:latin typeface="Calibri"/>
               </a:rPr>
-              <a:t>Research Question</a:t>
-            </a:r>
-          </a:p>
-        </p:txBody>
-      </p:sp>
-      <p:sp>
-        <p:nvSpPr>
-          <p:cNvPr id="4" name="TextBox 3"/>
-          <p:cNvSpPr txBox="1"/>
-          <p:nvPr/>
-        </p:nvSpPr>
-        <p:spPr>
-          <a:xfrm>
-            <a:off x="548640" y="1097280"/>
-            <a:ext cx="10972800" cy="548640"/>
-          </a:xfrm>
-          <a:prstGeom prst="rect">
-            <a:avLst/>
-          </a:prstGeom>
-          <a:noFill/>
-        </p:spPr>
-        <p:txBody>
-          <a:bodyPr wrap="square">
-            <a:spAutoFit/>
-          </a:bodyPr>
-          <a:lstStyle/>
-          <a:p>
-            <a:pPr algn="l"/>
-            <a:r>
-              <a:rPr sz="2000" b="1" i="0">
-                <a:solidFill>
-                  <a:srgbClr val="1A1A2E"/>
-                </a:solidFill>
-                <a:latin typeface="Calibri"/>
-              </a:rPr>
-              <a:t>When a government program has imperfect take-up, who should be offered it?</a:t>
-            </a:r>
-          </a:p>
-        </p:txBody>
-      </p:sp>
-      <p:sp>
-        <p:nvSpPr>
-          <p:cNvPr id="5" name="TextBox 4"/>
-          <p:cNvSpPr txBox="1"/>
-          <p:nvPr/>
-        </p:nvSpPr>
-        <p:spPr>
-          <a:xfrm>
-            <a:off x="548640" y="1691640"/>
-            <a:ext cx="10972800" cy="457200"/>
-          </a:xfrm>
-          <a:prstGeom prst="rect">
-            <a:avLst/>
-          </a:prstGeom>
-          <a:noFill/>
-        </p:spPr>
-        <p:txBody>
-          <a:bodyPr wrap="square">
-            <a:spAutoFit/>
-          </a:bodyPr>
-          <a:lstStyle/>
-          <a:p>
-            <a:pPr algn="l"/>
-            <a:r>
-              <a:rPr sz="1600" b="0" i="1">
-                <a:solidFill>
-                  <a:srgbClr val="6B7A99"/>
-                </a:solidFill>
-                <a:latin typeface="Calibri"/>
-              </a:rPr>
-              <a:t>Should we prioritize people most likely to benefit — or most likely to actually enroll?</a:t>
-            </a:r>
-          </a:p>
-        </p:txBody>
-      </p:sp>
-      <p:sp>
-        <p:nvSpPr>
-          <p:cNvPr id="6" name="Rectangle 5"/>
+              <a:t>Estimation Technique</a:t>
+            </a:r>
+          </a:p>
+        </p:txBody>
+      </p:sp>
+      <p:sp>
+        <p:nvSpPr>
+          <p:cNvPr id="4" name="Rectangle 3"/>
           <p:cNvSpPr/>
           <p:nvPr/>
         </p:nvSpPr>
         <p:spPr>
           <a:xfrm>
-            <a:off x="548640" y="2377440"/>
-            <a:ext cx="10972800" cy="1371600"/>
+            <a:off x="365760" y="1097280"/>
+            <a:ext cx="5394960" cy="3657600"/>
           </a:xfrm>
           <a:prstGeom prst="rect">
             <a:avLst/>
@@ -4947,19 +5256,64 @@
           <a:lstStyle/>
           <a:p>
             <a:pPr algn="ctr"/>
-          </a:p>
-        </p:txBody>
-      </p:sp>
-      <p:sp>
-        <p:nvSpPr>
-          <p:cNvPr id="7" name="TextBox 6"/>
+            <a:endParaRPr/>
+          </a:p>
+        </p:txBody>
+      </p:sp>
+      <p:sp>
+        <p:nvSpPr>
+          <p:cNvPr id="5" name="Rectangle 4"/>
+          <p:cNvSpPr/>
+          <p:nvPr/>
+        </p:nvSpPr>
+        <p:spPr>
+          <a:xfrm>
+            <a:off x="365760" y="1097280"/>
+            <a:ext cx="5394960" cy="411480"/>
+          </a:xfrm>
+          <a:prstGeom prst="rect">
+            <a:avLst/>
+          </a:prstGeom>
+          <a:solidFill>
+            <a:srgbClr val="4A90D9"/>
+          </a:solidFill>
+          <a:ln>
+            <a:noFill/>
+          </a:ln>
+        </p:spPr>
+        <p:style>
+          <a:lnRef idx="1">
+            <a:schemeClr val="accent1"/>
+          </a:lnRef>
+          <a:fillRef idx="3">
+            <a:schemeClr val="accent1"/>
+          </a:fillRef>
+          <a:effectRef idx="2">
+            <a:schemeClr val="accent1"/>
+          </a:effectRef>
+          <a:fontRef idx="minor">
+            <a:schemeClr val="lt1"/>
+          </a:fontRef>
+        </p:style>
+        <p:txBody>
+          <a:bodyPr rtlCol="0" anchor="ctr"/>
+          <a:lstStyle/>
+          <a:p>
+            <a:pPr algn="ctr"/>
+            <a:endParaRPr/>
+          </a:p>
+        </p:txBody>
+      </p:sp>
+      <p:sp>
+        <p:nvSpPr>
+          <p:cNvPr id="6" name="TextBox 5"/>
           <p:cNvSpPr txBox="1"/>
           <p:nvPr/>
         </p:nvSpPr>
         <p:spPr>
           <a:xfrm>
-            <a:off x="822960" y="2423160"/>
-            <a:ext cx="9144000" cy="365760"/>
+            <a:off x="502920" y="1115568"/>
+            <a:ext cx="5120640" cy="365760"/>
           </a:xfrm>
           <a:prstGeom prst="rect">
             <a:avLst/>
@@ -4974,27 +5328,27 @@
           <a:p>
             <a:pPr algn="l"/>
             <a:r>
-              <a:rPr sz="1300" b="0" i="0">
-                <a:solidFill>
-                  <a:srgbClr val="6B7A99"/>
-                </a:solidFill>
-                <a:latin typeface="Calibri"/>
-              </a:rPr>
-              <a:t>Equation (1)  —  Conditional Local Average Treatment Effect (CLATE):</a:t>
-            </a:r>
-          </a:p>
-        </p:txBody>
-      </p:sp>
-      <p:sp>
-        <p:nvSpPr>
-          <p:cNvPr id="8" name="TextBox 7"/>
+              <a:rPr sz="1500" b="1" i="0">
+                <a:solidFill>
+                  <a:srgbClr val="FFFFFF"/>
+                </a:solidFill>
+                <a:latin typeface="Calibri"/>
+              </a:rPr>
+              <a:t>Instrumental Forest</a:t>
+            </a:r>
+          </a:p>
+        </p:txBody>
+      </p:sp>
+      <p:sp>
+        <p:nvSpPr>
+          <p:cNvPr id="7" name="TextBox 6"/>
           <p:cNvSpPr txBox="1"/>
           <p:nvPr/>
         </p:nvSpPr>
         <p:spPr>
           <a:xfrm>
-            <a:off x="2286000" y="2743200"/>
-            <a:ext cx="7315200" cy="640080"/>
+            <a:off x="548640" y="1600200"/>
+            <a:ext cx="5029200" cy="1492716"/>
           </a:xfrm>
           <a:prstGeom prst="rect">
             <a:avLst/>
@@ -5007,29 +5361,188 @@
           </a:bodyPr>
           <a:lstStyle/>
           <a:p>
+            <a:pPr algn="l"/>
+            <a:r>
+              <a:rPr sz="1300" b="0" i="0" dirty="0">
+                <a:solidFill>
+                  <a:srgbClr val="1A1A2E"/>
+                </a:solidFill>
+                <a:latin typeface="Calibri"/>
+              </a:rPr>
+              <a:t>Estimates the CLATE — </a:t>
+            </a:r>
+            <a:r>
+              <a:rPr sz="1300" b="0" i="0" dirty="0" err="1">
+                <a:solidFill>
+                  <a:srgbClr val="1A1A2E"/>
+                </a:solidFill>
+                <a:latin typeface="Calibri"/>
+              </a:rPr>
+              <a:t>τ_CL</a:t>
+            </a:r>
+            <a:r>
+              <a:rPr sz="1300" b="0" i="0" dirty="0">
+                <a:solidFill>
+                  <a:srgbClr val="1A1A2E"/>
+                </a:solidFill>
+                <a:latin typeface="Calibri"/>
+              </a:rPr>
+              <a:t>(x) = </a:t>
+            </a:r>
+            <a:r>
+              <a:rPr sz="1300" b="0" i="0" dirty="0" err="1">
+                <a:solidFill>
+                  <a:srgbClr val="1A1A2E"/>
+                </a:solidFill>
+                <a:latin typeface="Calibri"/>
+              </a:rPr>
+              <a:t>τ_Y</a:t>
+            </a:r>
+            <a:r>
+              <a:rPr sz="1300" b="0" i="0" dirty="0">
+                <a:solidFill>
+                  <a:srgbClr val="1A1A2E"/>
+                </a:solidFill>
+                <a:latin typeface="Calibri"/>
+              </a:rPr>
+              <a:t>(x) / </a:t>
+            </a:r>
+            <a:r>
+              <a:rPr sz="1300" b="0" i="0" dirty="0" err="1">
+                <a:solidFill>
+                  <a:srgbClr val="1A1A2E"/>
+                </a:solidFill>
+                <a:latin typeface="Calibri"/>
+              </a:rPr>
+              <a:t>τ_W</a:t>
+            </a:r>
+            <a:r>
+              <a:rPr sz="1300" b="0" i="0" dirty="0">
+                <a:solidFill>
+                  <a:srgbClr val="1A1A2E"/>
+                </a:solidFill>
+                <a:latin typeface="Calibri"/>
+              </a:rPr>
+              <a:t>(x)
+Jointly estimates numerator and denominator with same weights, giving an apples-to-apples ratio.
+Used for: Equation (1)</a:t>
+            </a:r>
+            <a:endParaRPr lang="en-US" sz="1300" b="0" i="0" dirty="0">
+              <a:solidFill>
+                <a:srgbClr val="1A1A2E"/>
+              </a:solidFill>
+              <a:latin typeface="Calibri"/>
+            </a:endParaRPr>
+          </a:p>
+          <a:p>
+            <a:pPr algn="l"/>
+            <a:endParaRPr lang="en-US" sz="1300" dirty="0">
+              <a:solidFill>
+                <a:srgbClr val="1A1A2E"/>
+              </a:solidFill>
+              <a:latin typeface="Calibri"/>
+            </a:endParaRPr>
+          </a:p>
+        </p:txBody>
+      </p:sp>
+      <p:sp>
+        <p:nvSpPr>
+          <p:cNvPr id="8" name="Rectangle 7"/>
+          <p:cNvSpPr/>
+          <p:nvPr/>
+        </p:nvSpPr>
+        <p:spPr>
+          <a:xfrm>
+            <a:off x="6309360" y="1097280"/>
+            <a:ext cx="5394960" cy="3657600"/>
+          </a:xfrm>
+          <a:prstGeom prst="rect">
+            <a:avLst/>
+          </a:prstGeom>
+          <a:solidFill>
+            <a:srgbClr val="FFFFFF"/>
+          </a:solidFill>
+          <a:ln>
+            <a:noFill/>
+          </a:ln>
+        </p:spPr>
+        <p:style>
+          <a:lnRef idx="1">
+            <a:schemeClr val="accent1"/>
+          </a:lnRef>
+          <a:fillRef idx="3">
+            <a:schemeClr val="accent1"/>
+          </a:fillRef>
+          <a:effectRef idx="2">
+            <a:schemeClr val="accent1"/>
+          </a:effectRef>
+          <a:fontRef idx="minor">
+            <a:schemeClr val="lt1"/>
+          </a:fontRef>
+        </p:style>
+        <p:txBody>
+          <a:bodyPr rtlCol="0" anchor="ctr"/>
+          <a:lstStyle/>
+          <a:p>
             <a:pPr algn="ctr"/>
-            <a:r>
-              <a:rPr sz="2800" b="1" i="0">
-                <a:solidFill>
-                  <a:srgbClr val="1E2761"/>
-                </a:solidFill>
-                <a:latin typeface="Calibri"/>
-              </a:rPr>
-              <a:t>τ_CL(x)  =  τ_Y(x)  /  τ_W(x)</a:t>
-            </a:r>
-          </a:p>
-        </p:txBody>
-      </p:sp>
-      <p:sp>
-        <p:nvSpPr>
-          <p:cNvPr id="9" name="TextBox 8"/>
+            <a:endParaRPr/>
+          </a:p>
+        </p:txBody>
+      </p:sp>
+      <p:sp>
+        <p:nvSpPr>
+          <p:cNvPr id="9" name="Rectangle 8"/>
+          <p:cNvSpPr/>
+          <p:nvPr/>
+        </p:nvSpPr>
+        <p:spPr>
+          <a:xfrm>
+            <a:off x="6309360" y="1097280"/>
+            <a:ext cx="5394960" cy="411480"/>
+          </a:xfrm>
+          <a:prstGeom prst="rect">
+            <a:avLst/>
+          </a:prstGeom>
+          <a:solidFill>
+            <a:srgbClr val="4A90D9"/>
+          </a:solidFill>
+          <a:ln>
+            <a:noFill/>
+          </a:ln>
+        </p:spPr>
+        <p:style>
+          <a:lnRef idx="1">
+            <a:schemeClr val="accent1"/>
+          </a:lnRef>
+          <a:fillRef idx="3">
+            <a:schemeClr val="accent1"/>
+          </a:fillRef>
+          <a:effectRef idx="2">
+            <a:schemeClr val="accent1"/>
+          </a:effectRef>
+          <a:fontRef idx="minor">
+            <a:schemeClr val="lt1"/>
+          </a:fontRef>
+        </p:style>
+        <p:txBody>
+          <a:bodyPr rtlCol="0" anchor="ctr"/>
+          <a:lstStyle/>
+          <a:p>
+            <a:pPr algn="ctr"/>
+            <a:endParaRPr/>
+          </a:p>
+        </p:txBody>
+      </p:sp>
+      <p:sp>
+        <p:nvSpPr>
+          <p:cNvPr id="10" name="TextBox 9"/>
           <p:cNvSpPr txBox="1"/>
           <p:nvPr/>
         </p:nvSpPr>
         <p:spPr>
           <a:xfrm>
-            <a:off x="1097280" y="3840480"/>
-            <a:ext cx="10058400" cy="365760"/>
+            <a:off x="6446520" y="1115568"/>
+            <a:ext cx="5120640" cy="365760"/>
           </a:xfrm>
           <a:prstGeom prst="rect">
             <a:avLst/>
@@ -5042,29 +5555,29 @@
           </a:bodyPr>
           <a:lstStyle/>
           <a:p>
-            <a:pPr algn="ctr"/>
-            <a:r>
-              <a:rPr sz="1300" b="0" i="0">
-                <a:solidFill>
-                  <a:srgbClr val="6B7A99"/>
-                </a:solidFill>
-                <a:latin typeface="Calibri"/>
-              </a:rPr>
-              <a:t>τ_Y(x) = Conditional ITT (outcome CATE)       τ_W(x) = Compliance CATE</a:t>
-            </a:r>
-          </a:p>
-        </p:txBody>
-      </p:sp>
-      <p:sp>
-        <p:nvSpPr>
-          <p:cNvPr id="10" name="TextBox 9"/>
+            <a:pPr algn="l"/>
+            <a:r>
+              <a:rPr sz="1500" b="1" i="0">
+                <a:solidFill>
+                  <a:srgbClr val="FFFFFF"/>
+                </a:solidFill>
+                <a:latin typeface="Calibri"/>
+              </a:rPr>
+              <a:t>Causal Forest</a:t>
+            </a:r>
+          </a:p>
+        </p:txBody>
+      </p:sp>
+      <p:sp>
+        <p:nvSpPr>
+          <p:cNvPr id="11" name="TextBox 10"/>
           <p:cNvSpPr txBox="1"/>
           <p:nvPr/>
         </p:nvSpPr>
         <p:spPr>
           <a:xfrm>
-            <a:off x="548640" y="4572000"/>
-            <a:ext cx="10972800" cy="457200"/>
+            <a:off x="6492240" y="1600200"/>
+            <a:ext cx="5029200" cy="1092607"/>
           </a:xfrm>
           <a:prstGeom prst="rect">
             <a:avLst/>
@@ -5079,20 +5592,100 @@
           <a:p>
             <a:pPr algn="l"/>
             <a:r>
-              <a:rPr sz="1400" b="1" i="0">
-                <a:solidFill>
-                  <a:srgbClr val="4A90D9"/>
-                </a:solidFill>
-                <a:latin typeface="Calibri"/>
-              </a:rPr>
-              <a:t>Replication targets:  Equation (1)  +  Figure F1 (TOC curve for compliance)</a:t>
-            </a:r>
-          </a:p>
-        </p:txBody>
-      </p:sp>
-      <p:sp>
-        <p:nvSpPr>
-          <p:cNvPr id="11" name="Rectangle 10"/>
+              <a:rPr sz="1300" b="0" i="0" dirty="0">
+                <a:solidFill>
+                  <a:srgbClr val="1A1A2E"/>
+                </a:solidFill>
+                <a:latin typeface="Calibri"/>
+              </a:rPr>
+              <a:t>Used for: Figure F1 TOC curve</a:t>
+            </a:r>
+            <a:endParaRPr lang="en-US" sz="1300" b="0" i="0" dirty="0">
+              <a:solidFill>
+                <a:srgbClr val="1A1A2E"/>
+              </a:solidFill>
+              <a:latin typeface="Calibri"/>
+            </a:endParaRPr>
+          </a:p>
+          <a:p>
+            <a:pPr algn="l"/>
+            <a:endParaRPr lang="en-US" sz="1300" dirty="0">
+              <a:solidFill>
+                <a:srgbClr val="1A1A2E"/>
+              </a:solidFill>
+              <a:latin typeface="Calibri"/>
+            </a:endParaRPr>
+          </a:p>
+          <a:p>
+            <a:pPr algn="l"/>
+            <a:r>
+              <a:rPr lang="en-US" sz="1300" b="0" i="0" dirty="0">
+                <a:solidFill>
+                  <a:srgbClr val="1A1A2E"/>
+                </a:solidFill>
+                <a:latin typeface="Calibri"/>
+              </a:rPr>
+              <a:t>Maximize treatment effect heterogeneity</a:t>
+            </a:r>
+          </a:p>
+          <a:p>
+            <a:pPr algn="l"/>
+            <a:endParaRPr lang="en-US" sz="1300" dirty="0">
+              <a:solidFill>
+                <a:srgbClr val="1A1A2E"/>
+              </a:solidFill>
+              <a:latin typeface="Calibri"/>
+            </a:endParaRPr>
+          </a:p>
+          <a:p>
+            <a:pPr algn="l"/>
+            <a:endParaRPr lang="en-US" sz="1300" dirty="0">
+              <a:solidFill>
+                <a:srgbClr val="1A1A2E"/>
+              </a:solidFill>
+              <a:latin typeface="Calibri"/>
+            </a:endParaRPr>
+          </a:p>
+        </p:txBody>
+      </p:sp>
+      <p:sp>
+        <p:nvSpPr>
+          <p:cNvPr id="12" name="TextBox 11"/>
+          <p:cNvSpPr txBox="1"/>
+          <p:nvPr/>
+        </p:nvSpPr>
+        <p:spPr>
+          <a:xfrm>
+            <a:off x="457200" y="4983480"/>
+            <a:ext cx="11247120" cy="457200"/>
+          </a:xfrm>
+          <a:prstGeom prst="rect">
+            <a:avLst/>
+          </a:prstGeom>
+          <a:noFill/>
+        </p:spPr>
+        <p:txBody>
+          <a:bodyPr wrap="square">
+            <a:spAutoFit/>
+          </a:bodyPr>
+          <a:lstStyle/>
+          <a:p>
+            <a:pPr algn="ctr"/>
+            <a:r>
+              <a:rPr sz="1400" b="1" i="0" dirty="0">
+                <a:solidFill>
+                  <a:srgbClr val="1E2761"/>
+                </a:solidFill>
+                <a:latin typeface="Calibri"/>
+              </a:rPr>
+              <a:t>Key property: Honest estimation — each prediction never uses its own outcome data (out-of-bag)</a:t>
+            </a:r>
+          </a:p>
+        </p:txBody>
+      </p:sp>
+      <p:sp>
+        <p:nvSpPr>
+          <p:cNvPr id="13" name="Rectangle 12"/>
           <p:cNvSpPr/>
           <p:nvPr/>
         </p:nvSpPr>
@@ -5130,12 +5723,13 @@
           <a:lstStyle/>
           <a:p>
             <a:pPr algn="ctr"/>
-          </a:p>
-        </p:txBody>
-      </p:sp>
-      <p:sp>
-        <p:nvSpPr>
-          <p:cNvPr id="12" name="TextBox 11"/>
+            <a:endParaRPr/>
+          </a:p>
+        </p:txBody>
+      </p:sp>
+      <p:sp>
+        <p:nvSpPr>
+          <p:cNvPr id="14" name="TextBox 13"/>
           <p:cNvSpPr txBox="1"/>
           <p:nvPr/>
         </p:nvSpPr>
@@ -5168,6 +5762,66 @@
           </a:p>
         </p:txBody>
       </p:sp>
+      <p:pic>
+        <p:nvPicPr>
+          <p:cNvPr id="15" name="Picture 14" descr="figure_f1.png">
+            <a:extLst>
+              <a:ext uri="{FF2B5EF4-FFF2-40B4-BE49-F238E27FC236}">
+                <a16:creationId xmlns:a16="http://schemas.microsoft.com/office/drawing/2014/main" id="{1AA8E5E8-1D0E-FA93-F65F-5D600F999AB0}"/>
+              </a:ext>
+            </a:extLst>
+          </p:cNvPr>
+          <p:cNvPicPr>
+            <a:picLocks noChangeAspect="1"/>
+          </p:cNvPicPr>
+          <p:nvPr/>
+        </p:nvPicPr>
+        <p:blipFill>
+          <a:blip r:embed="rId2"/>
+          <a:stretch>
+            <a:fillRect/>
+          </a:stretch>
+        </p:blipFill>
+        <p:spPr>
+          <a:xfrm>
+            <a:off x="7553934" y="2346558"/>
+            <a:ext cx="3057726" cy="2184090"/>
+          </a:xfrm>
+          <a:prstGeom prst="rect">
+            <a:avLst/>
+          </a:prstGeom>
+        </p:spPr>
+      </p:pic>
+      <p:pic>
+        <p:nvPicPr>
+          <p:cNvPr id="16" name="Picture 15">
+            <a:extLst>
+              <a:ext uri="{FF2B5EF4-FFF2-40B4-BE49-F238E27FC236}">
+                <a16:creationId xmlns:a16="http://schemas.microsoft.com/office/drawing/2014/main" id="{1B04B37C-D3D1-C019-6EAE-A78629E0190F}"/>
+              </a:ext>
+            </a:extLst>
+          </p:cNvPr>
+          <p:cNvPicPr>
+            <a:picLocks noChangeAspect="1"/>
+          </p:cNvPicPr>
+          <p:nvPr/>
+        </p:nvPicPr>
+        <p:blipFill>
+          <a:blip r:embed="rId3"/>
+          <a:stretch>
+            <a:fillRect/>
+          </a:stretch>
+        </p:blipFill>
+        <p:spPr>
+          <a:xfrm>
+            <a:off x="1810683" y="3218118"/>
+            <a:ext cx="2319175" cy="701145"/>
+          </a:xfrm>
+          <a:prstGeom prst="rect">
+            <a:avLst/>
+          </a:prstGeom>
+        </p:spPr>
+      </p:pic>
     </p:spTree>
   </p:cSld>
   <p:clrMapOvr>
@@ -5176,8 +5830,8 @@
 </p:sld>
 </file>
 
-<file path=ppt/slides/slide3.xml><?xml version="1.0" encoding="utf-8"?>
-<p:sld xmlns:a="http://schemas.openxmlformats.org/drawingml/2006/main" xmlns:p="http://schemas.openxmlformats.org/presentationml/2006/main" xmlns:r="http://schemas.openxmlformats.org/officeDocument/2006/relationships">
+<file path=ppt/slides/slide4.xml><?xml version="1.0" encoding="utf-8"?>
+<p:sld xmlns:a="http://schemas.openxmlformats.org/drawingml/2006/main" xmlns:r="http://schemas.openxmlformats.org/officeDocument/2006/relationships" xmlns:p="http://schemas.openxmlformats.org/presentationml/2006/main">
   <p:cSld>
     <p:bg>
       <p:bgPr>
@@ -5193,7 +5847,14 @@
         <p:cNvGrpSpPr/>
         <p:nvPr/>
       </p:nvGrpSpPr>
-      <p:grpSpPr/>
+      <p:grpSpPr>
+        <a:xfrm>
+          <a:off x="0" y="0"/>
+          <a:ext cx="0" cy="0"/>
+          <a:chOff x="0" y="0"/>
+          <a:chExt cx="0" cy="0"/>
+        </a:xfrm>
+      </p:grpSpPr>
       <p:sp>
         <p:nvSpPr>
           <p:cNvPr id="2" name="Rectangle 1"/>
@@ -5234,6 +5895,7 @@
           <a:lstStyle/>
           <a:p>
             <a:pPr algn="ctr"/>
+            <a:endParaRPr/>
           </a:p>
         </p:txBody>
       </p:sp>
@@ -5267,7 +5929,7 @@
                 </a:solidFill>
                 <a:latin typeface="Calibri"/>
               </a:rPr>
-              <a:t>Estimation Technique</a:t>
+              <a:t>Why This Method Is Needed</a:t>
             </a:r>
           </a:p>
         </p:txBody>
@@ -5280,8 +5942,8 @@
         </p:nvSpPr>
         <p:spPr>
           <a:xfrm>
-            <a:off x="365760" y="1097280"/>
-            <a:ext cx="5394960" cy="3657600"/>
+            <a:off x="3291607" y="1464098"/>
+            <a:ext cx="5394960" cy="1920240"/>
           </a:xfrm>
           <a:prstGeom prst="rect">
             <a:avLst/>
@@ -5312,6 +5974,7 @@
           <a:lstStyle/>
           <a:p>
             <a:pPr algn="ctr"/>
+            <a:endParaRPr/>
           </a:p>
         </p:txBody>
       </p:sp>
@@ -5323,8 +5986,8 @@
         </p:nvSpPr>
         <p:spPr>
           <a:xfrm>
-            <a:off x="365760" y="1097280"/>
-            <a:ext cx="5394960" cy="411480"/>
+            <a:off x="3181879" y="1451610"/>
+            <a:ext cx="109728" cy="1920240"/>
           </a:xfrm>
           <a:prstGeom prst="rect">
             <a:avLst/>
@@ -5355,6 +6018,7 @@
           <a:lstStyle/>
           <a:p>
             <a:pPr algn="ctr"/>
+            <a:endParaRPr/>
           </a:p>
         </p:txBody>
       </p:sp>
@@ -5366,8 +6030,8 @@
         </p:nvSpPr>
         <p:spPr>
           <a:xfrm>
-            <a:off x="502920" y="1115568"/>
-            <a:ext cx="5120640" cy="365760"/>
+            <a:off x="3429000" y="1454996"/>
+            <a:ext cx="5029200" cy="365760"/>
           </a:xfrm>
           <a:prstGeom prst="rect">
             <a:avLst/>
@@ -5382,13 +6046,13 @@
           <a:p>
             <a:pPr algn="l"/>
             <a:r>
-              <a:rPr sz="1500" b="1" i="0">
-                <a:solidFill>
-                  <a:srgbClr val="FFFFFF"/>
-                </a:solidFill>
-                <a:latin typeface="Calibri"/>
-              </a:rPr>
-              <a:t>Instrumental Forest</a:t>
+              <a:rPr sz="1300" b="1" i="0" dirty="0">
+                <a:solidFill>
+                  <a:srgbClr val="1E2761"/>
+                </a:solidFill>
+                <a:latin typeface="Calibri"/>
+              </a:rPr>
+              <a:t>Traditional subgroup analyses</a:t>
             </a:r>
           </a:p>
         </p:txBody>
@@ -5401,8 +6065,8 @@
         </p:nvSpPr>
         <p:spPr>
           <a:xfrm>
-            <a:off x="548640" y="1600200"/>
-            <a:ext cx="5029200" cy="2926080"/>
+            <a:off x="3474487" y="1714711"/>
+            <a:ext cx="5029200" cy="461665"/>
           </a:xfrm>
           <a:prstGeom prst="rect">
             <a:avLst/>
@@ -5417,15 +6081,23 @@
           <a:p>
             <a:pPr algn="l"/>
             <a:r>
-              <a:rPr sz="1300" b="0" i="0">
+              <a:rPr sz="1200" b="0" i="0" dirty="0">
                 <a:solidFill>
                   <a:srgbClr val="1A1A2E"/>
                 </a:solidFill>
                 <a:latin typeface="Calibri"/>
               </a:rPr>
-              <a:t>Estimates the CLATE — τ_CL(x) = τ_Y(x) / τ_W(x)
-Jointly estimates numerator and denominator with same weights, giving an apples-to-apples ratio.
-Used for: Equation (1)</a:t>
+              <a:t>Only test a few groups (age, gender)
+— miss complex covariate i</a:t>
+            </a:r>
+            <a:r>
+              <a:rPr lang="en-US" sz="1200" b="0" i="0" dirty="0">
+                <a:solidFill>
+                  <a:srgbClr val="1A1A2E"/>
+                </a:solidFill>
+                <a:latin typeface="Calibri"/>
+              </a:rPr>
+              <a:t>nteractions</a:t>
             </a:r>
           </a:p>
         </p:txBody>
@@ -5438,8 +6110,8 @@
         </p:nvSpPr>
         <p:spPr>
           <a:xfrm>
-            <a:off x="6309360" y="1097280"/>
-            <a:ext cx="5394960" cy="3657600"/>
+            <a:off x="3311821" y="3909060"/>
+            <a:ext cx="5394960" cy="1920240"/>
           </a:xfrm>
           <a:prstGeom prst="rect">
             <a:avLst/>
@@ -5470,6 +6142,7 @@
           <a:lstStyle/>
           <a:p>
             <a:pPr algn="ctr"/>
+            <a:endParaRPr/>
           </a:p>
         </p:txBody>
       </p:sp>
@@ -5481,8 +6154,8 @@
         </p:nvSpPr>
         <p:spPr>
           <a:xfrm>
-            <a:off x="6309360" y="1097280"/>
-            <a:ext cx="5394960" cy="411480"/>
+            <a:off x="3202093" y="3909060"/>
+            <a:ext cx="109728" cy="1920240"/>
           </a:xfrm>
           <a:prstGeom prst="rect">
             <a:avLst/>
@@ -5513,6 +6186,7 @@
           <a:lstStyle/>
           <a:p>
             <a:pPr algn="ctr"/>
+            <a:endParaRPr/>
           </a:p>
         </p:txBody>
       </p:sp>
@@ -5524,8 +6198,8 @@
         </p:nvSpPr>
         <p:spPr>
           <a:xfrm>
-            <a:off x="6446520" y="1115568"/>
-            <a:ext cx="5120640" cy="365760"/>
+            <a:off x="3494701" y="4063153"/>
+            <a:ext cx="5029200" cy="292388"/>
           </a:xfrm>
           <a:prstGeom prst="rect">
             <a:avLst/>
@@ -5540,14 +6214,20 @@
           <a:p>
             <a:pPr algn="l"/>
             <a:r>
-              <a:rPr sz="1500" b="1" i="0">
-                <a:solidFill>
-                  <a:srgbClr val="FFFFFF"/>
+              <a:rPr lang="en-US" sz="1300" b="1" i="0" dirty="0">
+                <a:solidFill>
+                  <a:srgbClr val="1E2761"/>
                 </a:solidFill>
                 <a:latin typeface="Calibri"/>
               </a:rPr>
               <a:t>Causal Forest</a:t>
             </a:r>
+            <a:endParaRPr sz="1300" b="1" i="0" dirty="0">
+              <a:solidFill>
+                <a:srgbClr val="1E2761"/>
+              </a:solidFill>
+              <a:latin typeface="Calibri"/>
+            </a:endParaRPr>
           </a:p>
         </p:txBody>
       </p:sp>
@@ -5559,8 +6239,8 @@
         </p:nvSpPr>
         <p:spPr>
           <a:xfrm>
-            <a:off x="6492240" y="1600200"/>
-            <a:ext cx="5029200" cy="2926080"/>
+            <a:off x="3494701" y="4268893"/>
+            <a:ext cx="5029200" cy="461665"/>
           </a:xfrm>
           <a:prstGeom prst="rect">
             <a:avLst/>
@@ -5575,58 +6255,32 @@
           <a:p>
             <a:pPr algn="l"/>
             <a:r>
-              <a:rPr sz="1300" b="0" i="0">
+              <a:rPr lang="en-US" sz="1200" dirty="0">
                 <a:solidFill>
                   <a:srgbClr val="1A1A2E"/>
                 </a:solidFill>
                 <a:latin typeface="Calibri"/>
               </a:rPr>
-              <a:t>Estimates compliance CATE — τ_W(x)
-Outcome = Medicaid enrollment (W)
-Treatment = Lottery eligibility (Z)
-Used for: Figure F1 TOC curve</a:t>
-            </a:r>
-          </a:p>
-        </p:txBody>
-      </p:sp>
-      <p:sp>
-        <p:nvSpPr>
-          <p:cNvPr id="12" name="TextBox 11"/>
-          <p:cNvSpPr txBox="1"/>
-          <p:nvPr/>
-        </p:nvSpPr>
-        <p:spPr>
-          <a:xfrm>
-            <a:off x="457200" y="4983480"/>
-            <a:ext cx="11247120" cy="457200"/>
-          </a:xfrm>
-          <a:prstGeom prst="rect">
-            <a:avLst/>
-          </a:prstGeom>
-          <a:noFill/>
-        </p:spPr>
-        <p:txBody>
-          <a:bodyPr wrap="square">
-            <a:spAutoFit/>
-          </a:bodyPr>
-          <a:lstStyle/>
-          <a:p>
-            <a:pPr algn="ctr"/>
-            <a:r>
-              <a:rPr sz="1400" b="1" i="0">
-                <a:solidFill>
-                  <a:srgbClr val="1E2761"/>
-                </a:solidFill>
-                <a:latin typeface="Calibri"/>
-              </a:rPr>
-              <a:t>Key property: Honest estimation — each prediction never uses its own outcome data (out-of-bag)</a:t>
-            </a:r>
-          </a:p>
-        </p:txBody>
-      </p:sp>
-      <p:sp>
-        <p:nvSpPr>
-          <p:cNvPr id="13" name="Rectangle 12"/>
+              <a:t>Seeks to make splits maximally different</a:t>
+            </a:r>
+          </a:p>
+          <a:p>
+            <a:pPr algn="l"/>
+            <a:r>
+              <a:rPr lang="en-US" sz="1200" dirty="0">
+                <a:solidFill>
+                  <a:srgbClr val="1A1A2E"/>
+                </a:solidFill>
+                <a:latin typeface="Calibri"/>
+              </a:rPr>
+              <a:t>-Find subgroups where treatment differs</a:t>
+            </a:r>
+          </a:p>
+        </p:txBody>
+      </p:sp>
+      <p:sp>
+        <p:nvSpPr>
+          <p:cNvPr id="20" name="Rectangle 19"/>
           <p:cNvSpPr/>
           <p:nvPr/>
         </p:nvSpPr>
@@ -5664,12 +6318,13 @@
           <a:lstStyle/>
           <a:p>
             <a:pPr algn="ctr"/>
-          </a:p>
-        </p:txBody>
-      </p:sp>
-      <p:sp>
-        <p:nvSpPr>
-          <p:cNvPr id="14" name="TextBox 13"/>
+            <a:endParaRPr/>
+          </a:p>
+        </p:txBody>
+      </p:sp>
+      <p:sp>
+        <p:nvSpPr>
+          <p:cNvPr id="21" name="TextBox 20"/>
           <p:cNvSpPr txBox="1"/>
           <p:nvPr/>
         </p:nvSpPr>
@@ -5710,8 +6365,8 @@
 </p:sld>
 </file>
 
-<file path=ppt/slides/slide4.xml><?xml version="1.0" encoding="utf-8"?>
-<p:sld xmlns:a="http://schemas.openxmlformats.org/drawingml/2006/main" xmlns:p="http://schemas.openxmlformats.org/presentationml/2006/main" xmlns:r="http://schemas.openxmlformats.org/officeDocument/2006/relationships">
+<file path=ppt/slides/slide5.xml><?xml version="1.0" encoding="utf-8"?>
+<p:sld xmlns:a="http://schemas.openxmlformats.org/drawingml/2006/main" xmlns:r="http://schemas.openxmlformats.org/officeDocument/2006/relationships" xmlns:p="http://schemas.openxmlformats.org/presentationml/2006/main">
   <p:cSld>
     <p:bg>
       <p:bgPr>
@@ -5727,7 +6382,14 @@
         <p:cNvGrpSpPr/>
         <p:nvPr/>
       </p:nvGrpSpPr>
-      <p:grpSpPr/>
+      <p:grpSpPr>
+        <a:xfrm>
+          <a:off x="0" y="0"/>
+          <a:ext cx="0" cy="0"/>
+          <a:chOff x="0" y="0"/>
+          <a:chExt cx="0" cy="0"/>
+        </a:xfrm>
+      </p:grpSpPr>
       <p:sp>
         <p:nvSpPr>
           <p:cNvPr id="2" name="Rectangle 1"/>
@@ -5768,815 +6430,7 @@
           <a:lstStyle/>
           <a:p>
             <a:pPr algn="ctr"/>
-          </a:p>
-        </p:txBody>
-      </p:sp>
-      <p:sp>
-        <p:nvSpPr>
-          <p:cNvPr id="3" name="TextBox 2"/>
-          <p:cNvSpPr txBox="1"/>
-          <p:nvPr/>
-        </p:nvSpPr>
-        <p:spPr>
-          <a:xfrm>
-            <a:off x="457200" y="137160"/>
-            <a:ext cx="10972800" cy="640080"/>
-          </a:xfrm>
-          <a:prstGeom prst="rect">
-            <a:avLst/>
-          </a:prstGeom>
-          <a:noFill/>
-        </p:spPr>
-        <p:txBody>
-          <a:bodyPr wrap="square">
-            <a:spAutoFit/>
-          </a:bodyPr>
-          <a:lstStyle/>
-          <a:p>
-            <a:pPr algn="l"/>
-            <a:r>
-              <a:rPr sz="2600" b="1" i="0">
-                <a:solidFill>
-                  <a:srgbClr val="FFFFFF"/>
-                </a:solidFill>
-                <a:latin typeface="Calibri"/>
-              </a:rPr>
-              <a:t>Why This Method Is Needed</a:t>
-            </a:r>
-          </a:p>
-        </p:txBody>
-      </p:sp>
-      <p:sp>
-        <p:nvSpPr>
-          <p:cNvPr id="4" name="Rectangle 3"/>
-          <p:cNvSpPr/>
-          <p:nvPr/>
-        </p:nvSpPr>
-        <p:spPr>
-          <a:xfrm>
-            <a:off x="365760" y="1097280"/>
-            <a:ext cx="5394960" cy="1920240"/>
-          </a:xfrm>
-          <a:prstGeom prst="rect">
-            <a:avLst/>
-          </a:prstGeom>
-          <a:solidFill>
-            <a:srgbClr val="FFFFFF"/>
-          </a:solidFill>
-          <a:ln>
-            <a:noFill/>
-          </a:ln>
-        </p:spPr>
-        <p:style>
-          <a:lnRef idx="1">
-            <a:schemeClr val="accent1"/>
-          </a:lnRef>
-          <a:fillRef idx="3">
-            <a:schemeClr val="accent1"/>
-          </a:fillRef>
-          <a:effectRef idx="2">
-            <a:schemeClr val="accent1"/>
-          </a:effectRef>
-          <a:fontRef idx="minor">
-            <a:schemeClr val="lt1"/>
-          </a:fontRef>
-        </p:style>
-        <p:txBody>
-          <a:bodyPr rtlCol="0" anchor="ctr"/>
-          <a:lstStyle/>
-          <a:p>
-            <a:pPr algn="ctr"/>
-          </a:p>
-        </p:txBody>
-      </p:sp>
-      <p:sp>
-        <p:nvSpPr>
-          <p:cNvPr id="5" name="Rectangle 4"/>
-          <p:cNvSpPr/>
-          <p:nvPr/>
-        </p:nvSpPr>
-        <p:spPr>
-          <a:xfrm>
-            <a:off x="365760" y="1097280"/>
-            <a:ext cx="109728" cy="1920240"/>
-          </a:xfrm>
-          <a:prstGeom prst="rect">
-            <a:avLst/>
-          </a:prstGeom>
-          <a:solidFill>
-            <a:srgbClr val="4A90D9"/>
-          </a:solidFill>
-          <a:ln>
-            <a:noFill/>
-          </a:ln>
-        </p:spPr>
-        <p:style>
-          <a:lnRef idx="1">
-            <a:schemeClr val="accent1"/>
-          </a:lnRef>
-          <a:fillRef idx="3">
-            <a:schemeClr val="accent1"/>
-          </a:fillRef>
-          <a:effectRef idx="2">
-            <a:schemeClr val="accent1"/>
-          </a:effectRef>
-          <a:fontRef idx="minor">
-            <a:schemeClr val="lt1"/>
-          </a:fontRef>
-        </p:style>
-        <p:txBody>
-          <a:bodyPr rtlCol="0" anchor="ctr"/>
-          <a:lstStyle/>
-          <a:p>
-            <a:pPr algn="ctr"/>
-          </a:p>
-        </p:txBody>
-      </p:sp>
-      <p:sp>
-        <p:nvSpPr>
-          <p:cNvPr id="6" name="TextBox 5"/>
-          <p:cNvSpPr txBox="1"/>
-          <p:nvPr/>
-        </p:nvSpPr>
-        <p:spPr>
-          <a:xfrm>
-            <a:off x="594360" y="1188720"/>
-            <a:ext cx="5029200" cy="365760"/>
-          </a:xfrm>
-          <a:prstGeom prst="rect">
-            <a:avLst/>
-          </a:prstGeom>
-          <a:noFill/>
-        </p:spPr>
-        <p:txBody>
-          <a:bodyPr wrap="square">
-            <a:spAutoFit/>
-          </a:bodyPr>
-          <a:lstStyle/>
-          <a:p>
-            <a:pPr algn="l"/>
-            <a:r>
-              <a:rPr sz="1300" b="1" i="0">
-                <a:solidFill>
-                  <a:srgbClr val="1E2761"/>
-                </a:solidFill>
-                <a:latin typeface="Calibri"/>
-              </a:rPr>
-              <a:t>Traditional subgroup analyses</a:t>
-            </a:r>
-          </a:p>
-        </p:txBody>
-      </p:sp>
-      <p:sp>
-        <p:nvSpPr>
-          <p:cNvPr id="7" name="TextBox 6"/>
-          <p:cNvSpPr txBox="1"/>
-          <p:nvPr/>
-        </p:nvSpPr>
-        <p:spPr>
-          <a:xfrm>
-            <a:off x="594360" y="1600200"/>
-            <a:ext cx="5029200" cy="1280160"/>
-          </a:xfrm>
-          <a:prstGeom prst="rect">
-            <a:avLst/>
-          </a:prstGeom>
-          <a:noFill/>
-        </p:spPr>
-        <p:txBody>
-          <a:bodyPr wrap="square">
-            <a:spAutoFit/>
-          </a:bodyPr>
-          <a:lstStyle/>
-          <a:p>
-            <a:pPr algn="l"/>
-            <a:r>
-              <a:rPr sz="1200" b="0" i="0">
-                <a:solidFill>
-                  <a:srgbClr val="1A1A2E"/>
-                </a:solidFill>
-                <a:latin typeface="Calibri"/>
-              </a:rPr>
-              <a:t>Only test a few groups (age, gender)
-— miss complex covariate interactions</a:t>
-            </a:r>
-          </a:p>
-        </p:txBody>
-      </p:sp>
-      <p:sp>
-        <p:nvSpPr>
-          <p:cNvPr id="8" name="Rectangle 7"/>
-          <p:cNvSpPr/>
-          <p:nvPr/>
-        </p:nvSpPr>
-        <p:spPr>
-          <a:xfrm>
-            <a:off x="6309360" y="1097280"/>
-            <a:ext cx="5394960" cy="1920240"/>
-          </a:xfrm>
-          <a:prstGeom prst="rect">
-            <a:avLst/>
-          </a:prstGeom>
-          <a:solidFill>
-            <a:srgbClr val="FFFFFF"/>
-          </a:solidFill>
-          <a:ln>
-            <a:noFill/>
-          </a:ln>
-        </p:spPr>
-        <p:style>
-          <a:lnRef idx="1">
-            <a:schemeClr val="accent1"/>
-          </a:lnRef>
-          <a:fillRef idx="3">
-            <a:schemeClr val="accent1"/>
-          </a:fillRef>
-          <a:effectRef idx="2">
-            <a:schemeClr val="accent1"/>
-          </a:effectRef>
-          <a:fontRef idx="minor">
-            <a:schemeClr val="lt1"/>
-          </a:fontRef>
-        </p:style>
-        <p:txBody>
-          <a:bodyPr rtlCol="0" anchor="ctr"/>
-          <a:lstStyle/>
-          <a:p>
-            <a:pPr algn="ctr"/>
-          </a:p>
-        </p:txBody>
-      </p:sp>
-      <p:sp>
-        <p:nvSpPr>
-          <p:cNvPr id="9" name="Rectangle 8"/>
-          <p:cNvSpPr/>
-          <p:nvPr/>
-        </p:nvSpPr>
-        <p:spPr>
-          <a:xfrm>
-            <a:off x="6309360" y="1097280"/>
-            <a:ext cx="109728" cy="1920240"/>
-          </a:xfrm>
-          <a:prstGeom prst="rect">
-            <a:avLst/>
-          </a:prstGeom>
-          <a:solidFill>
-            <a:srgbClr val="4A90D9"/>
-          </a:solidFill>
-          <a:ln>
-            <a:noFill/>
-          </a:ln>
-        </p:spPr>
-        <p:style>
-          <a:lnRef idx="1">
-            <a:schemeClr val="accent1"/>
-          </a:lnRef>
-          <a:fillRef idx="3">
-            <a:schemeClr val="accent1"/>
-          </a:fillRef>
-          <a:effectRef idx="2">
-            <a:schemeClr val="accent1"/>
-          </a:effectRef>
-          <a:fontRef idx="minor">
-            <a:schemeClr val="lt1"/>
-          </a:fontRef>
-        </p:style>
-        <p:txBody>
-          <a:bodyPr rtlCol="0" anchor="ctr"/>
-          <a:lstStyle/>
-          <a:p>
-            <a:pPr algn="ctr"/>
-          </a:p>
-        </p:txBody>
-      </p:sp>
-      <p:sp>
-        <p:nvSpPr>
-          <p:cNvPr id="10" name="TextBox 9"/>
-          <p:cNvSpPr txBox="1"/>
-          <p:nvPr/>
-        </p:nvSpPr>
-        <p:spPr>
-          <a:xfrm>
-            <a:off x="6537960" y="1188720"/>
-            <a:ext cx="5029200" cy="365760"/>
-          </a:xfrm>
-          <a:prstGeom prst="rect">
-            <a:avLst/>
-          </a:prstGeom>
-          <a:noFill/>
-        </p:spPr>
-        <p:txBody>
-          <a:bodyPr wrap="square">
-            <a:spAutoFit/>
-          </a:bodyPr>
-          <a:lstStyle/>
-          <a:p>
-            <a:pPr algn="l"/>
-            <a:r>
-              <a:rPr sz="1300" b="1" i="0">
-                <a:solidFill>
-                  <a:srgbClr val="1E2761"/>
-                </a:solidFill>
-                <a:latin typeface="Calibri"/>
-              </a:rPr>
-              <a:t>Multiple hypothesis testing</a:t>
-            </a:r>
-          </a:p>
-        </p:txBody>
-      </p:sp>
-      <p:sp>
-        <p:nvSpPr>
-          <p:cNvPr id="11" name="TextBox 10"/>
-          <p:cNvSpPr txBox="1"/>
-          <p:nvPr/>
-        </p:nvSpPr>
-        <p:spPr>
-          <a:xfrm>
-            <a:off x="6537960" y="1600200"/>
-            <a:ext cx="5029200" cy="1280160"/>
-          </a:xfrm>
-          <a:prstGeom prst="rect">
-            <a:avLst/>
-          </a:prstGeom>
-          <a:noFill/>
-        </p:spPr>
-        <p:txBody>
-          <a:bodyPr wrap="square">
-            <a:spAutoFit/>
-          </a:bodyPr>
-          <a:lstStyle/>
-          <a:p>
-            <a:pPr algn="l"/>
-            <a:r>
-              <a:rPr sz="1200" b="0" i="0">
-                <a:solidFill>
-                  <a:srgbClr val="1A1A2E"/>
-                </a:solidFill>
-                <a:latin typeface="Calibri"/>
-              </a:rPr>
-              <a:t>Running many subgroup tests inflates false positive rates</a:t>
-            </a:r>
-          </a:p>
-        </p:txBody>
-      </p:sp>
-      <p:sp>
-        <p:nvSpPr>
-          <p:cNvPr id="12" name="Rectangle 11"/>
-          <p:cNvSpPr/>
-          <p:nvPr/>
-        </p:nvSpPr>
-        <p:spPr>
-          <a:xfrm>
-            <a:off x="365760" y="3291840"/>
-            <a:ext cx="5394960" cy="1920240"/>
-          </a:xfrm>
-          <a:prstGeom prst="rect">
-            <a:avLst/>
-          </a:prstGeom>
-          <a:solidFill>
-            <a:srgbClr val="FFFFFF"/>
-          </a:solidFill>
-          <a:ln>
-            <a:noFill/>
-          </a:ln>
-        </p:spPr>
-        <p:style>
-          <a:lnRef idx="1">
-            <a:schemeClr val="accent1"/>
-          </a:lnRef>
-          <a:fillRef idx="3">
-            <a:schemeClr val="accent1"/>
-          </a:fillRef>
-          <a:effectRef idx="2">
-            <a:schemeClr val="accent1"/>
-          </a:effectRef>
-          <a:fontRef idx="minor">
-            <a:schemeClr val="lt1"/>
-          </a:fontRef>
-        </p:style>
-        <p:txBody>
-          <a:bodyPr rtlCol="0" anchor="ctr"/>
-          <a:lstStyle/>
-          <a:p>
-            <a:pPr algn="ctr"/>
-          </a:p>
-        </p:txBody>
-      </p:sp>
-      <p:sp>
-        <p:nvSpPr>
-          <p:cNvPr id="13" name="Rectangle 12"/>
-          <p:cNvSpPr/>
-          <p:nvPr/>
-        </p:nvSpPr>
-        <p:spPr>
-          <a:xfrm>
-            <a:off x="365760" y="3291840"/>
-            <a:ext cx="109728" cy="1920240"/>
-          </a:xfrm>
-          <a:prstGeom prst="rect">
-            <a:avLst/>
-          </a:prstGeom>
-          <a:solidFill>
-            <a:srgbClr val="4A90D9"/>
-          </a:solidFill>
-          <a:ln>
-            <a:noFill/>
-          </a:ln>
-        </p:spPr>
-        <p:style>
-          <a:lnRef idx="1">
-            <a:schemeClr val="accent1"/>
-          </a:lnRef>
-          <a:fillRef idx="3">
-            <a:schemeClr val="accent1"/>
-          </a:fillRef>
-          <a:effectRef idx="2">
-            <a:schemeClr val="accent1"/>
-          </a:effectRef>
-          <a:fontRef idx="minor">
-            <a:schemeClr val="lt1"/>
-          </a:fontRef>
-        </p:style>
-        <p:txBody>
-          <a:bodyPr rtlCol="0" anchor="ctr"/>
-          <a:lstStyle/>
-          <a:p>
-            <a:pPr algn="ctr"/>
-          </a:p>
-        </p:txBody>
-      </p:sp>
-      <p:sp>
-        <p:nvSpPr>
-          <p:cNvPr id="14" name="TextBox 13"/>
-          <p:cNvSpPr txBox="1"/>
-          <p:nvPr/>
-        </p:nvSpPr>
-        <p:spPr>
-          <a:xfrm>
-            <a:off x="594360" y="3383280"/>
-            <a:ext cx="5029200" cy="365760"/>
-          </a:xfrm>
-          <a:prstGeom prst="rect">
-            <a:avLst/>
-          </a:prstGeom>
-          <a:noFill/>
-        </p:spPr>
-        <p:txBody>
-          <a:bodyPr wrap="square">
-            <a:spAutoFit/>
-          </a:bodyPr>
-          <a:lstStyle/>
-          <a:p>
-            <a:pPr algn="l"/>
-            <a:r>
-              <a:rPr sz="1300" b="1" i="0">
-                <a:solidFill>
-                  <a:srgbClr val="1E2761"/>
-                </a:solidFill>
-                <a:latin typeface="Calibri"/>
-              </a:rPr>
-              <a:t>Noncompliance problem</a:t>
-            </a:r>
-          </a:p>
-        </p:txBody>
-      </p:sp>
-      <p:sp>
-        <p:nvSpPr>
-          <p:cNvPr id="15" name="TextBox 14"/>
-          <p:cNvSpPr txBox="1"/>
-          <p:nvPr/>
-        </p:nvSpPr>
-        <p:spPr>
-          <a:xfrm>
-            <a:off x="594360" y="3794760"/>
-            <a:ext cx="5029200" cy="1280160"/>
-          </a:xfrm>
-          <a:prstGeom prst="rect">
-            <a:avLst/>
-          </a:prstGeom>
-          <a:noFill/>
-        </p:spPr>
-        <p:txBody>
-          <a:bodyPr wrap="square">
-            <a:spAutoFit/>
-          </a:bodyPr>
-          <a:lstStyle/>
-          <a:p>
-            <a:pPr algn="l"/>
-            <a:r>
-              <a:rPr sz="1200" b="0" i="0">
-                <a:solidFill>
-                  <a:srgbClr val="1A1A2E"/>
-                </a:solidFill>
-                <a:latin typeface="Calibri"/>
-              </a:rPr>
-              <a:t>ITT ≠ treatment effect when take-up is imperfect
-— need IV combined with ML</a:t>
-            </a:r>
-          </a:p>
-        </p:txBody>
-      </p:sp>
-      <p:sp>
-        <p:nvSpPr>
-          <p:cNvPr id="16" name="Rectangle 15"/>
-          <p:cNvSpPr/>
-          <p:nvPr/>
-        </p:nvSpPr>
-        <p:spPr>
-          <a:xfrm>
-            <a:off x="6309360" y="3291840"/>
-            <a:ext cx="5394960" cy="1920240"/>
-          </a:xfrm>
-          <a:prstGeom prst="rect">
-            <a:avLst/>
-          </a:prstGeom>
-          <a:solidFill>
-            <a:srgbClr val="FFFFFF"/>
-          </a:solidFill>
-          <a:ln>
-            <a:noFill/>
-          </a:ln>
-        </p:spPr>
-        <p:style>
-          <a:lnRef idx="1">
-            <a:schemeClr val="accent1"/>
-          </a:lnRef>
-          <a:fillRef idx="3">
-            <a:schemeClr val="accent1"/>
-          </a:fillRef>
-          <a:effectRef idx="2">
-            <a:schemeClr val="accent1"/>
-          </a:effectRef>
-          <a:fontRef idx="minor">
-            <a:schemeClr val="lt1"/>
-          </a:fontRef>
-        </p:style>
-        <p:txBody>
-          <a:bodyPr rtlCol="0" anchor="ctr"/>
-          <a:lstStyle/>
-          <a:p>
-            <a:pPr algn="ctr"/>
-          </a:p>
-        </p:txBody>
-      </p:sp>
-      <p:sp>
-        <p:nvSpPr>
-          <p:cNvPr id="17" name="Rectangle 16"/>
-          <p:cNvSpPr/>
-          <p:nvPr/>
-        </p:nvSpPr>
-        <p:spPr>
-          <a:xfrm>
-            <a:off x="6309360" y="3291840"/>
-            <a:ext cx="109728" cy="1920240"/>
-          </a:xfrm>
-          <a:prstGeom prst="rect">
-            <a:avLst/>
-          </a:prstGeom>
-          <a:solidFill>
-            <a:srgbClr val="4A90D9"/>
-          </a:solidFill>
-          <a:ln>
-            <a:noFill/>
-          </a:ln>
-        </p:spPr>
-        <p:style>
-          <a:lnRef idx="1">
-            <a:schemeClr val="accent1"/>
-          </a:lnRef>
-          <a:fillRef idx="3">
-            <a:schemeClr val="accent1"/>
-          </a:fillRef>
-          <a:effectRef idx="2">
-            <a:schemeClr val="accent1"/>
-          </a:effectRef>
-          <a:fontRef idx="minor">
-            <a:schemeClr val="lt1"/>
-          </a:fontRef>
-        </p:style>
-        <p:txBody>
-          <a:bodyPr rtlCol="0" anchor="ctr"/>
-          <a:lstStyle/>
-          <a:p>
-            <a:pPr algn="ctr"/>
-          </a:p>
-        </p:txBody>
-      </p:sp>
-      <p:sp>
-        <p:nvSpPr>
-          <p:cNvPr id="18" name="TextBox 17"/>
-          <p:cNvSpPr txBox="1"/>
-          <p:nvPr/>
-        </p:nvSpPr>
-        <p:spPr>
-          <a:xfrm>
-            <a:off x="6537960" y="3383280"/>
-            <a:ext cx="5029200" cy="365760"/>
-          </a:xfrm>
-          <a:prstGeom prst="rect">
-            <a:avLst/>
-          </a:prstGeom>
-          <a:noFill/>
-        </p:spPr>
-        <p:txBody>
-          <a:bodyPr wrap="square">
-            <a:spAutoFit/>
-          </a:bodyPr>
-          <a:lstStyle/>
-          <a:p>
-            <a:pPr algn="l"/>
-            <a:r>
-              <a:rPr sz="1300" b="1" i="0">
-                <a:solidFill>
-                  <a:srgbClr val="1E2761"/>
-                </a:solidFill>
-                <a:latin typeface="Calibri"/>
-              </a:rPr>
-              <a:t>Signal-to-noise</a:t>
-            </a:r>
-          </a:p>
-        </p:txBody>
-      </p:sp>
-      <p:sp>
-        <p:nvSpPr>
-          <p:cNvPr id="19" name="TextBox 18"/>
-          <p:cNvSpPr txBox="1"/>
-          <p:nvPr/>
-        </p:nvSpPr>
-        <p:spPr>
-          <a:xfrm>
-            <a:off x="6537960" y="3794760"/>
-            <a:ext cx="5029200" cy="1280160"/>
-          </a:xfrm>
-          <a:prstGeom prst="rect">
-            <a:avLst/>
-          </a:prstGeom>
-          <a:noFill/>
-        </p:spPr>
-        <p:txBody>
-          <a:bodyPr wrap="square">
-            <a:spAutoFit/>
-          </a:bodyPr>
-          <a:lstStyle/>
-          <a:p>
-            <a:pPr algn="l"/>
-            <a:r>
-              <a:rPr sz="1200" b="0" i="0">
-                <a:solidFill>
-                  <a:srgbClr val="1A1A2E"/>
-                </a:solidFill>
-                <a:latin typeface="Calibri"/>
-              </a:rPr>
-              <a:t>Compliance CATE is more precisely estimated than CLATE
-— targeting by τ_W can outperform targeting by τ_CL</a:t>
-            </a:r>
-          </a:p>
-        </p:txBody>
-      </p:sp>
-      <p:sp>
-        <p:nvSpPr>
-          <p:cNvPr id="20" name="Rectangle 19"/>
-          <p:cNvSpPr/>
-          <p:nvPr/>
-        </p:nvSpPr>
-        <p:spPr>
-          <a:xfrm>
-            <a:off x="0" y="6309360"/>
-            <a:ext cx="12188952" cy="548640"/>
-          </a:xfrm>
-          <a:prstGeom prst="rect">
-            <a:avLst/>
-          </a:prstGeom>
-          <a:solidFill>
-            <a:srgbClr val="1E2761"/>
-          </a:solidFill>
-          <a:ln>
-            <a:noFill/>
-          </a:ln>
-        </p:spPr>
-        <p:style>
-          <a:lnRef idx="1">
-            <a:schemeClr val="accent1"/>
-          </a:lnRef>
-          <a:fillRef idx="3">
-            <a:schemeClr val="accent1"/>
-          </a:fillRef>
-          <a:effectRef idx="2">
-            <a:schemeClr val="accent1"/>
-          </a:effectRef>
-          <a:fontRef idx="minor">
-            <a:schemeClr val="lt1"/>
-          </a:fontRef>
-        </p:style>
-        <p:txBody>
-          <a:bodyPr rtlCol="0" anchor="ctr"/>
-          <a:lstStyle/>
-          <a:p>
-            <a:pPr algn="ctr"/>
-          </a:p>
-        </p:txBody>
-      </p:sp>
-      <p:sp>
-        <p:nvSpPr>
-          <p:cNvPr id="21" name="TextBox 20"/>
-          <p:cNvSpPr txBox="1"/>
-          <p:nvPr/>
-        </p:nvSpPr>
-        <p:spPr>
-          <a:xfrm>
-            <a:off x="457200" y="6355080"/>
-            <a:ext cx="10972800" cy="365760"/>
-          </a:xfrm>
-          <a:prstGeom prst="rect">
-            <a:avLst/>
-          </a:prstGeom>
-          <a:noFill/>
-        </p:spPr>
-        <p:txBody>
-          <a:bodyPr wrap="square">
-            <a:spAutoFit/>
-          </a:bodyPr>
-          <a:lstStyle/>
-          <a:p>
-            <a:pPr algn="l"/>
-            <a:r>
-              <a:rPr sz="1100" b="0" i="0">
-                <a:solidFill>
-                  <a:srgbClr val="CADCFC"/>
-                </a:solidFill>
-                <a:latin typeface="Calibri"/>
-              </a:rPr>
-              <a:t>Athey, Inoue &amp; Tsugawa (2025)  ·  Jack Chepin</a:t>
-            </a:r>
-          </a:p>
-        </p:txBody>
-      </p:sp>
-    </p:spTree>
-  </p:cSld>
-  <p:clrMapOvr>
-    <a:masterClrMapping/>
-  </p:clrMapOvr>
-</p:sld>
-</file>
-
-<file path=ppt/slides/slide5.xml><?xml version="1.0" encoding="utf-8"?>
-<p:sld xmlns:a="http://schemas.openxmlformats.org/drawingml/2006/main" xmlns:p="http://schemas.openxmlformats.org/presentationml/2006/main" xmlns:r="http://schemas.openxmlformats.org/officeDocument/2006/relationships">
-  <p:cSld>
-    <p:bg>
-      <p:bgPr>
-        <a:solidFill>
-          <a:srgbClr val="F4F7FF"/>
-        </a:solidFill>
-        <a:effectLst/>
-      </p:bgPr>
-    </p:bg>
-    <p:spTree>
-      <p:nvGrpSpPr>
-        <p:cNvPr id="1" name=""/>
-        <p:cNvGrpSpPr/>
-        <p:nvPr/>
-      </p:nvGrpSpPr>
-      <p:grpSpPr/>
-      <p:sp>
-        <p:nvSpPr>
-          <p:cNvPr id="2" name="Rectangle 1"/>
-          <p:cNvSpPr/>
-          <p:nvPr/>
-        </p:nvSpPr>
-        <p:spPr>
-          <a:xfrm>
-            <a:off x="0" y="0"/>
-            <a:ext cx="12188952" cy="914400"/>
-          </a:xfrm>
-          <a:prstGeom prst="rect">
-            <a:avLst/>
-          </a:prstGeom>
-          <a:solidFill>
-            <a:srgbClr val="1E2761"/>
-          </a:solidFill>
-          <a:ln>
-            <a:noFill/>
-          </a:ln>
-        </p:spPr>
-        <p:style>
-          <a:lnRef idx="1">
-            <a:schemeClr val="accent1"/>
-          </a:lnRef>
-          <a:fillRef idx="3">
-            <a:schemeClr val="accent1"/>
-          </a:fillRef>
-          <a:effectRef idx="2">
-            <a:schemeClr val="accent1"/>
-          </a:effectRef>
-          <a:fontRef idx="minor">
-            <a:schemeClr val="lt1"/>
-          </a:fontRef>
-        </p:style>
-        <p:txBody>
-          <a:bodyPr rtlCol="0" anchor="ctr"/>
-          <a:lstStyle/>
-          <a:p>
-            <a:pPr algn="ctr"/>
+            <a:endParaRPr/>
           </a:p>
         </p:txBody>
       </p:sp>
@@ -6669,9 +6523,27 @@
                 <a:tableStyleId>{5C22544A-7EE6-4342-B048-85BDC9FD1C3A}</a:tableStyleId>
               </a:tblPr>
               <a:tblGrid>
-                <a:gridCol w="1828800"/>
-                <a:gridCol w="3474720"/>
-                <a:gridCol w="1554480"/>
+                <a:gridCol w="1828800">
+                  <a:extLst>
+                    <a:ext uri="{9D8B030D-6E8A-4147-A177-3AD203B41FA5}">
+                      <a16:colId xmlns:a16="http://schemas.microsoft.com/office/drawing/2014/main" val="20000"/>
+                    </a:ext>
+                  </a:extLst>
+                </a:gridCol>
+                <a:gridCol w="3474720">
+                  <a:extLst>
+                    <a:ext uri="{9D8B030D-6E8A-4147-A177-3AD203B41FA5}">
+                      <a16:colId xmlns:a16="http://schemas.microsoft.com/office/drawing/2014/main" val="20001"/>
+                    </a:ext>
+                  </a:extLst>
+                </a:gridCol>
+                <a:gridCol w="1554480">
+                  <a:extLst>
+                    <a:ext uri="{9D8B030D-6E8A-4147-A177-3AD203B41FA5}">
+                      <a16:colId xmlns:a16="http://schemas.microsoft.com/office/drawing/2014/main" val="20002"/>
+                    </a:ext>
+                  </a:extLst>
+                </a:gridCol>
               </a:tblGrid>
               <a:tr h="533400">
                 <a:tc>
@@ -6680,7 +6552,7 @@
                     <a:lstStyle/>
                     <a:p>
                       <a:r>
-                        <a:rPr sz="1300" b="1">
+                        <a:rPr sz="1300" b="1" dirty="0">
                           <a:solidFill>
                             <a:srgbClr val="FFFFFF"/>
                           </a:solidFill>
@@ -6740,6 +6612,11 @@
                     </a:solidFill>
                   </a:tcPr>
                 </a:tc>
+                <a:extLst>
+                  <a:ext uri="{0D108BD9-81ED-4DB2-BD59-A6C34878D82A}">
+                    <a16:rowId xmlns:a16="http://schemas.microsoft.com/office/drawing/2014/main" val="10000"/>
+                  </a:ext>
+                </a:extLst>
               </a:tr>
               <a:tr h="533400">
                 <a:tc>
@@ -6748,7 +6625,7 @@
                     <a:lstStyle/>
                     <a:p>
                       <a:r>
-                        <a:rPr sz="1300" b="0">
+                        <a:rPr sz="1300" b="0" dirty="0">
                           <a:solidFill>
                             <a:srgbClr val="1A1A2E"/>
                           </a:solidFill>
@@ -6808,6 +6685,11 @@
                     </a:solidFill>
                   </a:tcPr>
                 </a:tc>
+                <a:extLst>
+                  <a:ext uri="{0D108BD9-81ED-4DB2-BD59-A6C34878D82A}">
+                    <a16:rowId xmlns:a16="http://schemas.microsoft.com/office/drawing/2014/main" val="10001"/>
+                  </a:ext>
+                </a:extLst>
               </a:tr>
               <a:tr h="533400">
                 <a:tc>
@@ -6876,6 +6758,11 @@
                     </a:solidFill>
                   </a:tcPr>
                 </a:tc>
+                <a:extLst>
+                  <a:ext uri="{0D108BD9-81ED-4DB2-BD59-A6C34878D82A}">
+                    <a16:rowId xmlns:a16="http://schemas.microsoft.com/office/drawing/2014/main" val="10002"/>
+                  </a:ext>
+                </a:extLst>
               </a:tr>
               <a:tr h="533400">
                 <a:tc>
@@ -6906,7 +6793,7 @@
                     <a:lstStyle/>
                     <a:p>
                       <a:r>
-                        <a:rPr sz="1300" b="0">
+                        <a:rPr sz="1300" b="0" dirty="0">
                           <a:solidFill>
                             <a:srgbClr val="1A1A2E"/>
                           </a:solidFill>
@@ -6944,6 +6831,11 @@
                     </a:solidFill>
                   </a:tcPr>
                 </a:tc>
+                <a:extLst>
+                  <a:ext uri="{0D108BD9-81ED-4DB2-BD59-A6C34878D82A}">
+                    <a16:rowId xmlns:a16="http://schemas.microsoft.com/office/drawing/2014/main" val="10003"/>
+                  </a:ext>
+                </a:extLst>
               </a:tr>
               <a:tr h="533400">
                 <a:tc>
@@ -7012,6 +6904,11 @@
                     </a:solidFill>
                   </a:tcPr>
                 </a:tc>
+                <a:extLst>
+                  <a:ext uri="{0D108BD9-81ED-4DB2-BD59-A6C34878D82A}">
+                    <a16:rowId xmlns:a16="http://schemas.microsoft.com/office/drawing/2014/main" val="10004"/>
+                  </a:ext>
+                </a:extLst>
               </a:tr>
               <a:tr h="533400">
                 <a:tc>
@@ -7042,7 +6939,7 @@
                     <a:lstStyle/>
                     <a:p>
                       <a:r>
-                        <a:rPr sz="1300" b="0">
+                        <a:rPr sz="1300" b="0" dirty="0">
                           <a:solidFill>
                             <a:srgbClr val="1A1A2E"/>
                           </a:solidFill>
@@ -7064,7 +6961,7 @@
                     <a:lstStyle/>
                     <a:p>
                       <a:r>
-                        <a:rPr sz="1300" b="0">
+                        <a:rPr sz="1300" b="0" dirty="0">
                           <a:solidFill>
                             <a:srgbClr val="1A1A2E"/>
                           </a:solidFill>
@@ -7080,6 +6977,11 @@
                     </a:solidFill>
                   </a:tcPr>
                 </a:tc>
+                <a:extLst>
+                  <a:ext uri="{0D108BD9-81ED-4DB2-BD59-A6C34878D82A}">
+                    <a16:rowId xmlns:a16="http://schemas.microsoft.com/office/drawing/2014/main" val="10005"/>
+                  </a:ext>
+                </a:extLst>
               </a:tr>
             </a:tbl>
           </a:graphicData>
@@ -7184,6 +7086,7 @@
           <a:lstStyle/>
           <a:p>
             <a:pPr algn="ctr"/>
+            <a:endParaRPr/>
           </a:p>
         </p:txBody>
       </p:sp>
@@ -7231,7 +7134,7 @@
 </file>
 
 <file path=ppt/slides/slide6.xml><?xml version="1.0" encoding="utf-8"?>
-<p:sld xmlns:a="http://schemas.openxmlformats.org/drawingml/2006/main" xmlns:p="http://schemas.openxmlformats.org/presentationml/2006/main" xmlns:r="http://schemas.openxmlformats.org/officeDocument/2006/relationships">
+<p:sld xmlns:a="http://schemas.openxmlformats.org/drawingml/2006/main" xmlns:r="http://schemas.openxmlformats.org/officeDocument/2006/relationships" xmlns:p="http://schemas.openxmlformats.org/presentationml/2006/main">
   <p:cSld>
     <p:bg>
       <p:bgPr>
@@ -7247,7 +7150,14 @@
         <p:cNvGrpSpPr/>
         <p:nvPr/>
       </p:nvGrpSpPr>
-      <p:grpSpPr/>
+      <p:grpSpPr>
+        <a:xfrm>
+          <a:off x="0" y="0"/>
+          <a:ext cx="0" cy="0"/>
+          <a:chOff x="0" y="0"/>
+          <a:chExt cx="0" cy="0"/>
+        </a:xfrm>
+      </p:grpSpPr>
       <p:sp>
         <p:nvSpPr>
           <p:cNvPr id="2" name="Rectangle 1"/>
@@ -7288,6 +7198,7 @@
           <a:lstStyle/>
           <a:p>
             <a:pPr algn="ctr"/>
+            <a:endParaRPr/>
           </a:p>
         </p:txBody>
       </p:sp>
@@ -7366,6 +7277,7 @@
           <a:lstStyle/>
           <a:p>
             <a:pPr algn="ctr"/>
+            <a:endParaRPr/>
           </a:p>
         </p:txBody>
       </p:sp>
@@ -7377,7 +7289,7 @@
         </p:nvSpPr>
         <p:spPr>
           <a:xfrm>
-            <a:off x="365760" y="1097280"/>
+            <a:off x="365760" y="1170432"/>
             <a:ext cx="5394960" cy="502920"/>
           </a:xfrm>
           <a:prstGeom prst="rect">
@@ -7409,6 +7321,7 @@
           <a:lstStyle/>
           <a:p>
             <a:pPr algn="ctr"/>
+            <a:endParaRPr/>
           </a:p>
         </p:txBody>
       </p:sp>
@@ -7471,7 +7384,7 @@
           <a:p>
             <a:pPr algn="l"/>
             <a:r>
-              <a:rPr sz="1200" b="0" i="0">
+              <a:rPr sz="1200" b="0" i="0" dirty="0">
                 <a:solidFill>
                   <a:srgbClr val="CADCFC"/>
                 </a:solidFill>
@@ -7491,7 +7404,7 @@
         <p:spPr>
           <a:xfrm>
             <a:off x="548640" y="1783080"/>
-            <a:ext cx="5029200" cy="2377440"/>
+            <a:ext cx="5029200" cy="892552"/>
           </a:xfrm>
           <a:prstGeom prst="rect">
             <a:avLst/>
@@ -7506,16 +7419,130 @@
           <a:p>
             <a:pPr algn="l"/>
             <a:r>
-              <a:rPr sz="1300" b="0" i="0">
+              <a:rPr sz="1300" b="0" i="0" dirty="0" err="1">
                 <a:solidFill>
                   <a:srgbClr val="1A1A2E"/>
                 </a:solidFill>
                 <a:latin typeface="Calibri"/>
               </a:rPr>
-              <a:t>τ_CL(x) = τ_Y(x) / τ_W(x)
-Mean LATE for debt ≈ 0.15
-Estimated using instrumental_forest() in grf</a:t>
-            </a:r>
+              <a:t>τ_CL</a:t>
+            </a:r>
+            <a:r>
+              <a:rPr sz="1300" b="0" i="0" dirty="0">
+                <a:solidFill>
+                  <a:srgbClr val="1A1A2E"/>
+                </a:solidFill>
+                <a:latin typeface="Calibri"/>
+              </a:rPr>
+              <a:t>(x) = </a:t>
+            </a:r>
+            <a:r>
+              <a:rPr sz="1300" b="0" i="0" dirty="0" err="1">
+                <a:solidFill>
+                  <a:srgbClr val="1A1A2E"/>
+                </a:solidFill>
+                <a:latin typeface="Calibri"/>
+              </a:rPr>
+              <a:t>τ_Y</a:t>
+            </a:r>
+            <a:r>
+              <a:rPr sz="1300" b="0" i="0" dirty="0">
+                <a:solidFill>
+                  <a:srgbClr val="1A1A2E"/>
+                </a:solidFill>
+                <a:latin typeface="Calibri"/>
+              </a:rPr>
+              <a:t>(x) / </a:t>
+            </a:r>
+            <a:r>
+              <a:rPr sz="1300" b="0" i="0" dirty="0" err="1">
+                <a:solidFill>
+                  <a:srgbClr val="1A1A2E"/>
+                </a:solidFill>
+                <a:latin typeface="Calibri"/>
+              </a:rPr>
+              <a:t>τ_W</a:t>
+            </a:r>
+            <a:r>
+              <a:rPr sz="1300" b="0" i="0" dirty="0">
+                <a:solidFill>
+                  <a:srgbClr val="1A1A2E"/>
+                </a:solidFill>
+                <a:latin typeface="Calibri"/>
+              </a:rPr>
+              <a:t>(x)
+Mean </a:t>
+            </a:r>
+            <a:r>
+              <a:rPr lang="en-US" sz="1300" b="0" i="0" dirty="0">
+                <a:solidFill>
+                  <a:srgbClr val="1A1A2E"/>
+                </a:solidFill>
+                <a:latin typeface="Calibri"/>
+              </a:rPr>
+              <a:t>C</a:t>
+            </a:r>
+            <a:r>
+              <a:rPr sz="1300" b="0" i="0" dirty="0">
+                <a:solidFill>
+                  <a:srgbClr val="1A1A2E"/>
+                </a:solidFill>
+                <a:latin typeface="Calibri"/>
+              </a:rPr>
+              <a:t>LATE for debt ≈ 0.1</a:t>
+            </a:r>
+            <a:r>
+              <a:rPr lang="en-US" sz="1300" b="0" i="0" dirty="0">
+                <a:solidFill>
+                  <a:srgbClr val="1A1A2E"/>
+                </a:solidFill>
+                <a:latin typeface="Calibri"/>
+              </a:rPr>
+              <a:t>25</a:t>
+            </a:r>
+            <a:r>
+              <a:rPr sz="1300" b="0" i="0" dirty="0">
+                <a:solidFill>
+                  <a:srgbClr val="1A1A2E"/>
+                </a:solidFill>
+                <a:latin typeface="Calibri"/>
+              </a:rPr>
+              <a:t>
+Estimated using </a:t>
+            </a:r>
+            <a:r>
+              <a:rPr sz="1300" b="0" i="0" dirty="0" err="1">
+                <a:solidFill>
+                  <a:srgbClr val="1A1A2E"/>
+                </a:solidFill>
+                <a:latin typeface="Calibri"/>
+              </a:rPr>
+              <a:t>instrumental_forest</a:t>
+            </a:r>
+            <a:r>
+              <a:rPr sz="1300" b="0" i="0" dirty="0">
+                <a:solidFill>
+                  <a:srgbClr val="1A1A2E"/>
+                </a:solidFill>
+                <a:latin typeface="Calibri"/>
+              </a:rPr>
+              <a:t>() in </a:t>
+            </a:r>
+            <a:r>
+              <a:rPr sz="1300" b="0" i="0" dirty="0" err="1">
+                <a:solidFill>
+                  <a:srgbClr val="1A1A2E"/>
+                </a:solidFill>
+                <a:latin typeface="Calibri"/>
+              </a:rPr>
+              <a:t>grf</a:t>
+            </a:r>
+            <a:endParaRPr sz="1300" b="0" i="0" dirty="0">
+              <a:solidFill>
+                <a:srgbClr val="1A1A2E"/>
+              </a:solidFill>
+              <a:latin typeface="Calibri"/>
+            </a:endParaRPr>
           </a:p>
         </p:txBody>
       </p:sp>
@@ -7559,6 +7586,7 @@
           <a:lstStyle/>
           <a:p>
             <a:pPr algn="ctr"/>
+            <a:endParaRPr/>
           </a:p>
         </p:txBody>
       </p:sp>
@@ -7570,7 +7598,7 @@
         </p:nvSpPr>
         <p:spPr>
           <a:xfrm>
-            <a:off x="6309360" y="1097280"/>
+            <a:off x="6309360" y="1143000"/>
             <a:ext cx="5394960" cy="502920"/>
           </a:xfrm>
           <a:prstGeom prst="rect">
@@ -7602,6 +7630,7 @@
           <a:lstStyle/>
           <a:p>
             <a:pPr algn="ctr"/>
+            <a:endParaRPr/>
           </a:p>
         </p:txBody>
       </p:sp>
@@ -7788,6 +7817,7 @@
           <a:lstStyle/>
           <a:p>
             <a:pPr algn="ctr"/>
+            <a:endParaRPr/>
           </a:p>
         </p:txBody>
       </p:sp>
@@ -7826,6 +7856,66 @@
           </a:p>
         </p:txBody>
       </p:sp>
+      <p:pic>
+        <p:nvPicPr>
+          <p:cNvPr id="17" name="Picture 16" descr="figure_f1.png">
+            <a:extLst>
+              <a:ext uri="{FF2B5EF4-FFF2-40B4-BE49-F238E27FC236}">
+                <a16:creationId xmlns:a16="http://schemas.microsoft.com/office/drawing/2014/main" id="{4E07CFDC-EFD7-A147-9830-C152EAF7BE8C}"/>
+              </a:ext>
+            </a:extLst>
+          </p:cNvPr>
+          <p:cNvPicPr>
+            <a:picLocks noChangeAspect="1"/>
+          </p:cNvPicPr>
+          <p:nvPr/>
+        </p:nvPicPr>
+        <p:blipFill>
+          <a:blip r:embed="rId2"/>
+          <a:stretch>
+            <a:fillRect/>
+          </a:stretch>
+        </p:blipFill>
+        <p:spPr>
+          <a:xfrm>
+            <a:off x="7092115" y="2890606"/>
+            <a:ext cx="3057726" cy="2184090"/>
+          </a:xfrm>
+          <a:prstGeom prst="rect">
+            <a:avLst/>
+          </a:prstGeom>
+        </p:spPr>
+      </p:pic>
+      <p:pic>
+        <p:nvPicPr>
+          <p:cNvPr id="20" name="Picture 19">
+            <a:extLst>
+              <a:ext uri="{FF2B5EF4-FFF2-40B4-BE49-F238E27FC236}">
+                <a16:creationId xmlns:a16="http://schemas.microsoft.com/office/drawing/2014/main" id="{7018165F-12F6-3D4A-A1BC-49B7CDFFCCEB}"/>
+              </a:ext>
+            </a:extLst>
+          </p:cNvPr>
+          <p:cNvPicPr>
+            <a:picLocks noChangeAspect="1"/>
+          </p:cNvPicPr>
+          <p:nvPr/>
+        </p:nvPicPr>
+        <p:blipFill>
+          <a:blip r:embed="rId3"/>
+          <a:stretch>
+            <a:fillRect/>
+          </a:stretch>
+        </p:blipFill>
+        <p:spPr>
+          <a:xfrm>
+            <a:off x="1726016" y="3224272"/>
+            <a:ext cx="2319175" cy="701145"/>
+          </a:xfrm>
+          <a:prstGeom prst="rect">
+            <a:avLst/>
+          </a:prstGeom>
+        </p:spPr>
+      </p:pic>
     </p:spTree>
   </p:cSld>
   <p:clrMapOvr>
@@ -7835,7 +7925,7 @@
 </file>
 
 <file path=ppt/slides/slide7.xml><?xml version="1.0" encoding="utf-8"?>
-<p:sld xmlns:a="http://schemas.openxmlformats.org/drawingml/2006/main" xmlns:p="http://schemas.openxmlformats.org/presentationml/2006/main" xmlns:r="http://schemas.openxmlformats.org/officeDocument/2006/relationships">
+<p:sld xmlns:a="http://schemas.openxmlformats.org/drawingml/2006/main" xmlns:r="http://schemas.openxmlformats.org/officeDocument/2006/relationships" xmlns:p="http://schemas.openxmlformats.org/presentationml/2006/main">
   <p:cSld>
     <p:bg>
       <p:bgPr>
@@ -7851,7 +7941,14 @@
         <p:cNvGrpSpPr/>
         <p:nvPr/>
       </p:nvGrpSpPr>
-      <p:grpSpPr/>
+      <p:grpSpPr>
+        <a:xfrm>
+          <a:off x="0" y="0"/>
+          <a:ext cx="0" cy="0"/>
+          <a:chOff x="0" y="0"/>
+          <a:chExt cx="0" cy="0"/>
+        </a:xfrm>
+      </p:grpSpPr>
       <p:sp>
         <p:nvSpPr>
           <p:cNvPr id="2" name="Rectangle 1"/>
@@ -7892,6 +7989,7 @@
           <a:lstStyle/>
           <a:p>
             <a:pPr algn="ctr"/>
+            <a:endParaRPr/>
           </a:p>
         </p:txBody>
       </p:sp>
@@ -7936,7 +8034,13 @@
           <p:cNvGraphicFramePr>
             <a:graphicFrameLocks noGrp="1"/>
           </p:cNvGraphicFramePr>
-          <p:nvPr/>
+          <p:nvPr>
+            <p:extLst>
+              <p:ext uri="{D42A27DB-BD31-4B8C-83A1-F6EECF244321}">
+                <p14:modId xmlns:p14="http://schemas.microsoft.com/office/powerpoint/2010/main" val="2973074013"/>
+              </p:ext>
+            </p:extLst>
+          </p:nvPr>
         </p:nvGraphicFramePr>
         <p:xfrm>
           <a:off x="1371600" y="1188720"/>
@@ -7949,9 +8053,27 @@
                 <a:tableStyleId>{5C22544A-7EE6-4342-B048-85BDC9FD1C3A}</a:tableStyleId>
               </a:tblPr>
               <a:tblGrid>
-                <a:gridCol w="2560320"/>
-                <a:gridCol w="1920240"/>
-                <a:gridCol w="1920240"/>
+                <a:gridCol w="2560320">
+                  <a:extLst>
+                    <a:ext uri="{9D8B030D-6E8A-4147-A177-3AD203B41FA5}">
+                      <a16:colId xmlns:a16="http://schemas.microsoft.com/office/drawing/2014/main" val="20000"/>
+                    </a:ext>
+                  </a:extLst>
+                </a:gridCol>
+                <a:gridCol w="1920240">
+                  <a:extLst>
+                    <a:ext uri="{9D8B030D-6E8A-4147-A177-3AD203B41FA5}">
+                      <a16:colId xmlns:a16="http://schemas.microsoft.com/office/drawing/2014/main" val="20001"/>
+                    </a:ext>
+                  </a:extLst>
+                </a:gridCol>
+                <a:gridCol w="1920240">
+                  <a:extLst>
+                    <a:ext uri="{9D8B030D-6E8A-4147-A177-3AD203B41FA5}">
+                      <a16:colId xmlns:a16="http://schemas.microsoft.com/office/drawing/2014/main" val="20002"/>
+                    </a:ext>
+                  </a:extLst>
+                </a:gridCol>
               </a:tblGrid>
               <a:tr h="548640">
                 <a:tc>
@@ -8023,6 +8145,11 @@
                     </a:solidFill>
                   </a:tcPr>
                 </a:tc>
+                <a:extLst>
+                  <a:ext uri="{0D108BD9-81ED-4DB2-BD59-A6C34878D82A}">
+                    <a16:rowId xmlns:a16="http://schemas.microsoft.com/office/drawing/2014/main" val="10000"/>
+                  </a:ext>
+                </a:extLst>
               </a:tr>
               <a:tr h="548640">
                 <a:tc>
@@ -8078,14 +8205,29 @@
                     <a:p>
                       <a:pPr algn="ctr"/>
                       <a:r>
-                        <a:rPr sz="1400" b="0">
+                        <a:rPr sz="1400" b="0" dirty="0">
                           <a:solidFill>
                             <a:srgbClr val="1A1A2E"/>
                           </a:solidFill>
                           <a:latin typeface="Calibri"/>
                         </a:rPr>
-                        <a:t>0.0412</a:t>
+                        <a:t>0.04</a:t>
                       </a:r>
+                      <a:r>
+                        <a:rPr lang="en-US" sz="1400" b="0" dirty="0">
+                          <a:solidFill>
+                            <a:srgbClr val="1A1A2E"/>
+                          </a:solidFill>
+                          <a:latin typeface="Calibri"/>
+                        </a:rPr>
+                        <a:t>6</a:t>
+                      </a:r>
+                      <a:endParaRPr sz="1400" b="0" dirty="0">
+                        <a:solidFill>
+                          <a:srgbClr val="1A1A2E"/>
+                        </a:solidFill>
+                        <a:latin typeface="Calibri"/>
+                      </a:endParaRPr>
                     </a:p>
                   </a:txBody>
                   <a:tcPr>
@@ -8094,6 +8236,11 @@
                     </a:solidFill>
                   </a:tcPr>
                 </a:tc>
+                <a:extLst>
+                  <a:ext uri="{0D108BD9-81ED-4DB2-BD59-A6C34878D82A}">
+                    <a16:rowId xmlns:a16="http://schemas.microsoft.com/office/drawing/2014/main" val="10001"/>
+                  </a:ext>
+                </a:extLst>
               </a:tr>
               <a:tr h="548640">
                 <a:tc>
@@ -8149,13 +8296,31 @@
                     <a:p>
                       <a:pPr algn="ctr"/>
                       <a:r>
-                        <a:rPr sz="1400" b="0">
+                        <a:rPr sz="1400" b="0" dirty="0">
                           <a:solidFill>
                             <a:srgbClr val="1A1A2E"/>
                           </a:solidFill>
                           <a:latin typeface="Calibri"/>
                         </a:rPr>
-                        <a:t>(0.0068)</a:t>
+                        <a:t>(0.00</a:t>
+                      </a:r>
+                      <a:r>
+                        <a:rPr lang="en-US" sz="1400" b="0" dirty="0">
+                          <a:solidFill>
+                            <a:srgbClr val="1A1A2E"/>
+                          </a:solidFill>
+                          <a:latin typeface="Calibri"/>
+                        </a:rPr>
+                        <a:t>7</a:t>
+                      </a:r>
+                      <a:r>
+                        <a:rPr sz="1400" b="0" dirty="0">
+                          <a:solidFill>
+                            <a:srgbClr val="1A1A2E"/>
+                          </a:solidFill>
+                          <a:latin typeface="Calibri"/>
+                        </a:rPr>
+                        <a:t>)</a:t>
                       </a:r>
                     </a:p>
                   </a:txBody>
@@ -8165,6 +8330,11 @@
                     </a:solidFill>
                   </a:tcPr>
                 </a:tc>
+                <a:extLst>
+                  <a:ext uri="{0D108BD9-81ED-4DB2-BD59-A6C34878D82A}">
+                    <a16:rowId xmlns:a16="http://schemas.microsoft.com/office/drawing/2014/main" val="10002"/>
+                  </a:ext>
+                </a:extLst>
               </a:tr>
               <a:tr h="548640">
                 <a:tc>
@@ -8236,6 +8406,11 @@
                     </a:solidFill>
                   </a:tcPr>
                 </a:tc>
+                <a:extLst>
+                  <a:ext uri="{0D108BD9-81ED-4DB2-BD59-A6C34878D82A}">
+                    <a16:rowId xmlns:a16="http://schemas.microsoft.com/office/drawing/2014/main" val="10003"/>
+                  </a:ext>
+                </a:extLst>
               </a:tr>
               <a:tr h="548640">
                 <a:tc>
@@ -8291,7 +8466,7 @@
                     <a:p>
                       <a:pPr algn="ctr"/>
                       <a:r>
-                        <a:rPr sz="1400" b="0">
+                        <a:rPr sz="1400" b="0" dirty="0">
                           <a:solidFill>
                             <a:srgbClr val="1A1A2E"/>
                           </a:solidFill>
@@ -8307,6 +8482,11 @@
                     </a:solidFill>
                   </a:tcPr>
                 </a:tc>
+                <a:extLst>
+                  <a:ext uri="{0D108BD9-81ED-4DB2-BD59-A6C34878D82A}">
+                    <a16:rowId xmlns:a16="http://schemas.microsoft.com/office/drawing/2014/main" val="10004"/>
+                  </a:ext>
+                </a:extLst>
               </a:tr>
             </a:tbl>
           </a:graphicData>
@@ -8321,7 +8501,7 @@
         <p:spPr>
           <a:xfrm>
             <a:off x="1371600" y="4160520"/>
-            <a:ext cx="9144000" cy="411480"/>
+            <a:ext cx="9144000" cy="323165"/>
           </a:xfrm>
           <a:prstGeom prst="rect">
             <a:avLst/>
@@ -8336,13 +8516,31 @@
           <a:p>
             <a:pPr algn="l"/>
             <a:r>
-              <a:rPr sz="1500" b="1" i="0">
+              <a:rPr sz="1500" b="1" i="0" dirty="0">
                 <a:solidFill>
                   <a:srgbClr val="4A90D9"/>
                 </a:solidFill>
                 <a:latin typeface="Calibri"/>
               </a:rPr>
-              <a:t>Difference of 0.0002 in AUTOC — well within sampling variation. ✓</a:t>
+              <a:t>Difference of 0.00</a:t>
+            </a:r>
+            <a:r>
+              <a:rPr lang="en-US" sz="1500" b="1" i="0" dirty="0">
+                <a:solidFill>
+                  <a:srgbClr val="4A90D9"/>
+                </a:solidFill>
+                <a:latin typeface="Calibri"/>
+              </a:rPr>
+              <a:t>46</a:t>
+            </a:r>
+            <a:r>
+              <a:rPr sz="1500" b="1" i="0" dirty="0">
+                <a:solidFill>
+                  <a:srgbClr val="4A90D9"/>
+                </a:solidFill>
+                <a:latin typeface="Calibri"/>
+              </a:rPr>
+              <a:t> in AUTOC — well within sampling variation. ✓</a:t>
             </a:r>
           </a:p>
         </p:txBody>
@@ -8422,6 +8620,7 @@
           <a:lstStyle/>
           <a:p>
             <a:pPr algn="ctr"/>
+            <a:endParaRPr/>
           </a:p>
         </p:txBody>
       </p:sp>
@@ -8469,337 +8668,7 @@
 </file>
 
 <file path=ppt/slides/slide8.xml><?xml version="1.0" encoding="utf-8"?>
-<p:sld xmlns:a="http://schemas.openxmlformats.org/drawingml/2006/main" xmlns:p="http://schemas.openxmlformats.org/presentationml/2006/main" xmlns:r="http://schemas.openxmlformats.org/officeDocument/2006/relationships">
-  <p:cSld>
-    <p:bg>
-      <p:bgPr>
-        <a:solidFill>
-          <a:srgbClr val="1A1A2E"/>
-        </a:solidFill>
-        <a:effectLst/>
-      </p:bgPr>
-    </p:bg>
-    <p:spTree>
-      <p:nvGrpSpPr>
-        <p:cNvPr id="1" name=""/>
-        <p:cNvGrpSpPr/>
-        <p:nvPr/>
-      </p:nvGrpSpPr>
-      <p:grpSpPr/>
-      <p:sp>
-        <p:nvSpPr>
-          <p:cNvPr id="2" name="Rectangle 1"/>
-          <p:cNvSpPr/>
-          <p:nvPr/>
-        </p:nvSpPr>
-        <p:spPr>
-          <a:xfrm>
-            <a:off x="0" y="0"/>
-            <a:ext cx="12188952" cy="914400"/>
-          </a:xfrm>
-          <a:prstGeom prst="rect">
-            <a:avLst/>
-          </a:prstGeom>
-          <a:solidFill>
-            <a:srgbClr val="1E2761"/>
-          </a:solidFill>
-          <a:ln>
-            <a:noFill/>
-          </a:ln>
-        </p:spPr>
-        <p:style>
-          <a:lnRef idx="1">
-            <a:schemeClr val="accent1"/>
-          </a:lnRef>
-          <a:fillRef idx="3">
-            <a:schemeClr val="accent1"/>
-          </a:fillRef>
-          <a:effectRef idx="2">
-            <a:schemeClr val="accent1"/>
-          </a:effectRef>
-          <a:fontRef idx="minor">
-            <a:schemeClr val="lt1"/>
-          </a:fontRef>
-        </p:style>
-        <p:txBody>
-          <a:bodyPr rtlCol="0" anchor="ctr"/>
-          <a:lstStyle/>
-          <a:p>
-            <a:pPr algn="ctr"/>
-          </a:p>
-        </p:txBody>
-      </p:sp>
-      <p:sp>
-        <p:nvSpPr>
-          <p:cNvPr id="3" name="TextBox 2"/>
-          <p:cNvSpPr txBox="1"/>
-          <p:nvPr/>
-        </p:nvSpPr>
-        <p:spPr>
-          <a:xfrm>
-            <a:off x="457200" y="137160"/>
-            <a:ext cx="10972800" cy="640080"/>
-          </a:xfrm>
-          <a:prstGeom prst="rect">
-            <a:avLst/>
-          </a:prstGeom>
-          <a:noFill/>
-        </p:spPr>
-        <p:txBody>
-          <a:bodyPr wrap="square">
-            <a:spAutoFit/>
-          </a:bodyPr>
-          <a:lstStyle/>
-          <a:p>
-            <a:pPr algn="l"/>
-            <a:r>
-              <a:rPr sz="2600" b="1" i="0">
-                <a:solidFill>
-                  <a:srgbClr val="FFFFFF"/>
-                </a:solidFill>
-                <a:latin typeface="Calibri"/>
-              </a:rPr>
-              <a:t>Figure F1: TOC Curve for Compliance</a:t>
-            </a:r>
-          </a:p>
-        </p:txBody>
-      </p:sp>
-      <p:sp>
-        <p:nvSpPr>
-          <p:cNvPr id="4" name="TextBox 3"/>
-          <p:cNvSpPr txBox="1"/>
-          <p:nvPr/>
-        </p:nvSpPr>
-        <p:spPr>
-          <a:xfrm>
-            <a:off x="1828800" y="1188720"/>
-            <a:ext cx="8229600" cy="4114800"/>
-          </a:xfrm>
-          <a:prstGeom prst="rect">
-            <a:avLst/>
-          </a:prstGeom>
-          <a:noFill/>
-        </p:spPr>
-        <p:txBody>
-          <a:bodyPr wrap="square">
-            <a:spAutoFit/>
-          </a:bodyPr>
-          <a:lstStyle/>
-          <a:p>
-            <a:pPr algn="ctr"/>
-            <a:r>
-              <a:rPr sz="1800" b="0" i="0">
-                <a:solidFill>
-                  <a:srgbClr val="CADCFC"/>
-                </a:solidFill>
-                <a:latin typeface="Calibri"/>
-              </a:rPr>
-              <a:t>[Insert your figure_f1.png here]</a:t>
-            </a:r>
-          </a:p>
-        </p:txBody>
-      </p:sp>
-      <p:sp>
-        <p:nvSpPr>
-          <p:cNvPr id="5" name="Rectangle 4"/>
-          <p:cNvSpPr/>
-          <p:nvPr/>
-        </p:nvSpPr>
-        <p:spPr>
-          <a:xfrm>
-            <a:off x="1828800" y="1188720"/>
-            <a:ext cx="8229600" cy="4114800"/>
-          </a:xfrm>
-          <a:prstGeom prst="rect">
-            <a:avLst/>
-          </a:prstGeom>
-          <a:solidFill>
-            <a:srgbClr val="2A355E"/>
-          </a:solidFill>
-          <a:ln>
-            <a:noFill/>
-          </a:ln>
-        </p:spPr>
-        <p:style>
-          <a:lnRef idx="1">
-            <a:schemeClr val="accent1"/>
-          </a:lnRef>
-          <a:fillRef idx="3">
-            <a:schemeClr val="accent1"/>
-          </a:fillRef>
-          <a:effectRef idx="2">
-            <a:schemeClr val="accent1"/>
-          </a:effectRef>
-          <a:fontRef idx="minor">
-            <a:schemeClr val="lt1"/>
-          </a:fontRef>
-        </p:style>
-        <p:txBody>
-          <a:bodyPr rtlCol="0" anchor="ctr"/>
-          <a:lstStyle/>
-          <a:p>
-            <a:pPr algn="ctr"/>
-          </a:p>
-        </p:txBody>
-      </p:sp>
-      <p:sp>
-        <p:nvSpPr>
-          <p:cNvPr id="6" name="TextBox 5"/>
-          <p:cNvSpPr txBox="1"/>
-          <p:nvPr/>
-        </p:nvSpPr>
-        <p:spPr>
-          <a:xfrm>
-            <a:off x="914400" y="5486400"/>
-            <a:ext cx="10058400" cy="365760"/>
-          </a:xfrm>
-          <a:prstGeom prst="rect">
-            <a:avLst/>
-          </a:prstGeom>
-          <a:noFill/>
-        </p:spPr>
-        <p:txBody>
-          <a:bodyPr wrap="square">
-            <a:spAutoFit/>
-          </a:bodyPr>
-          <a:lstStyle/>
-          <a:p>
-            <a:pPr algn="ctr"/>
-            <a:r>
-              <a:rPr sz="1400" b="1" i="0">
-                <a:solidFill>
-                  <a:srgbClr val="4A90D9"/>
-                </a:solidFill>
-                <a:latin typeface="Calibri"/>
-              </a:rPr>
-              <a:t>AUTOC = 0.0414  (Paper: 0.0412)   ·   SE = 0.0087</a:t>
-            </a:r>
-          </a:p>
-        </p:txBody>
-      </p:sp>
-      <p:sp>
-        <p:nvSpPr>
-          <p:cNvPr id="7" name="TextBox 6"/>
-          <p:cNvSpPr txBox="1"/>
-          <p:nvPr/>
-        </p:nvSpPr>
-        <p:spPr>
-          <a:xfrm>
-            <a:off x="914400" y="5852160"/>
-            <a:ext cx="10058400" cy="320040"/>
-          </a:xfrm>
-          <a:prstGeom prst="rect">
-            <a:avLst/>
-          </a:prstGeom>
-          <a:noFill/>
-        </p:spPr>
-        <p:txBody>
-          <a:bodyPr wrap="square">
-            <a:spAutoFit/>
-          </a:bodyPr>
-          <a:lstStyle/>
-          <a:p>
-            <a:pPr algn="ctr"/>
-            <a:r>
-              <a:rPr sz="1200" b="0" i="0">
-                <a:solidFill>
-                  <a:srgbClr val="6B7A99"/>
-                </a:solidFill>
-                <a:latin typeface="Calibri"/>
-              </a:rPr>
-              <a:t>Outcome: Compliance (W)   ·   Treatment: Eligibility (Z)   ·   Ranked by: τ̂_W(X)</a:t>
-            </a:r>
-          </a:p>
-        </p:txBody>
-      </p:sp>
-      <p:sp>
-        <p:nvSpPr>
-          <p:cNvPr id="8" name="Rectangle 7"/>
-          <p:cNvSpPr/>
-          <p:nvPr/>
-        </p:nvSpPr>
-        <p:spPr>
-          <a:xfrm>
-            <a:off x="0" y="6309360"/>
-            <a:ext cx="12188952" cy="548640"/>
-          </a:xfrm>
-          <a:prstGeom prst="rect">
-            <a:avLst/>
-          </a:prstGeom>
-          <a:solidFill>
-            <a:srgbClr val="1E2761"/>
-          </a:solidFill>
-          <a:ln>
-            <a:noFill/>
-          </a:ln>
-        </p:spPr>
-        <p:style>
-          <a:lnRef idx="1">
-            <a:schemeClr val="accent1"/>
-          </a:lnRef>
-          <a:fillRef idx="3">
-            <a:schemeClr val="accent1"/>
-          </a:fillRef>
-          <a:effectRef idx="2">
-            <a:schemeClr val="accent1"/>
-          </a:effectRef>
-          <a:fontRef idx="minor">
-            <a:schemeClr val="lt1"/>
-          </a:fontRef>
-        </p:style>
-        <p:txBody>
-          <a:bodyPr rtlCol="0" anchor="ctr"/>
-          <a:lstStyle/>
-          <a:p>
-            <a:pPr algn="ctr"/>
-          </a:p>
-        </p:txBody>
-      </p:sp>
-      <p:sp>
-        <p:nvSpPr>
-          <p:cNvPr id="9" name="TextBox 8"/>
-          <p:cNvSpPr txBox="1"/>
-          <p:nvPr/>
-        </p:nvSpPr>
-        <p:spPr>
-          <a:xfrm>
-            <a:off x="457200" y="6355080"/>
-            <a:ext cx="10972800" cy="365760"/>
-          </a:xfrm>
-          <a:prstGeom prst="rect">
-            <a:avLst/>
-          </a:prstGeom>
-          <a:noFill/>
-        </p:spPr>
-        <p:txBody>
-          <a:bodyPr wrap="square">
-            <a:spAutoFit/>
-          </a:bodyPr>
-          <a:lstStyle/>
-          <a:p>
-            <a:pPr algn="l"/>
-            <a:r>
-              <a:rPr sz="1100" b="0" i="0">
-                <a:solidFill>
-                  <a:srgbClr val="CADCFC"/>
-                </a:solidFill>
-                <a:latin typeface="Calibri"/>
-              </a:rPr>
-              <a:t>Athey, Inoue &amp; Tsugawa (2025)  ·  Jack Chepin</a:t>
-            </a:r>
-          </a:p>
-        </p:txBody>
-      </p:sp>
-    </p:spTree>
-  </p:cSld>
-  <p:clrMapOvr>
-    <a:masterClrMapping/>
-  </p:clrMapOvr>
-</p:sld>
-</file>
-
-<file path=ppt/slides/slide9.xml><?xml version="1.0" encoding="utf-8"?>
-<p:sld xmlns:a="http://schemas.openxmlformats.org/drawingml/2006/main" xmlns:p="http://schemas.openxmlformats.org/presentationml/2006/main" xmlns:r="http://schemas.openxmlformats.org/officeDocument/2006/relationships">
+<p:sld xmlns:a="http://schemas.openxmlformats.org/drawingml/2006/main" xmlns:r="http://schemas.openxmlformats.org/officeDocument/2006/relationships" xmlns:p="http://schemas.openxmlformats.org/presentationml/2006/main">
   <p:cSld>
     <p:bg>
       <p:bgPr>
@@ -8815,7 +8684,14 @@
         <p:cNvGrpSpPr/>
         <p:nvPr/>
       </p:nvGrpSpPr>
-      <p:grpSpPr/>
+      <p:grpSpPr>
+        <a:xfrm>
+          <a:off x="0" y="0"/>
+          <a:ext cx="0" cy="0"/>
+          <a:chOff x="0" y="0"/>
+          <a:chExt cx="0" cy="0"/>
+        </a:xfrm>
+      </p:grpSpPr>
       <p:sp>
         <p:nvSpPr>
           <p:cNvPr id="2" name="Rectangle 1"/>
@@ -8856,6 +8732,7 @@
           <a:lstStyle/>
           <a:p>
             <a:pPr algn="ctr"/>
+            <a:endParaRPr/>
           </a:p>
         </p:txBody>
       </p:sp>
@@ -8902,7 +8779,7 @@
         </p:nvSpPr>
         <p:spPr>
           <a:xfrm>
-            <a:off x="365760" y="1188720"/>
+            <a:off x="365760" y="4240953"/>
             <a:ext cx="2011680" cy="1371600"/>
           </a:xfrm>
           <a:prstGeom prst="rect">
@@ -8934,6 +8811,7 @@
           <a:lstStyle/>
           <a:p>
             <a:pPr algn="ctr"/>
+            <a:endParaRPr/>
           </a:p>
         </p:txBody>
       </p:sp>
@@ -8945,7 +8823,7 @@
         </p:nvSpPr>
         <p:spPr>
           <a:xfrm>
-            <a:off x="365760" y="1325880"/>
+            <a:off x="322474" y="4434840"/>
             <a:ext cx="2011680" cy="731520"/>
           </a:xfrm>
           <a:prstGeom prst="rect">
@@ -8961,7 +8839,7 @@
           <a:p>
             <a:pPr algn="ctr"/>
             <a:r>
-              <a:rPr sz="3200" b="1" i="0">
+              <a:rPr sz="3200" b="1" i="0" dirty="0">
                 <a:solidFill>
                   <a:srgbClr val="FFFFFF"/>
                 </a:solidFill>
@@ -8980,7 +8858,7 @@
         </p:nvSpPr>
         <p:spPr>
           <a:xfrm>
-            <a:off x="365760" y="2057400"/>
+            <a:off x="322474" y="5063913"/>
             <a:ext cx="2011680" cy="365760"/>
           </a:xfrm>
           <a:prstGeom prst="rect">
@@ -8996,7 +8874,7 @@
           <a:p>
             <a:pPr algn="ctr"/>
             <a:r>
-              <a:rPr sz="1100" b="0" i="0">
+              <a:rPr sz="1100" b="0" i="0" dirty="0">
                 <a:solidFill>
                   <a:srgbClr val="CADCFC"/>
                 </a:solidFill>
@@ -9015,7 +8893,7 @@
         </p:nvSpPr>
         <p:spPr>
           <a:xfrm>
-            <a:off x="2560320" y="1417320"/>
+            <a:off x="2560320" y="4663440"/>
             <a:ext cx="9235440" cy="1005840"/>
           </a:xfrm>
           <a:prstGeom prst="rect">
@@ -9031,7 +8909,7 @@
           <a:p>
             <a:pPr algn="l"/>
             <a:r>
-              <a:rPr sz="1400" b="0" i="0">
+              <a:rPr sz="1400" b="0" i="0" dirty="0">
                 <a:solidFill>
                   <a:srgbClr val="1A1A2E"/>
                 </a:solidFill>
@@ -9051,7 +8929,7 @@
         </p:nvSpPr>
         <p:spPr>
           <a:xfrm>
-            <a:off x="365760" y="2788920"/>
+            <a:off x="365760" y="1264497"/>
             <a:ext cx="2011680" cy="1371600"/>
           </a:xfrm>
           <a:prstGeom prst="rect">
@@ -9083,6 +8961,7 @@
           <a:lstStyle/>
           <a:p>
             <a:pPr algn="ctr"/>
+            <a:endParaRPr/>
           </a:p>
         </p:txBody>
       </p:sp>
@@ -9094,7 +8973,7 @@
         </p:nvSpPr>
         <p:spPr>
           <a:xfrm>
-            <a:off x="365760" y="2926079"/>
+            <a:off x="322474" y="1473200"/>
             <a:ext cx="2011680" cy="731520"/>
           </a:xfrm>
           <a:prstGeom prst="rect">
@@ -9110,7 +8989,7 @@
           <a:p>
             <a:pPr algn="ctr"/>
             <a:r>
-              <a:rPr sz="3200" b="1" i="0">
+              <a:rPr sz="3200" b="1" i="0" dirty="0">
                 <a:solidFill>
                   <a:srgbClr val="FFFFFF"/>
                 </a:solidFill>
@@ -9129,7 +9008,7 @@
         </p:nvSpPr>
         <p:spPr>
           <a:xfrm>
-            <a:off x="365760" y="3657600"/>
+            <a:off x="322474" y="2005753"/>
             <a:ext cx="2011680" cy="365760"/>
           </a:xfrm>
           <a:prstGeom prst="rect">
@@ -9145,7 +9024,7 @@
           <a:p>
             <a:pPr algn="ctr"/>
             <a:r>
-              <a:rPr sz="1100" b="0" i="0">
+              <a:rPr sz="1100" b="0" i="0" dirty="0">
                 <a:solidFill>
                   <a:srgbClr val="CADCFC"/>
                 </a:solidFill>
@@ -9164,7 +9043,7 @@
         </p:nvSpPr>
         <p:spPr>
           <a:xfrm>
-            <a:off x="2560320" y="3017520"/>
+            <a:off x="2560320" y="1571836"/>
             <a:ext cx="9235440" cy="1005840"/>
           </a:xfrm>
           <a:prstGeom prst="rect">
@@ -9180,7 +9059,7 @@
           <a:p>
             <a:pPr algn="l"/>
             <a:r>
-              <a:rPr sz="1400" b="0" i="0">
+              <a:rPr sz="1400" b="0" i="0" dirty="0">
                 <a:solidFill>
                   <a:srgbClr val="1A1A2E"/>
                 </a:solidFill>
@@ -9194,14 +9073,14 @@
       </p:sp>
       <p:sp>
         <p:nvSpPr>
-          <p:cNvPr id="12" name="Rectangle 11"/>
+          <p:cNvPr id="16" name="Rectangle 15"/>
           <p:cNvSpPr/>
           <p:nvPr/>
         </p:nvSpPr>
         <p:spPr>
           <a:xfrm>
-            <a:off x="365760" y="4389120"/>
-            <a:ext cx="2011680" cy="1371600"/>
+            <a:off x="0" y="6309360"/>
+            <a:ext cx="12188952" cy="548640"/>
           </a:xfrm>
           <a:prstGeom prst="rect">
             <a:avLst/>
@@ -9232,19 +9111,20 @@
           <a:lstStyle/>
           <a:p>
             <a:pPr algn="ctr"/>
-          </a:p>
-        </p:txBody>
-      </p:sp>
-      <p:sp>
-        <p:nvSpPr>
-          <p:cNvPr id="13" name="TextBox 12"/>
+            <a:endParaRPr/>
+          </a:p>
+        </p:txBody>
+      </p:sp>
+      <p:sp>
+        <p:nvSpPr>
+          <p:cNvPr id="17" name="TextBox 16"/>
           <p:cNvSpPr txBox="1"/>
           <p:nvPr/>
         </p:nvSpPr>
         <p:spPr>
           <a:xfrm>
-            <a:off x="365760" y="4526280"/>
-            <a:ext cx="2011680" cy="731520"/>
+            <a:off x="457200" y="6355080"/>
+            <a:ext cx="10972800" cy="365760"/>
           </a:xfrm>
           <a:prstGeom prst="rect">
             <a:avLst/>
@@ -9257,42 +9137,7 @@
           </a:bodyPr>
           <a:lstStyle/>
           <a:p>
-            <a:pPr algn="ctr"/>
-            <a:r>
-              <a:rPr sz="3200" b="1" i="0">
-                <a:solidFill>
-                  <a:srgbClr val="FFFFFF"/>
-                </a:solidFill>
-                <a:latin typeface="Calibri"/>
-              </a:rPr>
-              <a:t>−0.066</a:t>
-            </a:r>
-          </a:p>
-        </p:txBody>
-      </p:sp>
-      <p:sp>
-        <p:nvSpPr>
-          <p:cNvPr id="14" name="TextBox 13"/>
-          <p:cNvSpPr txBox="1"/>
-          <p:nvPr/>
-        </p:nvSpPr>
-        <p:spPr>
-          <a:xfrm>
-            <a:off x="365760" y="5257800"/>
-            <a:ext cx="2011680" cy="365760"/>
-          </a:xfrm>
-          <a:prstGeom prst="rect">
-            <a:avLst/>
-          </a:prstGeom>
-          <a:noFill/>
-        </p:spPr>
-        <p:txBody>
-          <a:bodyPr wrap="square">
-            <a:spAutoFit/>
-          </a:bodyPr>
-          <a:lstStyle/>
-          <a:p>
-            <a:pPr algn="ctr"/>
+            <a:pPr algn="l"/>
             <a:r>
               <a:rPr sz="1100" b="0" i="0">
                 <a:solidFill>
@@ -9300,58 +9145,54 @@
                 </a:solidFill>
                 <a:latin typeface="Calibri"/>
               </a:rPr>
-              <a:t>Spearman ρ
-(τ_W vs τ_CL)</a:t>
-            </a:r>
-          </a:p>
-        </p:txBody>
-      </p:sp>
-      <p:sp>
-        <p:nvSpPr>
-          <p:cNvPr id="15" name="TextBox 14"/>
-          <p:cNvSpPr txBox="1"/>
-          <p:nvPr/>
-        </p:nvSpPr>
-        <p:spPr>
-          <a:xfrm>
-            <a:off x="2560320" y="4617720"/>
-            <a:ext cx="9235440" cy="1005840"/>
-          </a:xfrm>
-          <a:prstGeom prst="rect">
-            <a:avLst/>
-          </a:prstGeom>
-          <a:noFill/>
-        </p:spPr>
-        <p:txBody>
-          <a:bodyPr wrap="square">
-            <a:spAutoFit/>
-          </a:bodyPr>
-          <a:lstStyle/>
-          <a:p>
-            <a:pPr algn="l"/>
-            <a:r>
-              <a:rPr sz="1400" b="0" i="0">
-                <a:solidFill>
-                  <a:srgbClr val="1A1A2E"/>
-                </a:solidFill>
-                <a:latin typeface="Calibri"/>
-              </a:rPr>
-              <a:t>High-compliance individuals are NOT necessarily those with the highest
-benefit — the two dimensions of heterogeneity are largely independent.</a:t>
-            </a:r>
-          </a:p>
-        </p:txBody>
-      </p:sp>
-      <p:sp>
-        <p:nvSpPr>
-          <p:cNvPr id="16" name="Rectangle 15"/>
+              <a:t>Athey, Inoue &amp; Tsugawa (2025)  ·  Jack Chepin</a:t>
+            </a:r>
+          </a:p>
+        </p:txBody>
+      </p:sp>
+    </p:spTree>
+  </p:cSld>
+  <p:clrMapOvr>
+    <a:masterClrMapping/>
+  </p:clrMapOvr>
+</p:sld>
+</file>
+
+<file path=ppt/slides/slide9.xml><?xml version="1.0" encoding="utf-8"?>
+<p:sld xmlns:a="http://schemas.openxmlformats.org/drawingml/2006/main" xmlns:r="http://schemas.openxmlformats.org/officeDocument/2006/relationships" xmlns:p="http://schemas.openxmlformats.org/presentationml/2006/main">
+  <p:cSld>
+    <p:bg>
+      <p:bgPr>
+        <a:solidFill>
+          <a:srgbClr val="F4F7FF"/>
+        </a:solidFill>
+        <a:effectLst/>
+      </p:bgPr>
+    </p:bg>
+    <p:spTree>
+      <p:nvGrpSpPr>
+        <p:cNvPr id="1" name=""/>
+        <p:cNvGrpSpPr/>
+        <p:nvPr/>
+      </p:nvGrpSpPr>
+      <p:grpSpPr>
+        <a:xfrm>
+          <a:off x="0" y="0"/>
+          <a:ext cx="0" cy="0"/>
+          <a:chOff x="0" y="0"/>
+          <a:chExt cx="0" cy="0"/>
+        </a:xfrm>
+      </p:grpSpPr>
+      <p:sp>
+        <p:nvSpPr>
+          <p:cNvPr id="2" name="Rectangle 1"/>
           <p:cNvSpPr/>
           <p:nvPr/>
         </p:nvSpPr>
         <p:spPr>
           <a:xfrm>
-            <a:off x="0" y="6309360"/>
-            <a:ext cx="12188952" cy="548640"/>
+            <a:off x="0" y="0"/>
+            <a:ext cx="12188952" cy="914400"/>
           </a:xfrm>
           <a:prstGeom prst="rect">
             <a:avLst/>
@@ -9382,6 +9223,404 @@
           <a:lstStyle/>
           <a:p>
             <a:pPr algn="ctr"/>
+            <a:endParaRPr/>
+          </a:p>
+        </p:txBody>
+      </p:sp>
+      <p:sp>
+        <p:nvSpPr>
+          <p:cNvPr id="3" name="TextBox 2"/>
+          <p:cNvSpPr txBox="1"/>
+          <p:nvPr/>
+        </p:nvSpPr>
+        <p:spPr>
+          <a:xfrm>
+            <a:off x="457200" y="137160"/>
+            <a:ext cx="10972800" cy="640080"/>
+          </a:xfrm>
+          <a:prstGeom prst="rect">
+            <a:avLst/>
+          </a:prstGeom>
+          <a:noFill/>
+        </p:spPr>
+        <p:txBody>
+          <a:bodyPr wrap="square">
+            <a:spAutoFit/>
+          </a:bodyPr>
+          <a:lstStyle/>
+          <a:p>
+            <a:pPr algn="l"/>
+            <a:r>
+              <a:rPr sz="2600" b="1" i="0">
+                <a:solidFill>
+                  <a:srgbClr val="FFFFFF"/>
+                </a:solidFill>
+                <a:latin typeface="Calibri"/>
+              </a:rPr>
+              <a:t>Replication Challenges</a:t>
+            </a:r>
+          </a:p>
+        </p:txBody>
+      </p:sp>
+      <p:sp>
+        <p:nvSpPr>
+          <p:cNvPr id="4" name="Rectangle 3"/>
+          <p:cNvSpPr/>
+          <p:nvPr/>
+        </p:nvSpPr>
+        <p:spPr>
+          <a:xfrm>
+            <a:off x="365760" y="1143000"/>
+            <a:ext cx="11338560" cy="1325880"/>
+          </a:xfrm>
+          <a:prstGeom prst="rect">
+            <a:avLst/>
+          </a:prstGeom>
+          <a:solidFill>
+            <a:srgbClr val="FFFFFF"/>
+          </a:solidFill>
+          <a:ln>
+            <a:noFill/>
+          </a:ln>
+        </p:spPr>
+        <p:style>
+          <a:lnRef idx="1">
+            <a:schemeClr val="accent1"/>
+          </a:lnRef>
+          <a:fillRef idx="3">
+            <a:schemeClr val="accent1"/>
+          </a:fillRef>
+          <a:effectRef idx="2">
+            <a:schemeClr val="accent1"/>
+          </a:effectRef>
+          <a:fontRef idx="minor">
+            <a:schemeClr val="lt1"/>
+          </a:fontRef>
+        </p:style>
+        <p:txBody>
+          <a:bodyPr rtlCol="0" anchor="ctr"/>
+          <a:lstStyle/>
+          <a:p>
+            <a:pPr algn="ctr"/>
+            <a:endParaRPr/>
+          </a:p>
+        </p:txBody>
+      </p:sp>
+      <p:sp>
+        <p:nvSpPr>
+          <p:cNvPr id="5" name="Rectangle 4"/>
+          <p:cNvSpPr/>
+          <p:nvPr/>
+        </p:nvSpPr>
+        <p:spPr>
+          <a:xfrm>
+            <a:off x="365760" y="1143000"/>
+            <a:ext cx="109728" cy="1325880"/>
+          </a:xfrm>
+          <a:prstGeom prst="rect">
+            <a:avLst/>
+          </a:prstGeom>
+          <a:solidFill>
+            <a:srgbClr val="4A90D9"/>
+          </a:solidFill>
+          <a:ln>
+            <a:noFill/>
+          </a:ln>
+        </p:spPr>
+        <p:style>
+          <a:lnRef idx="1">
+            <a:schemeClr val="accent1"/>
+          </a:lnRef>
+          <a:fillRef idx="3">
+            <a:schemeClr val="accent1"/>
+          </a:fillRef>
+          <a:effectRef idx="2">
+            <a:schemeClr val="accent1"/>
+          </a:effectRef>
+          <a:fontRef idx="minor">
+            <a:schemeClr val="lt1"/>
+          </a:fontRef>
+        </p:style>
+        <p:txBody>
+          <a:bodyPr rtlCol="0" anchor="ctr"/>
+          <a:lstStyle/>
+          <a:p>
+            <a:pPr algn="ctr"/>
+            <a:endParaRPr/>
+          </a:p>
+        </p:txBody>
+      </p:sp>
+      <p:sp>
+        <p:nvSpPr>
+          <p:cNvPr id="6" name="TextBox 5"/>
+          <p:cNvSpPr txBox="1"/>
+          <p:nvPr/>
+        </p:nvSpPr>
+        <p:spPr>
+          <a:xfrm>
+            <a:off x="594360" y="1234440"/>
+            <a:ext cx="10515600" cy="365760"/>
+          </a:xfrm>
+          <a:prstGeom prst="rect">
+            <a:avLst/>
+          </a:prstGeom>
+          <a:noFill/>
+        </p:spPr>
+        <p:txBody>
+          <a:bodyPr wrap="square">
+            <a:spAutoFit/>
+          </a:bodyPr>
+          <a:lstStyle/>
+          <a:p>
+            <a:pPr algn="l"/>
+            <a:r>
+              <a:rPr sz="1400" b="1" i="0">
+                <a:solidFill>
+                  <a:srgbClr val="1E2761"/>
+                </a:solidFill>
+                <a:latin typeface="Calibri"/>
+              </a:rPr>
+              <a:t>1.  Missing Data Handling</a:t>
+            </a:r>
+          </a:p>
+        </p:txBody>
+      </p:sp>
+      <p:sp>
+        <p:nvSpPr>
+          <p:cNvPr id="7" name="TextBox 6"/>
+          <p:cNvSpPr txBox="1"/>
+          <p:nvPr/>
+        </p:nvSpPr>
+        <p:spPr>
+          <a:xfrm>
+            <a:off x="594360" y="1645920"/>
+            <a:ext cx="10515600" cy="731520"/>
+          </a:xfrm>
+          <a:prstGeom prst="rect">
+            <a:avLst/>
+          </a:prstGeom>
+          <a:noFill/>
+        </p:spPr>
+        <p:txBody>
+          <a:bodyPr wrap="square">
+            <a:spAutoFit/>
+          </a:bodyPr>
+          <a:lstStyle/>
+          <a:p>
+            <a:pPr algn="l"/>
+            <a:r>
+              <a:rPr sz="1300" b="0" i="0">
+                <a:solidFill>
+                  <a:srgbClr val="1A1A2E"/>
+                </a:solidFill>
+                <a:latin typeface="Calibri"/>
+              </a:rPr>
+              <a:t>na.omit() dropped 5,400 rows (12,208 → 6,816). Paper specifies missRanger
+imputation in Appendix A.5 — easy to miss, large effect on results.</a:t>
+            </a:r>
+          </a:p>
+        </p:txBody>
+      </p:sp>
+      <p:sp>
+        <p:nvSpPr>
+          <p:cNvPr id="8" name="Rectangle 7"/>
+          <p:cNvSpPr/>
+          <p:nvPr/>
+        </p:nvSpPr>
+        <p:spPr>
+          <a:xfrm>
+            <a:off x="365760" y="2651760"/>
+            <a:ext cx="11338560" cy="1325880"/>
+          </a:xfrm>
+          <a:prstGeom prst="rect">
+            <a:avLst/>
+          </a:prstGeom>
+          <a:solidFill>
+            <a:srgbClr val="FFFFFF"/>
+          </a:solidFill>
+          <a:ln>
+            <a:noFill/>
+          </a:ln>
+        </p:spPr>
+        <p:style>
+          <a:lnRef idx="1">
+            <a:schemeClr val="accent1"/>
+          </a:lnRef>
+          <a:fillRef idx="3">
+            <a:schemeClr val="accent1"/>
+          </a:fillRef>
+          <a:effectRef idx="2">
+            <a:schemeClr val="accent1"/>
+          </a:effectRef>
+          <a:fontRef idx="minor">
+            <a:schemeClr val="lt1"/>
+          </a:fontRef>
+        </p:style>
+        <p:txBody>
+          <a:bodyPr rtlCol="0" anchor="ctr"/>
+          <a:lstStyle/>
+          <a:p>
+            <a:pPr algn="ctr"/>
+            <a:endParaRPr/>
+          </a:p>
+        </p:txBody>
+      </p:sp>
+      <p:sp>
+        <p:nvSpPr>
+          <p:cNvPr id="9" name="Rectangle 8"/>
+          <p:cNvSpPr/>
+          <p:nvPr/>
+        </p:nvSpPr>
+        <p:spPr>
+          <a:xfrm>
+            <a:off x="365760" y="2651760"/>
+            <a:ext cx="109728" cy="1325880"/>
+          </a:xfrm>
+          <a:prstGeom prst="rect">
+            <a:avLst/>
+          </a:prstGeom>
+          <a:solidFill>
+            <a:srgbClr val="4A90D9"/>
+          </a:solidFill>
+          <a:ln>
+            <a:noFill/>
+          </a:ln>
+        </p:spPr>
+        <p:style>
+          <a:lnRef idx="1">
+            <a:schemeClr val="accent1"/>
+          </a:lnRef>
+          <a:fillRef idx="3">
+            <a:schemeClr val="accent1"/>
+          </a:fillRef>
+          <a:effectRef idx="2">
+            <a:schemeClr val="accent1"/>
+          </a:effectRef>
+          <a:fontRef idx="minor">
+            <a:schemeClr val="lt1"/>
+          </a:fontRef>
+        </p:style>
+        <p:txBody>
+          <a:bodyPr rtlCol="0" anchor="ctr"/>
+          <a:lstStyle/>
+          <a:p>
+            <a:pPr algn="ctr"/>
+            <a:endParaRPr/>
+          </a:p>
+        </p:txBody>
+      </p:sp>
+      <p:sp>
+        <p:nvSpPr>
+          <p:cNvPr id="10" name="TextBox 9"/>
+          <p:cNvSpPr txBox="1"/>
+          <p:nvPr/>
+        </p:nvSpPr>
+        <p:spPr>
+          <a:xfrm>
+            <a:off x="594360" y="2743200"/>
+            <a:ext cx="10515600" cy="365760"/>
+          </a:xfrm>
+          <a:prstGeom prst="rect">
+            <a:avLst/>
+          </a:prstGeom>
+          <a:noFill/>
+        </p:spPr>
+        <p:txBody>
+          <a:bodyPr wrap="square">
+            <a:spAutoFit/>
+          </a:bodyPr>
+          <a:lstStyle/>
+          <a:p>
+            <a:pPr algn="l"/>
+            <a:r>
+              <a:rPr sz="1400" b="1" i="0">
+                <a:solidFill>
+                  <a:srgbClr val="1E2761"/>
+                </a:solidFill>
+                <a:latin typeface="Calibri"/>
+              </a:rPr>
+              <a:t>2.  Variable Name Mapping</a:t>
+            </a:r>
+          </a:p>
+        </p:txBody>
+      </p:sp>
+      <p:sp>
+        <p:nvSpPr>
+          <p:cNvPr id="11" name="TextBox 10"/>
+          <p:cNvSpPr txBox="1"/>
+          <p:nvPr/>
+        </p:nvSpPr>
+        <p:spPr>
+          <a:xfrm>
+            <a:off x="594360" y="3154680"/>
+            <a:ext cx="10515600" cy="731520"/>
+          </a:xfrm>
+          <a:prstGeom prst="rect">
+            <a:avLst/>
+          </a:prstGeom>
+          <a:noFill/>
+        </p:spPr>
+        <p:txBody>
+          <a:bodyPr wrap="square">
+            <a:spAutoFit/>
+          </a:bodyPr>
+          <a:lstStyle/>
+          <a:p>
+            <a:pPr algn="l"/>
+            <a:r>
+              <a:rPr sz="1300" b="0" i="0">
+                <a:solidFill>
+                  <a:srgbClr val="1A1A2E"/>
+                </a:solidFill>
+                <a:latin typeface="Calibri"/>
+              </a:rPr>
+              <a:t>Covariates described in prose, not as variable names. Required careful
+cross-referencing between dataset columns and paper description.</a:t>
+            </a:r>
+          </a:p>
+        </p:txBody>
+      </p:sp>
+      <p:sp>
+        <p:nvSpPr>
+          <p:cNvPr id="16" name="Rectangle 15"/>
+          <p:cNvSpPr/>
+          <p:nvPr/>
+        </p:nvSpPr>
+        <p:spPr>
+          <a:xfrm>
+            <a:off x="0" y="6309360"/>
+            <a:ext cx="12188952" cy="548640"/>
+          </a:xfrm>
+          <a:prstGeom prst="rect">
+            <a:avLst/>
+          </a:prstGeom>
+          <a:solidFill>
+            <a:srgbClr val="1E2761"/>
+          </a:solidFill>
+          <a:ln>
+            <a:noFill/>
+          </a:ln>
+        </p:spPr>
+        <p:style>
+          <a:lnRef idx="1">
+            <a:schemeClr val="accent1"/>
+          </a:lnRef>
+          <a:fillRef idx="3">
+            <a:schemeClr val="accent1"/>
+          </a:fillRef>
+          <a:effectRef idx="2">
+            <a:schemeClr val="accent1"/>
+          </a:effectRef>
+          <a:fontRef idx="minor">
+            <a:schemeClr val="lt1"/>
+          </a:fontRef>
+        </p:style>
+        <p:txBody>
+          <a:bodyPr rtlCol="0" anchor="ctr"/>
+          <a:lstStyle/>
+          <a:p>
+            <a:pPr algn="ctr"/>
+            <a:endParaRPr/>
           </a:p>
         </p:txBody>
       </p:sp>
